--- a/军民融合/ppt/研究方案二C.pptx
+++ b/军民融合/ppt/研究方案二C.pptx
@@ -203,7 +203,7 @@
           <a:p>
             <a:fld id="{8C4DB9AA-118E-4B72-A2FA-789A5CD0C03A}" type="datetimeFigureOut">
               <a:rPr lang="zh-CN" altLang="en-US" smtClean="0"/>
-              <a:t>2026/6/17</a:t>
+              <a:t>2026/6/18</a:t>
             </a:fld>
             <a:endParaRPr lang="zh-CN" altLang="en-US"/>
           </a:p>
@@ -678,7 +678,7 @@
           <a:p>
             <a:fld id="{6740FC04-A88A-4BD5-84A0-C23ADC67066C}" type="datetimeFigureOut">
               <a:rPr lang="zh-CN" altLang="en-US" smtClean="0"/>
-              <a:t>2026/6/17</a:t>
+              <a:t>2026/6/18</a:t>
             </a:fld>
             <a:endParaRPr lang="zh-CN" altLang="en-US"/>
           </a:p>
@@ -876,7 +876,7 @@
           <a:p>
             <a:fld id="{6740FC04-A88A-4BD5-84A0-C23ADC67066C}" type="datetimeFigureOut">
               <a:rPr lang="zh-CN" altLang="en-US" smtClean="0"/>
-              <a:t>2026/6/17</a:t>
+              <a:t>2026/6/18</a:t>
             </a:fld>
             <a:endParaRPr lang="zh-CN" altLang="en-US"/>
           </a:p>
@@ -1084,7 +1084,7 @@
           <a:p>
             <a:fld id="{6740FC04-A88A-4BD5-84A0-C23ADC67066C}" type="datetimeFigureOut">
               <a:rPr lang="zh-CN" altLang="en-US" smtClean="0"/>
-              <a:t>2026/6/17</a:t>
+              <a:t>2026/6/18</a:t>
             </a:fld>
             <a:endParaRPr lang="zh-CN" altLang="en-US"/>
           </a:p>
@@ -1282,7 +1282,7 @@
           <a:p>
             <a:fld id="{6740FC04-A88A-4BD5-84A0-C23ADC67066C}" type="datetimeFigureOut">
               <a:rPr lang="zh-CN" altLang="en-US" smtClean="0"/>
-              <a:t>2026/6/17</a:t>
+              <a:t>2026/6/18</a:t>
             </a:fld>
             <a:endParaRPr lang="zh-CN" altLang="en-US"/>
           </a:p>
@@ -1557,7 +1557,7 @@
           <a:p>
             <a:fld id="{6740FC04-A88A-4BD5-84A0-C23ADC67066C}" type="datetimeFigureOut">
               <a:rPr lang="zh-CN" altLang="en-US" smtClean="0"/>
-              <a:t>2026/6/17</a:t>
+              <a:t>2026/6/18</a:t>
             </a:fld>
             <a:endParaRPr lang="zh-CN" altLang="en-US"/>
           </a:p>
@@ -1822,7 +1822,7 @@
           <a:p>
             <a:fld id="{6740FC04-A88A-4BD5-84A0-C23ADC67066C}" type="datetimeFigureOut">
               <a:rPr lang="zh-CN" altLang="en-US" smtClean="0"/>
-              <a:t>2026/6/17</a:t>
+              <a:t>2026/6/18</a:t>
             </a:fld>
             <a:endParaRPr lang="zh-CN" altLang="en-US"/>
           </a:p>
@@ -2234,7 +2234,7 @@
           <a:p>
             <a:fld id="{6740FC04-A88A-4BD5-84A0-C23ADC67066C}" type="datetimeFigureOut">
               <a:rPr lang="zh-CN" altLang="en-US" smtClean="0"/>
-              <a:t>2026/6/17</a:t>
+              <a:t>2026/6/18</a:t>
             </a:fld>
             <a:endParaRPr lang="zh-CN" altLang="en-US"/>
           </a:p>
@@ -2375,7 +2375,7 @@
           <a:p>
             <a:fld id="{6740FC04-A88A-4BD5-84A0-C23ADC67066C}" type="datetimeFigureOut">
               <a:rPr lang="zh-CN" altLang="en-US" smtClean="0"/>
-              <a:t>2026/6/17</a:t>
+              <a:t>2026/6/18</a:t>
             </a:fld>
             <a:endParaRPr lang="zh-CN" altLang="en-US"/>
           </a:p>
@@ -2488,7 +2488,7 @@
           <a:p>
             <a:fld id="{6740FC04-A88A-4BD5-84A0-C23ADC67066C}" type="datetimeFigureOut">
               <a:rPr lang="zh-CN" altLang="en-US" smtClean="0"/>
-              <a:t>2026/6/17</a:t>
+              <a:t>2026/6/18</a:t>
             </a:fld>
             <a:endParaRPr lang="zh-CN" altLang="en-US"/>
           </a:p>
@@ -2799,7 +2799,7 @@
           <a:p>
             <a:fld id="{6740FC04-A88A-4BD5-84A0-C23ADC67066C}" type="datetimeFigureOut">
               <a:rPr lang="zh-CN" altLang="en-US" smtClean="0"/>
-              <a:t>2026/6/17</a:t>
+              <a:t>2026/6/18</a:t>
             </a:fld>
             <a:endParaRPr lang="zh-CN" altLang="en-US"/>
           </a:p>
@@ -3087,7 +3087,7 @@
           <a:p>
             <a:fld id="{6740FC04-A88A-4BD5-84A0-C23ADC67066C}" type="datetimeFigureOut">
               <a:rPr lang="zh-CN" altLang="en-US" smtClean="0"/>
-              <a:t>2026/6/17</a:t>
+              <a:t>2026/6/18</a:t>
             </a:fld>
             <a:endParaRPr lang="zh-CN" altLang="en-US"/>
           </a:p>
@@ -3328,7 +3328,7 @@
           <a:p>
             <a:fld id="{6740FC04-A88A-4BD5-84A0-C23ADC67066C}" type="datetimeFigureOut">
               <a:rPr lang="zh-CN" altLang="en-US" smtClean="0"/>
-              <a:t>2026/6/17</a:t>
+              <a:t>2026/6/18</a:t>
             </a:fld>
             <a:endParaRPr lang="zh-CN" altLang="en-US"/>
           </a:p>
@@ -3745,12 +3745,697 @@
           <a:chExt cx="0" cy="0"/>
         </a:xfrm>
       </p:grpSpPr>
+      <p:sp>
+        <p:nvSpPr>
+          <p:cNvPr id="8" name="圆角矩形 17">
+            <a:extLst>
+              <a:ext uri="{FF2B5EF4-FFF2-40B4-BE49-F238E27FC236}">
+                <a16:creationId xmlns:a16="http://schemas.microsoft.com/office/drawing/2014/main" id="{D0828F5F-2BEB-6C0F-ADA1-EBCE3BC9282C}"/>
+              </a:ext>
+            </a:extLst>
+          </p:cNvPr>
+          <p:cNvSpPr>
+            <a:spLocks noGrp="1"/>
+          </p:cNvSpPr>
+          <p:nvPr/>
+        </p:nvSpPr>
+        <p:spPr>
+          <a:xfrm>
+            <a:off x="5585828" y="1180166"/>
+            <a:ext cx="4729560" cy="2650537"/>
+          </a:xfrm>
+          <a:prstGeom prst="roundRect">
+            <a:avLst>
+              <a:gd name="adj" fmla="val 0"/>
+            </a:avLst>
+          </a:prstGeom>
+          <a:solidFill>
+            <a:srgbClr val="DAE3F3"/>
+          </a:solidFill>
+          <a:ln w="19050">
+            <a:solidFill>
+              <a:srgbClr val="2E54A1"/>
+            </a:solidFill>
+          </a:ln>
+        </p:spPr>
+        <p:style>
+          <a:lnRef idx="2">
+            <a:schemeClr val="accent1">
+              <a:lumMod val="75000"/>
+            </a:schemeClr>
+          </a:lnRef>
+          <a:fillRef idx="1">
+            <a:schemeClr val="accent1"/>
+          </a:fillRef>
+          <a:effectRef idx="0">
+            <a:srgbClr val="FFFFFF"/>
+          </a:effectRef>
+          <a:fontRef idx="minor">
+            <a:schemeClr val="lt1"/>
+          </a:fontRef>
+        </p:style>
+        <p:txBody>
+          <a:bodyPr anchor="ctr"/>
+          <a:lstStyle/>
+          <a:p>
+            <a:pPr algn="ctr">
+              <a:buNone/>
+            </a:pPr>
+            <a:endParaRPr/>
+          </a:p>
+        </p:txBody>
+      </p:sp>
+      <p:sp>
+        <p:nvSpPr>
+          <p:cNvPr id="7" name="圆角矩形 16">
+            <a:extLst>
+              <a:ext uri="{FF2B5EF4-FFF2-40B4-BE49-F238E27FC236}">
+                <a16:creationId xmlns:a16="http://schemas.microsoft.com/office/drawing/2014/main" id="{65676D9B-09DB-6DF9-1AD6-B6F3E25873FF}"/>
+              </a:ext>
+            </a:extLst>
+          </p:cNvPr>
+          <p:cNvSpPr>
+            <a:spLocks noGrp="1"/>
+          </p:cNvSpPr>
+          <p:nvPr/>
+        </p:nvSpPr>
+        <p:spPr>
+          <a:xfrm>
+            <a:off x="5585828" y="4126957"/>
+            <a:ext cx="4729560" cy="2190173"/>
+          </a:xfrm>
+          <a:prstGeom prst="roundRect">
+            <a:avLst>
+              <a:gd name="adj" fmla="val 0"/>
+            </a:avLst>
+          </a:prstGeom>
+          <a:solidFill>
+            <a:schemeClr val="accent2">
+              <a:lumMod val="20000"/>
+              <a:lumOff val="80000"/>
+            </a:schemeClr>
+          </a:solidFill>
+          <a:ln w="19050">
+            <a:solidFill>
+              <a:schemeClr val="accent2">
+                <a:lumMod val="75000"/>
+              </a:schemeClr>
+            </a:solidFill>
+          </a:ln>
+        </p:spPr>
+        <p:style>
+          <a:lnRef idx="2">
+            <a:schemeClr val="accent1">
+              <a:lumMod val="75000"/>
+            </a:schemeClr>
+          </a:lnRef>
+          <a:fillRef idx="1">
+            <a:schemeClr val="accent1"/>
+          </a:fillRef>
+          <a:effectRef idx="0">
+            <a:srgbClr val="FFFFFF"/>
+          </a:effectRef>
+          <a:fontRef idx="minor">
+            <a:schemeClr val="lt1"/>
+          </a:fontRef>
+        </p:style>
+        <p:txBody>
+          <a:bodyPr anchor="ctr"/>
+          <a:lstStyle/>
+          <a:p>
+            <a:pPr algn="ctr">
+              <a:buNone/>
+            </a:pPr>
+            <a:endParaRPr/>
+          </a:p>
+        </p:txBody>
+      </p:sp>
+      <p:sp>
+        <p:nvSpPr>
+          <p:cNvPr id="5" name="圆角矩形 17">
+            <a:extLst>
+              <a:ext uri="{FF2B5EF4-FFF2-40B4-BE49-F238E27FC236}">
+                <a16:creationId xmlns:a16="http://schemas.microsoft.com/office/drawing/2014/main" id="{08E9D8CC-2B26-0FE4-9934-D9535CBAD288}"/>
+              </a:ext>
+            </a:extLst>
+          </p:cNvPr>
+          <p:cNvSpPr>
+            <a:spLocks noGrp="1"/>
+          </p:cNvSpPr>
+          <p:nvPr/>
+        </p:nvSpPr>
+        <p:spPr>
+          <a:xfrm>
+            <a:off x="2935730" y="2539822"/>
+            <a:ext cx="2212072" cy="3777308"/>
+          </a:xfrm>
+          <a:prstGeom prst="roundRect">
+            <a:avLst>
+              <a:gd name="adj" fmla="val 0"/>
+            </a:avLst>
+          </a:prstGeom>
+          <a:solidFill>
+            <a:srgbClr val="DAE3F3"/>
+          </a:solidFill>
+          <a:ln w="19050">
+            <a:solidFill>
+              <a:srgbClr val="2E54A1"/>
+            </a:solidFill>
+          </a:ln>
+        </p:spPr>
+        <p:style>
+          <a:lnRef idx="2">
+            <a:schemeClr val="accent1">
+              <a:lumMod val="75000"/>
+            </a:schemeClr>
+          </a:lnRef>
+          <a:fillRef idx="1">
+            <a:schemeClr val="accent1"/>
+          </a:fillRef>
+          <a:effectRef idx="0">
+            <a:srgbClr val="FFFFFF"/>
+          </a:effectRef>
+          <a:fontRef idx="minor">
+            <a:schemeClr val="lt1"/>
+          </a:fontRef>
+        </p:style>
+        <p:txBody>
+          <a:bodyPr anchor="ctr"/>
+          <a:lstStyle/>
+          <a:p>
+            <a:pPr algn="ctr">
+              <a:buNone/>
+            </a:pPr>
+            <a:endParaRPr/>
+          </a:p>
+        </p:txBody>
+      </p:sp>
+      <p:sp>
+        <p:nvSpPr>
+          <p:cNvPr id="81" name="圆角矩形 80"/>
+          <p:cNvSpPr/>
+          <p:nvPr/>
+        </p:nvSpPr>
+        <p:spPr>
+          <a:xfrm>
+            <a:off x="1556788" y="398634"/>
+            <a:ext cx="9068344" cy="6232974"/>
+          </a:xfrm>
+          <a:prstGeom prst="roundRect">
+            <a:avLst>
+              <a:gd name="adj" fmla="val 3556"/>
+            </a:avLst>
+          </a:prstGeom>
+          <a:noFill/>
+          <a:ln w="25400" cmpd="sng">
+            <a:solidFill>
+              <a:schemeClr val="accent1">
+                <a:shade val="50000"/>
+              </a:schemeClr>
+            </a:solidFill>
+            <a:prstDash val="dash"/>
+          </a:ln>
+        </p:spPr>
+        <p:style>
+          <a:lnRef idx="2">
+            <a:schemeClr val="accent1">
+              <a:lumMod val="75000"/>
+            </a:schemeClr>
+          </a:lnRef>
+          <a:fillRef idx="1">
+            <a:schemeClr val="accent1"/>
+          </a:fillRef>
+          <a:effectRef idx="0">
+            <a:srgbClr val="FFFFFF"/>
+          </a:effectRef>
+          <a:fontRef idx="minor">
+            <a:schemeClr val="lt1"/>
+          </a:fontRef>
+        </p:style>
+        <p:txBody>
+          <a:bodyPr rtlCol="0" anchor="ctr"/>
+          <a:lstStyle/>
+          <a:p>
+            <a:pPr algn="ctr"/>
+            <a:endParaRPr lang="zh-CN" altLang="en-US" sz="1633" dirty="0"/>
+          </a:p>
+        </p:txBody>
+      </p:sp>
+      <p:sp>
+        <p:nvSpPr>
+          <p:cNvPr id="94" name="矩形: 圆角 1"/>
+          <p:cNvSpPr/>
+          <p:nvPr/>
+        </p:nvSpPr>
+        <p:spPr>
+          <a:xfrm>
+            <a:off x="1721830" y="817431"/>
+            <a:ext cx="871003" cy="5654034"/>
+          </a:xfrm>
+          <a:prstGeom prst="roundRect">
+            <a:avLst>
+              <a:gd name="adj" fmla="val 0"/>
+            </a:avLst>
+          </a:prstGeom>
+          <a:solidFill>
+            <a:srgbClr val="DAE3F5"/>
+          </a:solidFill>
+          <a:ln>
+            <a:noFill/>
+          </a:ln>
+        </p:spPr>
+        <p:style>
+          <a:lnRef idx="2">
+            <a:schemeClr val="accent1">
+              <a:shade val="15000"/>
+            </a:schemeClr>
+          </a:lnRef>
+          <a:fillRef idx="1">
+            <a:schemeClr val="accent1"/>
+          </a:fillRef>
+          <a:effectRef idx="0">
+            <a:schemeClr val="accent1"/>
+          </a:effectRef>
+          <a:fontRef idx="minor">
+            <a:schemeClr val="lt1"/>
+          </a:fontRef>
+        </p:style>
+        <p:txBody>
+          <a:bodyPr rtlCol="0" anchor="ctr"/>
+          <a:lstStyle/>
+          <a:p>
+            <a:pPr algn="ctr"/>
+            <a:endParaRPr lang="zh-CN" altLang="en-US" sz="1633" dirty="0">
+              <a:latin typeface="微软雅黑" panose="020B0503020204020204" charset="-122"/>
+              <a:ea typeface="微软雅黑" panose="020B0503020204020204" charset="-122"/>
+            </a:endParaRPr>
+          </a:p>
+        </p:txBody>
+      </p:sp>
+      <p:sp>
+        <p:nvSpPr>
+          <p:cNvPr id="4" name="矩形: 圆角 3"/>
+          <p:cNvSpPr/>
+          <p:nvPr/>
+        </p:nvSpPr>
+        <p:spPr>
+          <a:xfrm>
+            <a:off x="3038704" y="204502"/>
+            <a:ext cx="6104513" cy="433197"/>
+          </a:xfrm>
+          <a:prstGeom prst="roundRect">
+            <a:avLst>
+              <a:gd name="adj" fmla="val 50000"/>
+            </a:avLst>
+          </a:prstGeom>
+          <a:solidFill>
+            <a:srgbClr val="2E54A1"/>
+          </a:solidFill>
+          <a:ln>
+            <a:noFill/>
+          </a:ln>
+        </p:spPr>
+        <p:style>
+          <a:lnRef idx="2">
+            <a:schemeClr val="accent1">
+              <a:shade val="15000"/>
+            </a:schemeClr>
+          </a:lnRef>
+          <a:fillRef idx="1">
+            <a:schemeClr val="accent1"/>
+          </a:fillRef>
+          <a:effectRef idx="0">
+            <a:schemeClr val="accent1"/>
+          </a:effectRef>
+          <a:fontRef idx="minor">
+            <a:schemeClr val="lt1"/>
+          </a:fontRef>
+        </p:style>
+        <p:txBody>
+          <a:bodyPr rtlCol="0" anchor="ctr"/>
+          <a:lstStyle/>
+          <a:p>
+            <a:pPr algn="ctr" defTabSz="829544">
+              <a:defRPr/>
+            </a:pPr>
+            <a:r>
+              <a:rPr lang="zh-CN" altLang="en-US" sz="1633" b="1" dirty="0">
+                <a:solidFill>
+                  <a:prstClr val="white"/>
+                </a:solidFill>
+                <a:latin typeface="微软雅黑" panose="020B0503020204020204" charset="-122"/>
+                <a:ea typeface="微软雅黑" panose="020B0503020204020204" charset="-122"/>
+                <a:cs typeface="Times New Roman" panose="02020603050405020304" pitchFamily="18" charset="0"/>
+                <a:sym typeface="+mn-ea"/>
+              </a:rPr>
+              <a:t>链上链下协同的可追溯频谱数据可信管理办法</a:t>
+            </a:r>
+            <a:endParaRPr lang="zh-CN" altLang="en-US" sz="1633" b="1" dirty="0">
+              <a:latin typeface="微软雅黑" panose="020B0503020204020204" charset="-122"/>
+              <a:ea typeface="微软雅黑" panose="020B0503020204020204" charset="-122"/>
+              <a:cs typeface="微软雅黑" panose="020B0503020204020204" charset="-122"/>
+            </a:endParaRPr>
+          </a:p>
+        </p:txBody>
+      </p:sp>
+      <p:sp>
+        <p:nvSpPr>
+          <p:cNvPr id="99" name="箭头: 燕尾形 1071"/>
+          <p:cNvSpPr/>
+          <p:nvPr/>
+        </p:nvSpPr>
+        <p:spPr>
+          <a:xfrm>
+            <a:off x="5248759" y="3466445"/>
+            <a:ext cx="251162" cy="356005"/>
+          </a:xfrm>
+          <a:prstGeom prst="notchedRightArrow">
+            <a:avLst>
+              <a:gd name="adj1" fmla="val 33809"/>
+              <a:gd name="adj2" fmla="val 52390"/>
+            </a:avLst>
+          </a:prstGeom>
+          <a:gradFill>
+            <a:gsLst>
+              <a:gs pos="0">
+                <a:schemeClr val="accent1">
+                  <a:lumMod val="5000"/>
+                  <a:lumOff val="95000"/>
+                  <a:alpha val="0"/>
+                </a:schemeClr>
+              </a:gs>
+              <a:gs pos="74000">
+                <a:srgbClr val="2E54A1"/>
+              </a:gs>
+              <a:gs pos="100000">
+                <a:srgbClr val="2E54A1"/>
+              </a:gs>
+            </a:gsLst>
+            <a:lin ang="0" scaled="0"/>
+          </a:gradFill>
+          <a:ln>
+            <a:noFill/>
+          </a:ln>
+        </p:spPr>
+        <p:style>
+          <a:lnRef idx="2">
+            <a:schemeClr val="accent1">
+              <a:lumMod val="75000"/>
+            </a:schemeClr>
+          </a:lnRef>
+          <a:fillRef idx="1">
+            <a:schemeClr val="accent1"/>
+          </a:fillRef>
+          <a:effectRef idx="0">
+            <a:srgbClr val="FFFFFF"/>
+          </a:effectRef>
+          <a:fontRef idx="minor">
+            <a:schemeClr val="lt1"/>
+          </a:fontRef>
+        </p:style>
+        <p:txBody>
+          <a:bodyPr rtlCol="0" anchor="ctr"/>
+          <a:lstStyle/>
+          <a:p>
+            <a:pPr algn="ctr"/>
+            <a:endParaRPr lang="zh-CN" altLang="en-US" sz="1633"/>
+          </a:p>
+        </p:txBody>
+      </p:sp>
+      <p:sp>
+        <p:nvSpPr>
+          <p:cNvPr id="13" name="文本框 12"/>
+          <p:cNvSpPr txBox="1"/>
+          <p:nvPr/>
+        </p:nvSpPr>
+        <p:spPr>
+          <a:xfrm>
+            <a:off x="2935729" y="980308"/>
+            <a:ext cx="2310579" cy="338554"/>
+          </a:xfrm>
+          <a:prstGeom prst="rect">
+            <a:avLst/>
+          </a:prstGeom>
+          <a:noFill/>
+        </p:spPr>
+        <p:txBody>
+          <a:bodyPr wrap="square" rtlCol="0">
+            <a:spAutoFit/>
+          </a:bodyPr>
+          <a:lstStyle/>
+          <a:p>
+            <a:pPr algn="ctr" defTabSz="829544">
+              <a:defRPr/>
+            </a:pPr>
+            <a:r>
+              <a:rPr lang="zh-CN" altLang="en-US" sz="1600" b="1" dirty="0">
+                <a:solidFill>
+                  <a:srgbClr val="C00000"/>
+                </a:solidFill>
+                <a:latin typeface="微软雅黑" panose="020B0503020204020204" charset="-122"/>
+                <a:ea typeface="微软雅黑" panose="020B0503020204020204" charset="-122"/>
+              </a:rPr>
+              <a:t>链上链下分层存证</a:t>
+            </a:r>
+          </a:p>
+        </p:txBody>
+      </p:sp>
+      <p:sp>
+        <p:nvSpPr>
+          <p:cNvPr id="145" name="箭头: 下 1067"/>
+          <p:cNvSpPr/>
+          <p:nvPr/>
+        </p:nvSpPr>
+        <p:spPr>
+          <a:xfrm>
+            <a:off x="3973877" y="2255753"/>
+            <a:ext cx="170637" cy="254199"/>
+          </a:xfrm>
+          <a:prstGeom prst="downArrow">
+            <a:avLst>
+              <a:gd name="adj1" fmla="val 34037"/>
+              <a:gd name="adj2" fmla="val 52816"/>
+            </a:avLst>
+          </a:prstGeom>
+          <a:gradFill>
+            <a:gsLst>
+              <a:gs pos="0">
+                <a:schemeClr val="accent1">
+                  <a:lumMod val="5000"/>
+                  <a:lumOff val="95000"/>
+                  <a:alpha val="0"/>
+                </a:schemeClr>
+              </a:gs>
+              <a:gs pos="74000">
+                <a:srgbClr val="C00000"/>
+              </a:gs>
+              <a:gs pos="100000">
+                <a:srgbClr val="C00000"/>
+              </a:gs>
+            </a:gsLst>
+            <a:lin ang="5400000" scaled="0"/>
+          </a:gradFill>
+          <a:ln>
+            <a:noFill/>
+          </a:ln>
+        </p:spPr>
+        <p:style>
+          <a:lnRef idx="2">
+            <a:schemeClr val="accent1">
+              <a:lumMod val="75000"/>
+            </a:schemeClr>
+          </a:lnRef>
+          <a:fillRef idx="1">
+            <a:schemeClr val="accent1"/>
+          </a:fillRef>
+          <a:effectRef idx="0">
+            <a:srgbClr val="FFFFFF"/>
+          </a:effectRef>
+          <a:fontRef idx="minor">
+            <a:schemeClr val="lt1"/>
+          </a:fontRef>
+        </p:style>
+        <p:txBody>
+          <a:bodyPr rtlCol="0" anchor="ctr"/>
+          <a:lstStyle/>
+          <a:p>
+            <a:pPr algn="ctr"/>
+            <a:endParaRPr lang="zh-CN" altLang="en-US" sz="1633"/>
+          </a:p>
+        </p:txBody>
+      </p:sp>
+      <p:sp>
+        <p:nvSpPr>
+          <p:cNvPr id="60" name="矩形: 圆角 43"/>
+          <p:cNvSpPr/>
+          <p:nvPr/>
+        </p:nvSpPr>
+        <p:spPr>
+          <a:xfrm>
+            <a:off x="2976629" y="1504438"/>
+            <a:ext cx="2171172" cy="672263"/>
+          </a:xfrm>
+          <a:prstGeom prst="roundRect">
+            <a:avLst>
+              <a:gd name="adj" fmla="val 0"/>
+            </a:avLst>
+          </a:prstGeom>
+          <a:solidFill>
+            <a:schemeClr val="bg1"/>
+          </a:solidFill>
+          <a:ln w="12700" cmpd="sng">
+            <a:solidFill>
+              <a:srgbClr val="C00000"/>
+            </a:solidFill>
+            <a:prstDash val="solid"/>
+          </a:ln>
+        </p:spPr>
+        <p:style>
+          <a:lnRef idx="2">
+            <a:schemeClr val="dk1"/>
+          </a:lnRef>
+          <a:fillRef idx="1">
+            <a:schemeClr val="lt1"/>
+          </a:fillRef>
+          <a:effectRef idx="0">
+            <a:schemeClr val="dk1"/>
+          </a:effectRef>
+          <a:fontRef idx="minor">
+            <a:schemeClr val="dk1"/>
+          </a:fontRef>
+        </p:style>
+        <p:txBody>
+          <a:bodyPr rtlCol="0" anchor="ctr"/>
+          <a:lstStyle/>
+          <a:p>
+            <a:pPr algn="ctr" defTabSz="829544">
+              <a:defRPr/>
+            </a:pPr>
+            <a:endParaRPr lang="zh-CN" altLang="en-US" sz="1633" dirty="0">
+              <a:solidFill>
+                <a:prstClr val="black"/>
+              </a:solidFill>
+              <a:latin typeface="等线" panose="02010600030101010101" charset="-122"/>
+              <a:ea typeface="等线" panose="02010600030101010101" charset="-122"/>
+            </a:endParaRPr>
+          </a:p>
+        </p:txBody>
+      </p:sp>
+      <p:sp>
+        <p:nvSpPr>
+          <p:cNvPr id="24" name="文本框 23"/>
+          <p:cNvSpPr txBox="1"/>
+          <p:nvPr/>
+        </p:nvSpPr>
+        <p:spPr>
+          <a:xfrm>
+            <a:off x="3571124" y="1715565"/>
+            <a:ext cx="1634284" cy="427553"/>
+          </a:xfrm>
+          <a:prstGeom prst="rect">
+            <a:avLst/>
+          </a:prstGeom>
+          <a:noFill/>
+        </p:spPr>
+        <p:txBody>
+          <a:bodyPr wrap="square" rtlCol="0">
+            <a:spAutoFit/>
+          </a:bodyPr>
+          <a:lstStyle/>
+          <a:p>
+            <a:pPr algn="ctr">
+              <a:buClrTx/>
+              <a:buSzTx/>
+              <a:buFontTx/>
+              <a:defRPr/>
+            </a:pPr>
+            <a:r>
+              <a:rPr lang="zh-CN" altLang="en-US" sz="1089" b="1" dirty="0">
+                <a:solidFill>
+                  <a:prstClr val="black"/>
+                </a:solidFill>
+                <a:latin typeface="微软雅黑" panose="020B0503020204020204" charset="-122"/>
+                <a:ea typeface="微软雅黑" panose="020B0503020204020204" charset="-122"/>
+              </a:rPr>
+              <a:t>频谱数据体量庞大</a:t>
+            </a:r>
+            <a:endParaRPr lang="en-US" altLang="zh-CN" sz="1089" b="1" dirty="0">
+              <a:solidFill>
+                <a:prstClr val="black"/>
+              </a:solidFill>
+              <a:latin typeface="微软雅黑" panose="020B0503020204020204" charset="-122"/>
+              <a:ea typeface="微软雅黑" panose="020B0503020204020204" charset="-122"/>
+            </a:endParaRPr>
+          </a:p>
+          <a:p>
+            <a:pPr algn="ctr">
+              <a:buClrTx/>
+              <a:buSzTx/>
+              <a:buFontTx/>
+              <a:defRPr/>
+            </a:pPr>
+            <a:r>
+              <a:rPr lang="zh-CN" altLang="en-US" sz="1089" b="1" dirty="0">
+                <a:solidFill>
+                  <a:srgbClr val="C00000"/>
+                </a:solidFill>
+                <a:latin typeface="微软雅黑" panose="020B0503020204020204" charset="-122"/>
+                <a:ea typeface="微软雅黑" panose="020B0503020204020204" charset="-122"/>
+              </a:rPr>
+              <a:t>全量上链开销大</a:t>
+            </a:r>
+            <a:endParaRPr lang="en-US" altLang="zh-CN" sz="1089" b="1" dirty="0">
+              <a:solidFill>
+                <a:srgbClr val="C00000"/>
+              </a:solidFill>
+              <a:latin typeface="微软雅黑" panose="020B0503020204020204" charset="-122"/>
+              <a:ea typeface="微软雅黑" panose="020B0503020204020204" charset="-122"/>
+            </a:endParaRPr>
+          </a:p>
+        </p:txBody>
+      </p:sp>
+      <p:pic>
+        <p:nvPicPr>
+          <p:cNvPr id="3" name="图形 2" descr="数据库 纯色填充">
+            <a:extLst>
+              <a:ext uri="{FF2B5EF4-FFF2-40B4-BE49-F238E27FC236}">
+                <a16:creationId xmlns:a16="http://schemas.microsoft.com/office/drawing/2014/main" id="{7C7F3871-282D-223B-EDC8-1A90B78B19C4}"/>
+              </a:ext>
+            </a:extLst>
+          </p:cNvPr>
+          <p:cNvPicPr>
+            <a:picLocks noChangeAspect="1"/>
+          </p:cNvPicPr>
+          <p:nvPr/>
+        </p:nvPicPr>
+        <p:blipFill>
+          <a:blip r:embed="rId4">
+            <a:extLst>
+              <a:ext uri="{96DAC541-7B7A-43D3-8B79-37D633B846F1}">
+                <asvg:svgBlip xmlns:asvg="http://schemas.microsoft.com/office/drawing/2016/SVG/main" r:embed="rId5"/>
+              </a:ext>
+            </a:extLst>
+          </a:blip>
+          <a:stretch>
+            <a:fillRect/>
+          </a:stretch>
+        </p:blipFill>
+        <p:spPr>
+          <a:xfrm>
+            <a:off x="3088924" y="1493349"/>
+            <a:ext cx="640080" cy="640080"/>
+          </a:xfrm>
+          <a:prstGeom prst="rect">
+            <a:avLst/>
+          </a:prstGeom>
+        </p:spPr>
+      </p:pic>
       <p:grpSp>
         <p:nvGrpSpPr>
-          <p:cNvPr id="28" name="组合 27">
+          <p:cNvPr id="20" name="组合 19">
             <a:extLst>
               <a:ext uri="{FF2B5EF4-FFF2-40B4-BE49-F238E27FC236}">
-                <a16:creationId xmlns:a16="http://schemas.microsoft.com/office/drawing/2014/main" id="{00A28FA2-FDB8-65FB-698B-262994F1F8A2}"/>
+                <a16:creationId xmlns:a16="http://schemas.microsoft.com/office/drawing/2014/main" id="{72E5C1C8-DA60-8B8F-7508-DA0FFF738C25}"/>
               </a:ext>
             </a:extLst>
           </p:cNvPr>
@@ -3759,482 +4444,18 @@
         </p:nvGrpSpPr>
         <p:grpSpPr>
           <a:xfrm>
-            <a:off x="257555" y="204502"/>
-            <a:ext cx="10367577" cy="6427106"/>
-            <a:chOff x="257555" y="204502"/>
-            <a:chExt cx="10367577" cy="6427106"/>
+            <a:off x="257555" y="2439700"/>
+            <a:ext cx="3808676" cy="2405837"/>
+            <a:chOff x="269667" y="2403364"/>
+            <a:chExt cx="3808676" cy="2405837"/>
           </a:xfrm>
         </p:grpSpPr>
-        <p:sp>
-          <p:nvSpPr>
-            <p:cNvPr id="81" name="圆角矩形 80"/>
-            <p:cNvSpPr/>
-            <p:nvPr/>
-          </p:nvSpPr>
-          <p:spPr>
-            <a:xfrm>
-              <a:off x="1556788" y="398634"/>
-              <a:ext cx="9068344" cy="6232974"/>
-            </a:xfrm>
-            <a:prstGeom prst="roundRect">
-              <a:avLst>
-                <a:gd name="adj" fmla="val 3556"/>
-              </a:avLst>
-            </a:prstGeom>
-            <a:noFill/>
-            <a:ln w="25400" cmpd="sng">
-              <a:solidFill>
-                <a:schemeClr val="accent1">
-                  <a:shade val="50000"/>
-                </a:schemeClr>
-              </a:solidFill>
-              <a:prstDash val="dash"/>
-            </a:ln>
-          </p:spPr>
-          <p:style>
-            <a:lnRef idx="2">
-              <a:schemeClr val="accent1">
-                <a:lumMod val="75000"/>
-              </a:schemeClr>
-            </a:lnRef>
-            <a:fillRef idx="1">
-              <a:schemeClr val="accent1"/>
-            </a:fillRef>
-            <a:effectRef idx="0">
-              <a:srgbClr val="FFFFFF"/>
-            </a:effectRef>
-            <a:fontRef idx="minor">
-              <a:schemeClr val="lt1"/>
-            </a:fontRef>
-          </p:style>
-          <p:txBody>
-            <a:bodyPr rtlCol="0" anchor="ctr"/>
-            <a:lstStyle/>
-            <a:p>
-              <a:pPr algn="ctr"/>
-              <a:endParaRPr lang="zh-CN" altLang="en-US" sz="1633"/>
-            </a:p>
-          </p:txBody>
-        </p:sp>
-        <p:sp>
-          <p:nvSpPr>
-            <p:cNvPr id="94" name="矩形: 圆角 1"/>
-            <p:cNvSpPr/>
-            <p:nvPr/>
-          </p:nvSpPr>
-          <p:spPr>
-            <a:xfrm>
-              <a:off x="1721830" y="817431"/>
-              <a:ext cx="871003" cy="5654034"/>
-            </a:xfrm>
-            <a:prstGeom prst="roundRect">
-              <a:avLst>
-                <a:gd name="adj" fmla="val 0"/>
-              </a:avLst>
-            </a:prstGeom>
-            <a:solidFill>
-              <a:srgbClr val="DAE3F5"/>
-            </a:solidFill>
-            <a:ln>
-              <a:noFill/>
-            </a:ln>
-          </p:spPr>
-          <p:style>
-            <a:lnRef idx="2">
-              <a:schemeClr val="accent1">
-                <a:shade val="15000"/>
-              </a:schemeClr>
-            </a:lnRef>
-            <a:fillRef idx="1">
-              <a:schemeClr val="accent1"/>
-            </a:fillRef>
-            <a:effectRef idx="0">
-              <a:schemeClr val="accent1"/>
-            </a:effectRef>
-            <a:fontRef idx="minor">
-              <a:schemeClr val="lt1"/>
-            </a:fontRef>
-          </p:style>
-          <p:txBody>
-            <a:bodyPr rtlCol="0" anchor="ctr"/>
-            <a:lstStyle/>
-            <a:p>
-              <a:pPr algn="ctr"/>
-              <a:endParaRPr lang="zh-CN" altLang="en-US" sz="1633" dirty="0">
-                <a:latin typeface="微软雅黑" panose="020B0503020204020204" charset="-122"/>
-                <a:ea typeface="微软雅黑" panose="020B0503020204020204" charset="-122"/>
-              </a:endParaRPr>
-            </a:p>
-          </p:txBody>
-        </p:sp>
-        <p:sp>
-          <p:nvSpPr>
-            <p:cNvPr id="4" name="矩形: 圆角 3"/>
-            <p:cNvSpPr/>
-            <p:nvPr/>
-          </p:nvSpPr>
-          <p:spPr>
-            <a:xfrm>
-              <a:off x="3038704" y="204502"/>
-              <a:ext cx="6104513" cy="433197"/>
-            </a:xfrm>
-            <a:prstGeom prst="roundRect">
-              <a:avLst>
-                <a:gd name="adj" fmla="val 50000"/>
-              </a:avLst>
-            </a:prstGeom>
-            <a:solidFill>
-              <a:srgbClr val="2E54A1"/>
-            </a:solidFill>
-            <a:ln>
-              <a:noFill/>
-            </a:ln>
-          </p:spPr>
-          <p:style>
-            <a:lnRef idx="2">
-              <a:schemeClr val="accent1">
-                <a:shade val="15000"/>
-              </a:schemeClr>
-            </a:lnRef>
-            <a:fillRef idx="1">
-              <a:schemeClr val="accent1"/>
-            </a:fillRef>
-            <a:effectRef idx="0">
-              <a:schemeClr val="accent1"/>
-            </a:effectRef>
-            <a:fontRef idx="minor">
-              <a:schemeClr val="lt1"/>
-            </a:fontRef>
-          </p:style>
-          <p:txBody>
-            <a:bodyPr rtlCol="0" anchor="ctr"/>
-            <a:lstStyle/>
-            <a:p>
-              <a:pPr algn="ctr" defTabSz="829544">
-                <a:defRPr/>
-              </a:pPr>
-              <a:r>
-                <a:rPr lang="zh-CN" altLang="en-US" sz="1633" b="1" dirty="0">
-                  <a:solidFill>
-                    <a:prstClr val="white"/>
-                  </a:solidFill>
-                  <a:latin typeface="微软雅黑" panose="020B0503020204020204" charset="-122"/>
-                  <a:ea typeface="微软雅黑" panose="020B0503020204020204" charset="-122"/>
-                  <a:cs typeface="Times New Roman" panose="02020603050405020304" pitchFamily="18" charset="0"/>
-                  <a:sym typeface="+mn-ea"/>
-                </a:rPr>
-                <a:t>链上链下协同的可追溯频谱数据可信管理办法</a:t>
-              </a:r>
-              <a:endParaRPr lang="zh-CN" altLang="en-US" sz="1633" b="1" dirty="0">
-                <a:latin typeface="微软雅黑" panose="020B0503020204020204" charset="-122"/>
-                <a:ea typeface="微软雅黑" panose="020B0503020204020204" charset="-122"/>
-                <a:cs typeface="微软雅黑" panose="020B0503020204020204" charset="-122"/>
-              </a:endParaRPr>
-            </a:p>
-          </p:txBody>
-        </p:sp>
-        <p:sp>
-          <p:nvSpPr>
-            <p:cNvPr id="99" name="箭头: 燕尾形 1071"/>
-            <p:cNvSpPr/>
-            <p:nvPr/>
-          </p:nvSpPr>
-          <p:spPr>
-            <a:xfrm>
-              <a:off x="5248759" y="3466445"/>
-              <a:ext cx="251162" cy="356005"/>
-            </a:xfrm>
-            <a:prstGeom prst="notchedRightArrow">
-              <a:avLst>
-                <a:gd name="adj1" fmla="val 33809"/>
-                <a:gd name="adj2" fmla="val 52390"/>
-              </a:avLst>
-            </a:prstGeom>
-            <a:gradFill>
-              <a:gsLst>
-                <a:gs pos="0">
-                  <a:schemeClr val="accent1">
-                    <a:lumMod val="5000"/>
-                    <a:lumOff val="95000"/>
-                    <a:alpha val="0"/>
-                  </a:schemeClr>
-                </a:gs>
-                <a:gs pos="74000">
-                  <a:srgbClr val="2E54A1"/>
-                </a:gs>
-                <a:gs pos="100000">
-                  <a:srgbClr val="2E54A1"/>
-                </a:gs>
-              </a:gsLst>
-              <a:lin ang="0" scaled="0"/>
-            </a:gradFill>
-            <a:ln>
-              <a:noFill/>
-            </a:ln>
-          </p:spPr>
-          <p:style>
-            <a:lnRef idx="2">
-              <a:schemeClr val="accent1">
-                <a:lumMod val="75000"/>
-              </a:schemeClr>
-            </a:lnRef>
-            <a:fillRef idx="1">
-              <a:schemeClr val="accent1"/>
-            </a:fillRef>
-            <a:effectRef idx="0">
-              <a:srgbClr val="FFFFFF"/>
-            </a:effectRef>
-            <a:fontRef idx="minor">
-              <a:schemeClr val="lt1"/>
-            </a:fontRef>
-          </p:style>
-          <p:txBody>
-            <a:bodyPr rtlCol="0" anchor="ctr"/>
-            <a:lstStyle/>
-            <a:p>
-              <a:pPr algn="ctr"/>
-              <a:endParaRPr lang="zh-CN" altLang="en-US" sz="1633"/>
-            </a:p>
-          </p:txBody>
-        </p:sp>
-        <p:sp>
-          <p:nvSpPr>
-            <p:cNvPr id="13" name="文本框 12"/>
-            <p:cNvSpPr txBox="1"/>
-            <p:nvPr/>
-          </p:nvSpPr>
-          <p:spPr>
-            <a:xfrm>
-              <a:off x="2935729" y="980308"/>
-              <a:ext cx="2310579" cy="338554"/>
-            </a:xfrm>
-            <a:prstGeom prst="rect">
-              <a:avLst/>
-            </a:prstGeom>
-            <a:noFill/>
-          </p:spPr>
-          <p:txBody>
-            <a:bodyPr wrap="square" rtlCol="0">
-              <a:spAutoFit/>
-            </a:bodyPr>
-            <a:lstStyle/>
-            <a:p>
-              <a:pPr algn="ctr" defTabSz="829544">
-                <a:defRPr/>
-              </a:pPr>
-              <a:r>
-                <a:rPr lang="zh-CN" altLang="en-US" sz="1600" b="1" dirty="0">
-                  <a:solidFill>
-                    <a:srgbClr val="C00000"/>
-                  </a:solidFill>
-                  <a:latin typeface="微软雅黑" panose="020B0503020204020204" charset="-122"/>
-                  <a:ea typeface="微软雅黑" panose="020B0503020204020204" charset="-122"/>
-                </a:rPr>
-                <a:t>链上链下分层存证</a:t>
-              </a:r>
-            </a:p>
-          </p:txBody>
-        </p:sp>
-        <p:sp>
-          <p:nvSpPr>
-            <p:cNvPr id="145" name="箭头: 下 1067"/>
-            <p:cNvSpPr/>
-            <p:nvPr/>
-          </p:nvSpPr>
-          <p:spPr>
-            <a:xfrm>
-              <a:off x="3973877" y="2255753"/>
-              <a:ext cx="170637" cy="254199"/>
-            </a:xfrm>
-            <a:prstGeom prst="downArrow">
-              <a:avLst>
-                <a:gd name="adj1" fmla="val 34037"/>
-                <a:gd name="adj2" fmla="val 52816"/>
-              </a:avLst>
-            </a:prstGeom>
-            <a:gradFill>
-              <a:gsLst>
-                <a:gs pos="0">
-                  <a:schemeClr val="accent1">
-                    <a:lumMod val="5000"/>
-                    <a:lumOff val="95000"/>
-                    <a:alpha val="0"/>
-                  </a:schemeClr>
-                </a:gs>
-                <a:gs pos="74000">
-                  <a:srgbClr val="C00000"/>
-                </a:gs>
-                <a:gs pos="100000">
-                  <a:srgbClr val="C00000"/>
-                </a:gs>
-              </a:gsLst>
-              <a:lin ang="5400000" scaled="0"/>
-            </a:gradFill>
-            <a:ln>
-              <a:noFill/>
-            </a:ln>
-          </p:spPr>
-          <p:style>
-            <a:lnRef idx="2">
-              <a:schemeClr val="accent1">
-                <a:lumMod val="75000"/>
-              </a:schemeClr>
-            </a:lnRef>
-            <a:fillRef idx="1">
-              <a:schemeClr val="accent1"/>
-            </a:fillRef>
-            <a:effectRef idx="0">
-              <a:srgbClr val="FFFFFF"/>
-            </a:effectRef>
-            <a:fontRef idx="minor">
-              <a:schemeClr val="lt1"/>
-            </a:fontRef>
-          </p:style>
-          <p:txBody>
-            <a:bodyPr rtlCol="0" anchor="ctr"/>
-            <a:lstStyle/>
-            <a:p>
-              <a:pPr algn="ctr"/>
-              <a:endParaRPr lang="zh-CN" altLang="en-US" sz="1633"/>
-            </a:p>
-          </p:txBody>
-        </p:sp>
-        <p:sp>
-          <p:nvSpPr>
-            <p:cNvPr id="60" name="矩形: 圆角 43"/>
-            <p:cNvSpPr/>
-            <p:nvPr/>
-          </p:nvSpPr>
-          <p:spPr>
-            <a:xfrm>
-              <a:off x="2976629" y="1504438"/>
-              <a:ext cx="2171172" cy="672263"/>
-            </a:xfrm>
-            <a:prstGeom prst="roundRect">
-              <a:avLst>
-                <a:gd name="adj" fmla="val 0"/>
-              </a:avLst>
-            </a:prstGeom>
-            <a:solidFill>
-              <a:schemeClr val="bg1"/>
-            </a:solidFill>
-            <a:ln w="12700" cmpd="sng">
-              <a:solidFill>
-                <a:srgbClr val="C00000"/>
-              </a:solidFill>
-              <a:prstDash val="solid"/>
-            </a:ln>
-          </p:spPr>
-          <p:style>
-            <a:lnRef idx="2">
-              <a:schemeClr val="dk1"/>
-            </a:lnRef>
-            <a:fillRef idx="1">
-              <a:schemeClr val="lt1"/>
-            </a:fillRef>
-            <a:effectRef idx="0">
-              <a:schemeClr val="dk1"/>
-            </a:effectRef>
-            <a:fontRef idx="minor">
-              <a:schemeClr val="dk1"/>
-            </a:fontRef>
-          </p:style>
-          <p:txBody>
-            <a:bodyPr rtlCol="0" anchor="ctr"/>
-            <a:lstStyle/>
-            <a:p>
-              <a:pPr algn="ctr" defTabSz="829544">
-                <a:defRPr/>
-              </a:pPr>
-              <a:endParaRPr lang="zh-CN" altLang="en-US" sz="1633" dirty="0">
-                <a:solidFill>
-                  <a:prstClr val="black"/>
-                </a:solidFill>
-                <a:latin typeface="等线" panose="02010600030101010101" charset="-122"/>
-                <a:ea typeface="等线" panose="02010600030101010101" charset="-122"/>
-              </a:endParaRPr>
-            </a:p>
-          </p:txBody>
-        </p:sp>
-        <p:sp>
-          <p:nvSpPr>
-            <p:cNvPr id="24" name="文本框 23"/>
-            <p:cNvSpPr txBox="1"/>
-            <p:nvPr/>
-          </p:nvSpPr>
-          <p:spPr>
-            <a:xfrm>
-              <a:off x="3571124" y="1715565"/>
-              <a:ext cx="1634284" cy="427553"/>
-            </a:xfrm>
-            <a:prstGeom prst="rect">
-              <a:avLst/>
-            </a:prstGeom>
-            <a:noFill/>
-          </p:spPr>
-          <p:txBody>
-            <a:bodyPr wrap="square" rtlCol="0">
-              <a:spAutoFit/>
-            </a:bodyPr>
-            <a:lstStyle/>
-            <a:p>
-              <a:pPr algn="ctr">
-                <a:buClrTx/>
-                <a:buSzTx/>
-                <a:buFontTx/>
-                <a:defRPr/>
-              </a:pPr>
-              <a:r>
-                <a:rPr lang="zh-CN" altLang="en-US" sz="1089" b="1" dirty="0">
-                  <a:solidFill>
-                    <a:prstClr val="black"/>
-                  </a:solidFill>
-                  <a:latin typeface="微软雅黑" panose="020B0503020204020204" charset="-122"/>
-                  <a:ea typeface="微软雅黑" panose="020B0503020204020204" charset="-122"/>
-                </a:rPr>
-                <a:t>频谱数据体量庞大</a:t>
-              </a:r>
-              <a:endParaRPr lang="en-US" altLang="zh-CN" sz="1089" b="1" dirty="0">
-                <a:solidFill>
-                  <a:prstClr val="black"/>
-                </a:solidFill>
-                <a:latin typeface="微软雅黑" panose="020B0503020204020204" charset="-122"/>
-                <a:ea typeface="微软雅黑" panose="020B0503020204020204" charset="-122"/>
-              </a:endParaRPr>
-            </a:p>
-            <a:p>
-              <a:pPr algn="ctr">
-                <a:buClrTx/>
-                <a:buSzTx/>
-                <a:buFontTx/>
-                <a:defRPr/>
-              </a:pPr>
-              <a:r>
-                <a:rPr lang="zh-CN" altLang="en-US" sz="1089" b="1" dirty="0">
-                  <a:solidFill>
-                    <a:srgbClr val="C00000"/>
-                  </a:solidFill>
-                  <a:latin typeface="微软雅黑" panose="020B0503020204020204" charset="-122"/>
-                  <a:ea typeface="微软雅黑" panose="020B0503020204020204" charset="-122"/>
-                </a:rPr>
-                <a:t>全量上链开销大</a:t>
-              </a:r>
-              <a:endParaRPr lang="en-US" altLang="zh-CN" sz="1089" b="1" dirty="0">
-                <a:solidFill>
-                  <a:srgbClr val="C00000"/>
-                </a:solidFill>
-                <a:latin typeface="微软雅黑" panose="020B0503020204020204" charset="-122"/>
-                <a:ea typeface="微软雅黑" panose="020B0503020204020204" charset="-122"/>
-              </a:endParaRPr>
-            </a:p>
-          </p:txBody>
-        </p:sp>
         <p:pic>
           <p:nvPicPr>
-            <p:cNvPr id="3" name="图形 2" descr="数据库 纯色填充">
+            <p:cNvPr id="16" name="图片 15" descr="游戏机里面的人物&#10;&#10;中度可信度描述已自动生成">
               <a:extLst>
                 <a:ext uri="{FF2B5EF4-FFF2-40B4-BE49-F238E27FC236}">
-                  <a16:creationId xmlns:a16="http://schemas.microsoft.com/office/drawing/2014/main" id="{7C7F3871-282D-223B-EDC8-1A90B78B19C4}"/>
+                  <a16:creationId xmlns:a16="http://schemas.microsoft.com/office/drawing/2014/main" id="{BD342551-752E-F0CF-0C32-F89168C77877}"/>
                 </a:ext>
               </a:extLst>
             </p:cNvPr>
@@ -4244,250 +4465,38 @@
             <p:nvPr/>
           </p:nvPicPr>
           <p:blipFill>
-            <a:blip r:embed="rId4">
+            <a:blip r:embed="rId6">
               <a:extLst>
-                <a:ext uri="{96DAC541-7B7A-43D3-8B79-37D633B846F1}">
-                  <asvg:svgBlip xmlns:asvg="http://schemas.microsoft.com/office/drawing/2016/SVG/main" r:embed="rId5"/>
+                <a:ext uri="{28A0092B-C50C-407E-A947-70E740481C1C}">
+                  <a14:useLocalDpi xmlns:a14="http://schemas.microsoft.com/office/drawing/2010/main" val="0"/>
                 </a:ext>
               </a:extLst>
             </a:blip>
-            <a:stretch>
-              <a:fillRect/>
-            </a:stretch>
+            <a:srcRect t="1722" b="4845"/>
+            <a:stretch/>
           </p:blipFill>
           <p:spPr>
             <a:xfrm>
-              <a:off x="3088924" y="1493349"/>
-              <a:ext cx="640080" cy="640080"/>
+              <a:off x="269667" y="2403364"/>
+              <a:ext cx="3808676" cy="720000"/>
             </a:xfrm>
             <a:prstGeom prst="rect">
               <a:avLst/>
             </a:prstGeom>
+            <a:scene3d>
+              <a:camera prst="orthographicFront">
+                <a:rot lat="0" lon="0" rev="16200000"/>
+              </a:camera>
+              <a:lightRig rig="threePt" dir="t"/>
+            </a:scene3d>
           </p:spPr>
         </p:pic>
-        <p:grpSp>
-          <p:nvGrpSpPr>
-            <p:cNvPr id="20" name="组合 19">
+        <p:pic>
+          <p:nvPicPr>
+            <p:cNvPr id="17" name="图片 16" descr="游戏机里面的人物&#10;&#10;中度可信度描述已自动生成">
               <a:extLst>
                 <a:ext uri="{FF2B5EF4-FFF2-40B4-BE49-F238E27FC236}">
-                  <a16:creationId xmlns:a16="http://schemas.microsoft.com/office/drawing/2014/main" id="{72E5C1C8-DA60-8B8F-7508-DA0FFF738C25}"/>
-                </a:ext>
-              </a:extLst>
-            </p:cNvPr>
-            <p:cNvGrpSpPr/>
-            <p:nvPr/>
-          </p:nvGrpSpPr>
-          <p:grpSpPr>
-            <a:xfrm>
-              <a:off x="257555" y="2439700"/>
-              <a:ext cx="3808676" cy="2405837"/>
-              <a:chOff x="269667" y="2403364"/>
-              <a:chExt cx="3808676" cy="2405837"/>
-            </a:xfrm>
-          </p:grpSpPr>
-          <p:pic>
-            <p:nvPicPr>
-              <p:cNvPr id="16" name="图片 15" descr="游戏机里面的人物&#10;&#10;中度可信度描述已自动生成">
-                <a:extLst>
-                  <a:ext uri="{FF2B5EF4-FFF2-40B4-BE49-F238E27FC236}">
-                    <a16:creationId xmlns:a16="http://schemas.microsoft.com/office/drawing/2014/main" id="{BD342551-752E-F0CF-0C32-F89168C77877}"/>
-                  </a:ext>
-                </a:extLst>
-              </p:cNvPr>
-              <p:cNvPicPr>
-                <a:picLocks noChangeAspect="1"/>
-              </p:cNvPicPr>
-              <p:nvPr/>
-            </p:nvPicPr>
-            <p:blipFill>
-              <a:blip r:embed="rId6">
-                <a:extLst>
-                  <a:ext uri="{28A0092B-C50C-407E-A947-70E740481C1C}">
-                    <a14:useLocalDpi xmlns:a14="http://schemas.microsoft.com/office/drawing/2010/main" val="0"/>
-                  </a:ext>
-                </a:extLst>
-              </a:blip>
-              <a:srcRect t="1722" b="4845"/>
-              <a:stretch/>
-            </p:blipFill>
-            <p:spPr>
-              <a:xfrm>
-                <a:off x="269667" y="2403364"/>
-                <a:ext cx="3808676" cy="720000"/>
-              </a:xfrm>
-              <a:prstGeom prst="rect">
-                <a:avLst/>
-              </a:prstGeom>
-              <a:scene3d>
-                <a:camera prst="orthographicFront">
-                  <a:rot lat="0" lon="0" rev="16200000"/>
-                </a:camera>
-                <a:lightRig rig="threePt" dir="t"/>
-              </a:scene3d>
-            </p:spPr>
-          </p:pic>
-          <p:pic>
-            <p:nvPicPr>
-              <p:cNvPr id="17" name="图片 16" descr="游戏机里面的人物&#10;&#10;中度可信度描述已自动生成">
-                <a:extLst>
-                  <a:ext uri="{FF2B5EF4-FFF2-40B4-BE49-F238E27FC236}">
-                    <a16:creationId xmlns:a16="http://schemas.microsoft.com/office/drawing/2014/main" id="{BE5D9F77-96F2-E6A0-A3E1-F29FCC7C1219}"/>
-                  </a:ext>
-                </a:extLst>
-              </p:cNvPr>
-              <p:cNvPicPr>
-                <a:picLocks noChangeAspect="1"/>
-              </p:cNvPicPr>
-              <p:nvPr/>
-            </p:nvPicPr>
-            <p:blipFill>
-              <a:blip r:embed="rId6">
-                <a:extLst>
-                  <a:ext uri="{28A0092B-C50C-407E-A947-70E740481C1C}">
-                    <a14:useLocalDpi xmlns:a14="http://schemas.microsoft.com/office/drawing/2010/main" val="0"/>
-                  </a:ext>
-                </a:extLst>
-              </a:blip>
-              <a:srcRect l="4271" t="1722" b="4845"/>
-              <a:stretch/>
-            </p:blipFill>
-            <p:spPr>
-              <a:xfrm>
-                <a:off x="348166" y="4089201"/>
-                <a:ext cx="3646026" cy="720000"/>
-              </a:xfrm>
-              <a:prstGeom prst="rect">
-                <a:avLst/>
-              </a:prstGeom>
-              <a:scene3d>
-                <a:camera prst="orthographicFront">
-                  <a:rot lat="0" lon="0" rev="16200000"/>
-                </a:camera>
-                <a:lightRig rig="threePt" dir="t"/>
-              </a:scene3d>
-            </p:spPr>
-          </p:pic>
-        </p:grpSp>
-        <p:sp>
-          <p:nvSpPr>
-            <p:cNvPr id="23" name="箭头: 燕尾形 1071">
-              <a:extLst>
-                <a:ext uri="{FF2B5EF4-FFF2-40B4-BE49-F238E27FC236}">
-                  <a16:creationId xmlns:a16="http://schemas.microsoft.com/office/drawing/2014/main" id="{08E57F9C-821D-A677-5EFE-1EBD088E746F}"/>
-                </a:ext>
-              </a:extLst>
-            </p:cNvPr>
-            <p:cNvSpPr/>
-            <p:nvPr/>
-          </p:nvSpPr>
-          <p:spPr>
-            <a:xfrm>
-              <a:off x="2634310" y="3474699"/>
-              <a:ext cx="251162" cy="356005"/>
-            </a:xfrm>
-            <a:prstGeom prst="notchedRightArrow">
-              <a:avLst>
-                <a:gd name="adj1" fmla="val 33809"/>
-                <a:gd name="adj2" fmla="val 52390"/>
-              </a:avLst>
-            </a:prstGeom>
-            <a:gradFill>
-              <a:gsLst>
-                <a:gs pos="0">
-                  <a:schemeClr val="accent1">
-                    <a:lumMod val="5000"/>
-                    <a:lumOff val="95000"/>
-                    <a:alpha val="0"/>
-                  </a:schemeClr>
-                </a:gs>
-                <a:gs pos="74000">
-                  <a:srgbClr val="2E54A1"/>
-                </a:gs>
-                <a:gs pos="100000">
-                  <a:srgbClr val="2E54A1"/>
-                </a:gs>
-              </a:gsLst>
-              <a:lin ang="0" scaled="0"/>
-            </a:gradFill>
-            <a:ln>
-              <a:noFill/>
-            </a:ln>
-          </p:spPr>
-          <p:style>
-            <a:lnRef idx="2">
-              <a:schemeClr val="accent1">
-                <a:lumMod val="75000"/>
-              </a:schemeClr>
-            </a:lnRef>
-            <a:fillRef idx="1">
-              <a:schemeClr val="accent1"/>
-            </a:fillRef>
-            <a:effectRef idx="0">
-              <a:srgbClr val="FFFFFF"/>
-            </a:effectRef>
-            <a:fontRef idx="minor">
-              <a:schemeClr val="lt1"/>
-            </a:fontRef>
-          </p:style>
-          <p:txBody>
-            <a:bodyPr rtlCol="0" anchor="ctr"/>
-            <a:lstStyle/>
-            <a:p>
-              <a:pPr algn="ctr"/>
-              <a:endParaRPr lang="zh-CN" altLang="en-US" sz="1633"/>
-            </a:p>
-          </p:txBody>
-        </p:sp>
-        <p:sp>
-          <p:nvSpPr>
-            <p:cNvPr id="2" name="文本框 1">
-              <a:extLst>
-                <a:ext uri="{FF2B5EF4-FFF2-40B4-BE49-F238E27FC236}">
-                  <a16:creationId xmlns:a16="http://schemas.microsoft.com/office/drawing/2014/main" id="{1DE680EE-B73D-BC43-664E-CE7EE3826258}"/>
-                </a:ext>
-              </a:extLst>
-            </p:cNvPr>
-            <p:cNvSpPr txBox="1"/>
-            <p:nvPr/>
-          </p:nvSpPr>
-          <p:spPr>
-            <a:xfrm>
-              <a:off x="5677924" y="980308"/>
-              <a:ext cx="2310579" cy="338554"/>
-            </a:xfrm>
-            <a:prstGeom prst="rect">
-              <a:avLst/>
-            </a:prstGeom>
-            <a:noFill/>
-          </p:spPr>
-          <p:txBody>
-            <a:bodyPr wrap="square" rtlCol="0">
-              <a:spAutoFit/>
-            </a:bodyPr>
-            <a:lstStyle/>
-            <a:p>
-              <a:pPr algn="ctr" defTabSz="829544">
-                <a:defRPr/>
-              </a:pPr>
-              <a:r>
-                <a:rPr lang="zh-CN" altLang="en-US" sz="1600" b="1" dirty="0">
-                  <a:solidFill>
-                    <a:srgbClr val="C00000"/>
-                  </a:solidFill>
-                  <a:latin typeface="微软雅黑" panose="020B0503020204020204" charset="-122"/>
-                  <a:ea typeface="微软雅黑" panose="020B0503020204020204" charset="-122"/>
-                </a:rPr>
-                <a:t>可验证分级协同索引</a:t>
-              </a:r>
-            </a:p>
-          </p:txBody>
-        </p:sp>
-        <p:pic>
-          <p:nvPicPr>
-            <p:cNvPr id="6" name="图片 5" descr="游戏界面的截图图&#10;&#10;描述已自动生成">
-              <a:extLst>
-                <a:ext uri="{FF2B5EF4-FFF2-40B4-BE49-F238E27FC236}">
-                  <a16:creationId xmlns:a16="http://schemas.microsoft.com/office/drawing/2014/main" id="{E524B7CC-1586-F386-326C-B45A7F054CB1}"/>
+                  <a16:creationId xmlns:a16="http://schemas.microsoft.com/office/drawing/2014/main" id="{BE5D9F77-96F2-E6A0-A3E1-F29FCC7C1219}"/>
                 </a:ext>
               </a:extLst>
             </p:cNvPr>
@@ -4497,347 +4506,446 @@
             <p:nvPr/>
           </p:nvPicPr>
           <p:blipFill>
-            <a:blip r:embed="rId7">
+            <a:blip r:embed="rId6">
               <a:extLst>
                 <a:ext uri="{28A0092B-C50C-407E-A947-70E740481C1C}">
                   <a14:useLocalDpi xmlns:a14="http://schemas.microsoft.com/office/drawing/2010/main" val="0"/>
                 </a:ext>
               </a:extLst>
             </a:blip>
-            <a:stretch>
-              <a:fillRect/>
-            </a:stretch>
+            <a:srcRect l="4271" t="1722" b="4845"/>
+            <a:stretch/>
           </p:blipFill>
           <p:spPr>
             <a:xfrm>
-              <a:off x="5633029" y="1515383"/>
-              <a:ext cx="2551672" cy="4542645"/>
+              <a:off x="348166" y="4089201"/>
+              <a:ext cx="3646026" cy="720000"/>
             </a:xfrm>
             <a:prstGeom prst="rect">
               <a:avLst/>
             </a:prstGeom>
+            <a:scene3d>
+              <a:camera prst="orthographicFront">
+                <a:rot lat="0" lon="0" rev="16200000"/>
+              </a:camera>
+              <a:lightRig rig="threePt" dir="t"/>
+            </a:scene3d>
           </p:spPr>
         </p:pic>
-        <p:sp>
-          <p:nvSpPr>
-            <p:cNvPr id="26" name="矩形: 圆角 107"/>
-            <p:cNvSpPr/>
-            <p:nvPr/>
-          </p:nvSpPr>
-          <p:spPr>
-            <a:xfrm>
-              <a:off x="3126080" y="2659813"/>
-              <a:ext cx="1892359" cy="233304"/>
-            </a:xfrm>
-            <a:prstGeom prst="roundRect">
-              <a:avLst/>
-            </a:prstGeom>
+      </p:grpSp>
+      <p:sp>
+        <p:nvSpPr>
+          <p:cNvPr id="23" name="箭头: 燕尾形 1071">
+            <a:extLst>
+              <a:ext uri="{FF2B5EF4-FFF2-40B4-BE49-F238E27FC236}">
+                <a16:creationId xmlns:a16="http://schemas.microsoft.com/office/drawing/2014/main" id="{08E57F9C-821D-A677-5EFE-1EBD088E746F}"/>
+              </a:ext>
+            </a:extLst>
+          </p:cNvPr>
+          <p:cNvSpPr/>
+          <p:nvPr/>
+        </p:nvSpPr>
+        <p:spPr>
+          <a:xfrm>
+            <a:off x="2634310" y="3474699"/>
+            <a:ext cx="251162" cy="356005"/>
+          </a:xfrm>
+          <a:prstGeom prst="notchedRightArrow">
+            <a:avLst>
+              <a:gd name="adj1" fmla="val 33809"/>
+              <a:gd name="adj2" fmla="val 52390"/>
+            </a:avLst>
+          </a:prstGeom>
+          <a:gradFill>
+            <a:gsLst>
+              <a:gs pos="0">
+                <a:schemeClr val="accent1">
+                  <a:lumMod val="5000"/>
+                  <a:lumOff val="95000"/>
+                  <a:alpha val="0"/>
+                </a:schemeClr>
+              </a:gs>
+              <a:gs pos="74000">
+                <a:srgbClr val="2E54A1"/>
+              </a:gs>
+              <a:gs pos="100000">
+                <a:srgbClr val="2E54A1"/>
+              </a:gs>
+            </a:gsLst>
+            <a:lin ang="0" scaled="0"/>
+          </a:gradFill>
+          <a:ln>
             <a:noFill/>
-            <a:ln w="15875" cap="flat" cmpd="sng" algn="ctr">
-              <a:noFill/>
-              <a:prstDash val="solid"/>
-              <a:miter lim="800000"/>
-            </a:ln>
-            <a:effectLst/>
-          </p:spPr>
-          <p:txBody>
-            <a:bodyPr rtlCol="0" anchor="ctr"/>
-            <a:lstStyle/>
-            <a:p>
-              <a:pPr algn="ctr" defTabSz="829544">
-                <a:defRPr/>
-              </a:pPr>
-              <a:r>
-                <a:rPr lang="zh-CN" altLang="en-US" sz="1270" b="1" dirty="0">
-                  <a:solidFill>
-                    <a:srgbClr val="C00000"/>
-                  </a:solidFill>
-                  <a:latin typeface="微软雅黑" panose="020B0503020204020204" charset="-122"/>
-                  <a:ea typeface="微软雅黑" panose="020B0503020204020204" charset="-122"/>
-                </a:rPr>
-                <a:t>数据分层差异化存储</a:t>
-              </a:r>
-            </a:p>
-          </p:txBody>
-        </p:sp>
-        <p:pic>
-          <p:nvPicPr>
-            <p:cNvPr id="55" name="图形 54">
-              <a:extLst>
-                <a:ext uri="{FF2B5EF4-FFF2-40B4-BE49-F238E27FC236}">
-                  <a16:creationId xmlns:a16="http://schemas.microsoft.com/office/drawing/2014/main" id="{4554D2FD-C9E4-624F-B264-1B95F1946E2D}"/>
-                </a:ext>
-              </a:extLst>
-            </p:cNvPr>
-            <p:cNvPicPr>
-              <a:picLocks noChangeAspect="1"/>
-            </p:cNvPicPr>
-            <p:nvPr/>
-          </p:nvPicPr>
-          <p:blipFill>
-            <a:blip r:embed="rId8">
-              <a:extLst>
-                <a:ext uri="{96DAC541-7B7A-43D3-8B79-37D633B846F1}">
-                  <asvg:svgBlip xmlns:asvg="http://schemas.microsoft.com/office/drawing/2016/SVG/main" r:embed="rId9"/>
-                </a:ext>
-              </a:extLst>
-            </a:blip>
-            <a:srcRect/>
-            <a:stretch/>
-          </p:blipFill>
-          <p:spPr>
-            <a:xfrm>
-              <a:off x="3061847" y="2931155"/>
-              <a:ext cx="2020824" cy="3266027"/>
-            </a:xfrm>
-            <a:prstGeom prst="rect">
-              <a:avLst/>
-            </a:prstGeom>
-          </p:spPr>
-        </p:pic>
-        <p:sp>
-          <p:nvSpPr>
-            <p:cNvPr id="11" name="矩形 10">
-              <a:extLst>
-                <a:ext uri="{FF2B5EF4-FFF2-40B4-BE49-F238E27FC236}">
-                  <a16:creationId xmlns:a16="http://schemas.microsoft.com/office/drawing/2014/main" id="{3731614A-4902-1151-6F76-AC107CC80A0B}"/>
-                </a:ext>
-              </a:extLst>
-            </p:cNvPr>
-            <p:cNvSpPr/>
-            <p:nvPr/>
-          </p:nvSpPr>
-          <p:spPr>
-            <a:xfrm>
-              <a:off x="2979658" y="2571750"/>
-              <a:ext cx="2171172" cy="3625432"/>
-            </a:xfrm>
-            <a:prstGeom prst="rect">
-              <a:avLst/>
-            </a:prstGeom>
+          </a:ln>
+        </p:spPr>
+        <p:style>
+          <a:lnRef idx="2">
+            <a:schemeClr val="accent1">
+              <a:lumMod val="75000"/>
+            </a:schemeClr>
+          </a:lnRef>
+          <a:fillRef idx="1">
+            <a:schemeClr val="accent1"/>
+          </a:fillRef>
+          <a:effectRef idx="0">
+            <a:srgbClr val="FFFFFF"/>
+          </a:effectRef>
+          <a:fontRef idx="minor">
+            <a:schemeClr val="lt1"/>
+          </a:fontRef>
+        </p:style>
+        <p:txBody>
+          <a:bodyPr rtlCol="0" anchor="ctr"/>
+          <a:lstStyle/>
+          <a:p>
+            <a:pPr algn="ctr"/>
+            <a:endParaRPr lang="zh-CN" altLang="en-US" sz="1633"/>
+          </a:p>
+        </p:txBody>
+      </p:sp>
+      <p:sp>
+        <p:nvSpPr>
+          <p:cNvPr id="2" name="文本框 1">
+            <a:extLst>
+              <a:ext uri="{FF2B5EF4-FFF2-40B4-BE49-F238E27FC236}">
+                <a16:creationId xmlns:a16="http://schemas.microsoft.com/office/drawing/2014/main" id="{1DE680EE-B73D-BC43-664E-CE7EE3826258}"/>
+              </a:ext>
+            </a:extLst>
+          </p:cNvPr>
+          <p:cNvSpPr txBox="1"/>
+          <p:nvPr/>
+        </p:nvSpPr>
+        <p:spPr>
+          <a:xfrm>
+            <a:off x="6780430" y="831831"/>
+            <a:ext cx="2310579" cy="338554"/>
+          </a:xfrm>
+          <a:prstGeom prst="rect">
+            <a:avLst/>
+          </a:prstGeom>
+          <a:noFill/>
+        </p:spPr>
+        <p:txBody>
+          <a:bodyPr wrap="square" rtlCol="0">
+            <a:spAutoFit/>
+          </a:bodyPr>
+          <a:lstStyle/>
+          <a:p>
+            <a:pPr algn="ctr" defTabSz="829544">
+              <a:defRPr/>
+            </a:pPr>
+            <a:r>
+              <a:rPr lang="zh-CN" altLang="en-US" sz="1600" b="1" dirty="0">
+                <a:solidFill>
+                  <a:srgbClr val="C00000"/>
+                </a:solidFill>
+                <a:latin typeface="微软雅黑" panose="020B0503020204020204" charset="-122"/>
+                <a:ea typeface="微软雅黑" panose="020B0503020204020204" charset="-122"/>
+              </a:rPr>
+              <a:t>可验证分级协同索引</a:t>
+            </a:r>
+          </a:p>
+        </p:txBody>
+      </p:sp>
+      <p:pic>
+        <p:nvPicPr>
+          <p:cNvPr id="6" name="图片 5">
+            <a:extLst>
+              <a:ext uri="{FF2B5EF4-FFF2-40B4-BE49-F238E27FC236}">
+                <a16:creationId xmlns:a16="http://schemas.microsoft.com/office/drawing/2014/main" id="{E524B7CC-1586-F386-326C-B45A7F054CB1}"/>
+              </a:ext>
+            </a:extLst>
+          </p:cNvPr>
+          <p:cNvPicPr>
+            <a:picLocks noChangeAspect="1"/>
+          </p:cNvPicPr>
+          <p:nvPr/>
+        </p:nvPicPr>
+        <p:blipFill>
+          <a:blip r:embed="rId7">
+            <a:extLst>
+              <a:ext uri="{28A0092B-C50C-407E-A947-70E740481C1C}">
+                <a14:useLocalDpi xmlns:a14="http://schemas.microsoft.com/office/drawing/2010/main" val="0"/>
+              </a:ext>
+            </a:extLst>
+          </a:blip>
+          <a:srcRect/>
+          <a:stretch/>
+        </p:blipFill>
+        <p:spPr>
+          <a:xfrm>
+            <a:off x="5630000" y="1200979"/>
+            <a:ext cx="4542645" cy="2514292"/>
+          </a:xfrm>
+          <a:prstGeom prst="rect">
+            <a:avLst/>
+          </a:prstGeom>
+        </p:spPr>
+      </p:pic>
+      <p:sp>
+        <p:nvSpPr>
+          <p:cNvPr id="26" name="矩形: 圆角 107"/>
+          <p:cNvSpPr/>
+          <p:nvPr/>
+        </p:nvSpPr>
+        <p:spPr>
+          <a:xfrm>
+            <a:off x="3126080" y="2659813"/>
+            <a:ext cx="1892359" cy="233304"/>
+          </a:xfrm>
+          <a:prstGeom prst="roundRect">
+            <a:avLst/>
+          </a:prstGeom>
+          <a:noFill/>
+          <a:ln w="15875" cap="flat" cmpd="sng" algn="ctr">
             <a:noFill/>
-            <a:ln>
-              <a:solidFill>
-                <a:schemeClr val="accent5">
-                  <a:lumMod val="75000"/>
+            <a:prstDash val="solid"/>
+            <a:miter lim="800000"/>
+          </a:ln>
+          <a:effectLst/>
+        </p:spPr>
+        <p:txBody>
+          <a:bodyPr rtlCol="0" anchor="ctr"/>
+          <a:lstStyle/>
+          <a:p>
+            <a:pPr algn="ctr" defTabSz="829544">
+              <a:defRPr/>
+            </a:pPr>
+            <a:r>
+              <a:rPr lang="zh-CN" altLang="en-US" sz="1270" b="1" dirty="0">
+                <a:solidFill>
+                  <a:srgbClr val="C00000"/>
+                </a:solidFill>
+                <a:latin typeface="微软雅黑" panose="020B0503020204020204" charset="-122"/>
+                <a:ea typeface="微软雅黑" panose="020B0503020204020204" charset="-122"/>
+              </a:rPr>
+              <a:t>数据分层差异化存储</a:t>
+            </a:r>
+          </a:p>
+        </p:txBody>
+      </p:sp>
+      <p:pic>
+        <p:nvPicPr>
+          <p:cNvPr id="55" name="图形 54">
+            <a:extLst>
+              <a:ext uri="{FF2B5EF4-FFF2-40B4-BE49-F238E27FC236}">
+                <a16:creationId xmlns:a16="http://schemas.microsoft.com/office/drawing/2014/main" id="{4554D2FD-C9E4-624F-B264-1B95F1946E2D}"/>
+              </a:ext>
+            </a:extLst>
+          </p:cNvPr>
+          <p:cNvPicPr>
+            <a:picLocks noChangeAspect="1"/>
+          </p:cNvPicPr>
+          <p:nvPr/>
+        </p:nvPicPr>
+        <p:blipFill>
+          <a:blip r:embed="rId8">
+            <a:extLst>
+              <a:ext uri="{96DAC541-7B7A-43D3-8B79-37D633B846F1}">
+                <asvg:svgBlip xmlns:asvg="http://schemas.microsoft.com/office/drawing/2016/SVG/main" r:embed="rId9"/>
+              </a:ext>
+            </a:extLst>
+          </a:blip>
+          <a:srcRect/>
+          <a:stretch/>
+        </p:blipFill>
+        <p:spPr>
+          <a:xfrm>
+            <a:off x="3061847" y="2931155"/>
+            <a:ext cx="2020824" cy="3266027"/>
+          </a:xfrm>
+          <a:prstGeom prst="rect">
+            <a:avLst/>
+          </a:prstGeom>
+        </p:spPr>
+      </p:pic>
+      <p:pic>
+        <p:nvPicPr>
+          <p:cNvPr id="18" name="图片 17">
+            <a:extLst>
+              <a:ext uri="{FF2B5EF4-FFF2-40B4-BE49-F238E27FC236}">
+                <a16:creationId xmlns:a16="http://schemas.microsoft.com/office/drawing/2014/main" id="{457744B7-045A-7A61-1B7C-A45FE2CB82BA}"/>
+              </a:ext>
+            </a:extLst>
+          </p:cNvPr>
+          <p:cNvPicPr>
+            <a:picLocks noChangeAspect="1"/>
+          </p:cNvPicPr>
+          <p:nvPr/>
+        </p:nvPicPr>
+        <p:blipFill>
+          <a:blip r:embed="rId10">
+            <a:extLst>
+              <a:ext uri="{28A0092B-C50C-407E-A947-70E740481C1C}">
+                <a14:useLocalDpi xmlns:a14="http://schemas.microsoft.com/office/drawing/2010/main" val="0"/>
+              </a:ext>
+            </a:extLst>
+          </a:blip>
+          <a:srcRect/>
+          <a:stretch/>
+        </p:blipFill>
+        <p:spPr>
+          <a:xfrm>
+            <a:off x="5810845" y="4187209"/>
+            <a:ext cx="4231801" cy="2069668"/>
+          </a:xfrm>
+          <a:prstGeom prst="rect">
+            <a:avLst/>
+          </a:prstGeom>
+        </p:spPr>
+      </p:pic>
+      <p:sp>
+        <p:nvSpPr>
+          <p:cNvPr id="25" name="文本框 24">
+            <a:extLst>
+              <a:ext uri="{FF2B5EF4-FFF2-40B4-BE49-F238E27FC236}">
+                <a16:creationId xmlns:a16="http://schemas.microsoft.com/office/drawing/2014/main" id="{C1C2A791-776E-2D00-6AC5-7705C42E939B}"/>
+              </a:ext>
+            </a:extLst>
+          </p:cNvPr>
+          <p:cNvSpPr txBox="1"/>
+          <p:nvPr/>
+        </p:nvSpPr>
+        <p:spPr>
+          <a:xfrm>
+            <a:off x="6799154" y="3790809"/>
+            <a:ext cx="2310579" cy="338554"/>
+          </a:xfrm>
+          <a:prstGeom prst="rect">
+            <a:avLst/>
+          </a:prstGeom>
+          <a:noFill/>
+        </p:spPr>
+        <p:txBody>
+          <a:bodyPr wrap="square" rtlCol="0">
+            <a:spAutoFit/>
+          </a:bodyPr>
+          <a:lstStyle/>
+          <a:p>
+            <a:pPr algn="ctr" defTabSz="829544">
+              <a:defRPr/>
+            </a:pPr>
+            <a:r>
+              <a:rPr lang="zh-CN" altLang="en-US" sz="1600" b="1" dirty="0">
+                <a:solidFill>
+                  <a:srgbClr val="C00000"/>
+                </a:solidFill>
+                <a:latin typeface="微软雅黑" panose="020B0503020204020204" charset="-122"/>
+                <a:ea typeface="微软雅黑" panose="020B0503020204020204" charset="-122"/>
+              </a:rPr>
+              <a:t>高效可学习索引</a:t>
+            </a:r>
+          </a:p>
+        </p:txBody>
+      </p:sp>
+      <p:sp>
+        <p:nvSpPr>
+          <p:cNvPr id="9" name="箭头: 燕尾形 1071">
+            <a:extLst>
+              <a:ext uri="{FF2B5EF4-FFF2-40B4-BE49-F238E27FC236}">
+                <a16:creationId xmlns:a16="http://schemas.microsoft.com/office/drawing/2014/main" id="{47BF9601-4B32-637A-2968-47B3F736314C}"/>
+              </a:ext>
+            </a:extLst>
+          </p:cNvPr>
+          <p:cNvSpPr/>
+          <p:nvPr/>
+        </p:nvSpPr>
+        <p:spPr>
+          <a:xfrm rot="3611159">
+            <a:off x="6648587" y="3798066"/>
+            <a:ext cx="251162" cy="356005"/>
+          </a:xfrm>
+          <a:prstGeom prst="notchedRightArrow">
+            <a:avLst>
+              <a:gd name="adj1" fmla="val 33809"/>
+              <a:gd name="adj2" fmla="val 52390"/>
+            </a:avLst>
+          </a:prstGeom>
+          <a:gradFill>
+            <a:gsLst>
+              <a:gs pos="0">
+                <a:schemeClr val="accent1">
+                  <a:lumMod val="5000"/>
+                  <a:lumOff val="95000"/>
+                  <a:alpha val="0"/>
                 </a:schemeClr>
-              </a:solidFill>
-            </a:ln>
-          </p:spPr>
-          <p:style>
-            <a:lnRef idx="2">
-              <a:schemeClr val="accent1">
-                <a:shade val="15000"/>
-              </a:schemeClr>
-            </a:lnRef>
-            <a:fillRef idx="1">
-              <a:schemeClr val="accent1"/>
-            </a:fillRef>
-            <a:effectRef idx="0">
-              <a:schemeClr val="accent1"/>
-            </a:effectRef>
-            <a:fontRef idx="minor">
-              <a:schemeClr val="lt1"/>
-            </a:fontRef>
-          </p:style>
-          <p:txBody>
-            <a:bodyPr rtlCol="0" anchor="ctr"/>
-            <a:lstStyle/>
-            <a:p>
-              <a:pPr algn="ctr"/>
-              <a:endParaRPr lang="zh-CN" altLang="en-US"/>
-            </a:p>
-          </p:txBody>
-        </p:sp>
-        <p:sp>
-          <p:nvSpPr>
-            <p:cNvPr id="12" name="矩形 11">
-              <a:extLst>
-                <a:ext uri="{FF2B5EF4-FFF2-40B4-BE49-F238E27FC236}">
-                  <a16:creationId xmlns:a16="http://schemas.microsoft.com/office/drawing/2014/main" id="{E1092223-7520-FA49-7A97-1C9A9202D1C6}"/>
-                </a:ext>
-              </a:extLst>
-            </p:cNvPr>
-            <p:cNvSpPr/>
-            <p:nvPr/>
-          </p:nvSpPr>
-          <p:spPr>
-            <a:xfrm>
-              <a:off x="5581789" y="1512994"/>
-              <a:ext cx="2602911" cy="4684188"/>
-            </a:xfrm>
-            <a:prstGeom prst="rect">
-              <a:avLst/>
-            </a:prstGeom>
+              </a:gs>
+              <a:gs pos="74000">
+                <a:srgbClr val="2E54A1"/>
+              </a:gs>
+              <a:gs pos="100000">
+                <a:srgbClr val="2E54A1"/>
+              </a:gs>
+            </a:gsLst>
+            <a:lin ang="0" scaled="0"/>
+          </a:gradFill>
+          <a:ln>
             <a:noFill/>
-            <a:ln>
-              <a:solidFill>
-                <a:schemeClr val="accent4">
-                  <a:lumMod val="75000"/>
-                </a:schemeClr>
-              </a:solidFill>
-            </a:ln>
-          </p:spPr>
-          <p:style>
-            <a:lnRef idx="2">
-              <a:schemeClr val="accent1">
-                <a:shade val="15000"/>
-              </a:schemeClr>
-            </a:lnRef>
-            <a:fillRef idx="1">
-              <a:schemeClr val="accent1"/>
-            </a:fillRef>
-            <a:effectRef idx="0">
-              <a:schemeClr val="accent1"/>
-            </a:effectRef>
-            <a:fontRef idx="minor">
-              <a:schemeClr val="lt1"/>
-            </a:fontRef>
-          </p:style>
-          <p:txBody>
-            <a:bodyPr rtlCol="0" anchor="ctr"/>
-            <a:lstStyle/>
-            <a:p>
-              <a:pPr algn="ctr"/>
-              <a:endParaRPr lang="zh-CN" altLang="en-US"/>
-            </a:p>
-          </p:txBody>
-        </p:sp>
-        <p:pic>
-          <p:nvPicPr>
-            <p:cNvPr id="18" name="图片 17" descr="图片包含 图示&#10;&#10;描述已自动生成">
-              <a:extLst>
-                <a:ext uri="{FF2B5EF4-FFF2-40B4-BE49-F238E27FC236}">
-                  <a16:creationId xmlns:a16="http://schemas.microsoft.com/office/drawing/2014/main" id="{457744B7-045A-7A61-1B7C-A45FE2CB82BA}"/>
-                </a:ext>
-              </a:extLst>
-            </p:cNvPr>
-            <p:cNvPicPr>
-              <a:picLocks noChangeAspect="1"/>
-            </p:cNvPicPr>
-            <p:nvPr/>
-          </p:nvPicPr>
-          <p:blipFill>
-            <a:blip r:embed="rId10">
-              <a:extLst>
-                <a:ext uri="{28A0092B-C50C-407E-A947-70E740481C1C}">
-                  <a14:useLocalDpi xmlns:a14="http://schemas.microsoft.com/office/drawing/2010/main" val="0"/>
-                </a:ext>
-              </a:extLst>
-            </a:blip>
-            <a:stretch>
-              <a:fillRect/>
-            </a:stretch>
-          </p:blipFill>
-          <p:spPr>
-            <a:xfrm>
-              <a:off x="8242702" y="1768989"/>
-              <a:ext cx="2038578" cy="4172198"/>
-            </a:xfrm>
-            <a:prstGeom prst="rect">
-              <a:avLst/>
-            </a:prstGeom>
-          </p:spPr>
-        </p:pic>
-        <p:sp>
-          <p:nvSpPr>
-            <p:cNvPr id="19" name="矩形 18">
-              <a:extLst>
-                <a:ext uri="{FF2B5EF4-FFF2-40B4-BE49-F238E27FC236}">
-                  <a16:creationId xmlns:a16="http://schemas.microsoft.com/office/drawing/2014/main" id="{5847E35A-4D5F-3D2E-8BF7-C148FAD92A61}"/>
-                </a:ext>
-              </a:extLst>
-            </p:cNvPr>
-            <p:cNvSpPr/>
-            <p:nvPr/>
-          </p:nvSpPr>
-          <p:spPr>
-            <a:xfrm>
-              <a:off x="8266568" y="1512994"/>
-              <a:ext cx="2072713" cy="4684188"/>
-            </a:xfrm>
-            <a:prstGeom prst="rect">
-              <a:avLst/>
-            </a:prstGeom>
-            <a:noFill/>
-            <a:ln>
-              <a:solidFill>
-                <a:schemeClr val="accent4">
-                  <a:lumMod val="75000"/>
-                </a:schemeClr>
-              </a:solidFill>
-            </a:ln>
-          </p:spPr>
-          <p:style>
-            <a:lnRef idx="2">
-              <a:schemeClr val="accent1">
-                <a:shade val="15000"/>
-              </a:schemeClr>
-            </a:lnRef>
-            <a:fillRef idx="1">
-              <a:schemeClr val="accent1"/>
-            </a:fillRef>
-            <a:effectRef idx="0">
-              <a:schemeClr val="accent1"/>
-            </a:effectRef>
-            <a:fontRef idx="minor">
-              <a:schemeClr val="lt1"/>
-            </a:fontRef>
-          </p:style>
-          <p:txBody>
-            <a:bodyPr rtlCol="0" anchor="ctr"/>
-            <a:lstStyle/>
-            <a:p>
-              <a:pPr algn="ctr"/>
-              <a:endParaRPr lang="zh-CN" altLang="en-US"/>
-            </a:p>
-          </p:txBody>
-        </p:sp>
-        <p:sp>
-          <p:nvSpPr>
-            <p:cNvPr id="25" name="文本框 24">
-              <a:extLst>
-                <a:ext uri="{FF2B5EF4-FFF2-40B4-BE49-F238E27FC236}">
-                  <a16:creationId xmlns:a16="http://schemas.microsoft.com/office/drawing/2014/main" id="{C1C2A791-776E-2D00-6AC5-7705C42E939B}"/>
-                </a:ext>
-              </a:extLst>
-            </p:cNvPr>
-            <p:cNvSpPr txBox="1"/>
-            <p:nvPr/>
-          </p:nvSpPr>
-          <p:spPr>
-            <a:xfrm>
-              <a:off x="8100981" y="980308"/>
-              <a:ext cx="2310579" cy="338554"/>
-            </a:xfrm>
-            <a:prstGeom prst="rect">
-              <a:avLst/>
-            </a:prstGeom>
-            <a:noFill/>
-          </p:spPr>
-          <p:txBody>
-            <a:bodyPr wrap="square" rtlCol="0">
-              <a:spAutoFit/>
-            </a:bodyPr>
-            <a:lstStyle/>
-            <a:p>
-              <a:pPr algn="ctr" defTabSz="829544">
-                <a:defRPr/>
-              </a:pPr>
-              <a:r>
-                <a:rPr lang="zh-CN" altLang="en-US" sz="1600" b="1" dirty="0">
-                  <a:solidFill>
-                    <a:srgbClr val="C00000"/>
-                  </a:solidFill>
-                  <a:latin typeface="微软雅黑" panose="020B0503020204020204" charset="-122"/>
-                  <a:ea typeface="微软雅黑" panose="020B0503020204020204" charset="-122"/>
-                </a:rPr>
-                <a:t>高效可学习索引</a:t>
-              </a:r>
-            </a:p>
-          </p:txBody>
-        </p:sp>
-      </p:grpSp>
+          </a:ln>
+        </p:spPr>
+        <p:style>
+          <a:lnRef idx="2">
+            <a:schemeClr val="accent1">
+              <a:lumMod val="75000"/>
+            </a:schemeClr>
+          </a:lnRef>
+          <a:fillRef idx="1">
+            <a:schemeClr val="accent1"/>
+          </a:fillRef>
+          <a:effectRef idx="0">
+            <a:srgbClr val="FFFFFF"/>
+          </a:effectRef>
+          <a:fontRef idx="minor">
+            <a:schemeClr val="lt1"/>
+          </a:fontRef>
+        </p:style>
+        <p:txBody>
+          <a:bodyPr rtlCol="0" anchor="ctr"/>
+          <a:lstStyle/>
+          <a:p>
+            <a:pPr algn="ctr"/>
+            <a:endParaRPr lang="zh-CN" altLang="en-US" sz="1633"/>
+          </a:p>
+        </p:txBody>
+      </p:sp>
+      <p:sp>
+        <p:nvSpPr>
+          <p:cNvPr id="10" name="文本框 9">
+            <a:extLst>
+              <a:ext uri="{FF2B5EF4-FFF2-40B4-BE49-F238E27FC236}">
+                <a16:creationId xmlns:a16="http://schemas.microsoft.com/office/drawing/2014/main" id="{653BDE7C-2C4B-616A-574C-31FFCA5B9434}"/>
+              </a:ext>
+            </a:extLst>
+          </p:cNvPr>
+          <p:cNvSpPr txBox="1"/>
+          <p:nvPr/>
+        </p:nvSpPr>
+        <p:spPr>
+          <a:xfrm>
+            <a:off x="6096666" y="3822450"/>
+            <a:ext cx="543739" cy="307777"/>
+          </a:xfrm>
+          <a:prstGeom prst="rect">
+            <a:avLst/>
+          </a:prstGeom>
+          <a:noFill/>
+        </p:spPr>
+        <p:txBody>
+          <a:bodyPr wrap="none" rtlCol="0">
+            <a:spAutoFit/>
+          </a:bodyPr>
+          <a:lstStyle/>
+          <a:p>
+            <a:r>
+              <a:rPr lang="zh-CN" altLang="en-US" sz="1400" b="1" dirty="0">
+                <a:latin typeface="微软雅黑" panose="020B0503020204020204" pitchFamily="34" charset="-122"/>
+                <a:ea typeface="微软雅黑" panose="020B0503020204020204" pitchFamily="34" charset="-122"/>
+              </a:rPr>
+              <a:t>优化</a:t>
+            </a:r>
+          </a:p>
+        </p:txBody>
+      </p:sp>
     </p:spTree>
     <p:custDataLst>
       <p:tags r:id="rId1"/>
@@ -7704,10 +7812,10 @@
       </p:grpSpPr>
       <p:grpSp>
         <p:nvGrpSpPr>
-          <p:cNvPr id="104" name="组合 103">
+          <p:cNvPr id="7" name="组合 6">
             <a:extLst>
               <a:ext uri="{FF2B5EF4-FFF2-40B4-BE49-F238E27FC236}">
-                <a16:creationId xmlns:a16="http://schemas.microsoft.com/office/drawing/2014/main" id="{048EC704-5F0D-682D-1583-C0272E6849F6}"/>
+                <a16:creationId xmlns:a16="http://schemas.microsoft.com/office/drawing/2014/main" id="{A280D10E-728E-1AB9-F375-9FB31597EDFC}"/>
               </a:ext>
             </a:extLst>
           </p:cNvPr>
@@ -7716,10 +7824,10 @@
         </p:nvGrpSpPr>
         <p:grpSpPr>
           <a:xfrm>
-            <a:off x="4653040" y="87206"/>
-            <a:ext cx="3474079" cy="6313594"/>
-            <a:chOff x="4653040" y="87206"/>
-            <a:chExt cx="3474079" cy="6313594"/>
+            <a:off x="2939203" y="2456150"/>
+            <a:ext cx="6313594" cy="3424075"/>
+            <a:chOff x="2939203" y="2456150"/>
+            <a:chExt cx="6313594" cy="3424075"/>
           </a:xfrm>
         </p:grpSpPr>
         <p:pic>
@@ -7749,8 +7857,8 @@
             </a:stretch>
           </p:blipFill>
           <p:spPr>
-            <a:xfrm rot="5400000">
-              <a:off x="3666923" y="1542454"/>
+            <a:xfrm>
+              <a:off x="3343338" y="4882826"/>
               <a:ext cx="3084634" cy="982408"/>
             </a:xfrm>
             <a:prstGeom prst="rect">
@@ -7771,8 +7879,8 @@
             <p:nvPr/>
           </p:nvSpPr>
           <p:spPr>
-            <a:xfrm>
-              <a:off x="5700444" y="1884553"/>
+            <a:xfrm rot="16200000">
+              <a:off x="4834012" y="4323698"/>
               <a:ext cx="461665" cy="656590"/>
             </a:xfrm>
             <a:prstGeom prst="rect">
@@ -7819,8 +7927,8 @@
             <p:nvPr/>
           </p:nvCxnSpPr>
           <p:spPr>
-            <a:xfrm>
-              <a:off x="6117659" y="2371598"/>
+            <a:xfrm rot="16200000">
+              <a:off x="5249055" y="3954432"/>
               <a:ext cx="485718" cy="536638"/>
             </a:xfrm>
             <a:prstGeom prst="line">
@@ -7849,12 +7957,289 @@
             </a:fontRef>
           </p:style>
         </p:cxnSp>
+        <p:sp>
+          <p:nvSpPr>
+            <p:cNvPr id="2" name="矩形: 圆角 1">
+              <a:extLst>
+                <a:ext uri="{FF2B5EF4-FFF2-40B4-BE49-F238E27FC236}">
+                  <a16:creationId xmlns:a16="http://schemas.microsoft.com/office/drawing/2014/main" id="{C7B471E0-AE9C-DDDB-0ED5-D5D889916636}"/>
+                </a:ext>
+              </a:extLst>
+            </p:cNvPr>
+            <p:cNvSpPr/>
+            <p:nvPr/>
+          </p:nvSpPr>
+          <p:spPr>
+            <a:xfrm rot="16200000">
+              <a:off x="5396633" y="3349061"/>
+              <a:ext cx="727200" cy="303144"/>
+            </a:xfrm>
+            <a:prstGeom prst="roundRect">
+              <a:avLst/>
+            </a:prstGeom>
+            <a:noFill/>
+            <a:ln>
+              <a:solidFill>
+                <a:schemeClr val="tx1"/>
+              </a:solidFill>
+            </a:ln>
+          </p:spPr>
+          <p:style>
+            <a:lnRef idx="2">
+              <a:schemeClr val="accent1">
+                <a:shade val="15000"/>
+              </a:schemeClr>
+            </a:lnRef>
+            <a:fillRef idx="1">
+              <a:schemeClr val="accent1"/>
+            </a:fillRef>
+            <a:effectRef idx="0">
+              <a:schemeClr val="accent1"/>
+            </a:effectRef>
+            <a:fontRef idx="minor">
+              <a:schemeClr val="lt1"/>
+            </a:fontRef>
+          </p:style>
+          <p:txBody>
+            <a:bodyPr vert="vert" rtlCol="0" anchor="ctr">
+              <a:noAutofit/>
+            </a:bodyPr>
+            <a:lstStyle/>
+            <a:p>
+              <a:pPr algn="ctr"/>
+              <a:r>
+                <a:rPr lang="zh-CN" altLang="en-US" sz="1600" b="1" dirty="0">
+                  <a:solidFill>
+                    <a:schemeClr val="tx1"/>
+                  </a:solidFill>
+                  <a:latin typeface="微软雅黑" panose="020B0503020204020204" pitchFamily="34" charset="-122"/>
+                  <a:ea typeface="微软雅黑" panose="020B0503020204020204" pitchFamily="34" charset="-122"/>
+                </a:rPr>
+                <a:t>时段</a:t>
+              </a:r>
+            </a:p>
+          </p:txBody>
+        </p:sp>
+        <p:sp>
+          <p:nvSpPr>
+            <p:cNvPr id="3" name="矩形: 圆角 2">
+              <a:extLst>
+                <a:ext uri="{FF2B5EF4-FFF2-40B4-BE49-F238E27FC236}">
+                  <a16:creationId xmlns:a16="http://schemas.microsoft.com/office/drawing/2014/main" id="{22B78F44-6C82-7798-A409-82AE049C9F65}"/>
+                </a:ext>
+              </a:extLst>
+            </p:cNvPr>
+            <p:cNvSpPr/>
+            <p:nvPr/>
+          </p:nvSpPr>
+          <p:spPr>
+            <a:xfrm rot="16200000">
+              <a:off x="5867818" y="3341384"/>
+              <a:ext cx="727200" cy="303144"/>
+            </a:xfrm>
+            <a:prstGeom prst="roundRect">
+              <a:avLst/>
+            </a:prstGeom>
+            <a:noFill/>
+            <a:ln>
+              <a:solidFill>
+                <a:schemeClr val="tx1"/>
+              </a:solidFill>
+            </a:ln>
+          </p:spPr>
+          <p:style>
+            <a:lnRef idx="2">
+              <a:schemeClr val="accent1">
+                <a:shade val="15000"/>
+              </a:schemeClr>
+            </a:lnRef>
+            <a:fillRef idx="1">
+              <a:schemeClr val="accent1"/>
+            </a:fillRef>
+            <a:effectRef idx="0">
+              <a:schemeClr val="accent1"/>
+            </a:effectRef>
+            <a:fontRef idx="minor">
+              <a:schemeClr val="lt1"/>
+            </a:fontRef>
+          </p:style>
+          <p:txBody>
+            <a:bodyPr vert="vert" rtlCol="0" anchor="ctr">
+              <a:noAutofit/>
+            </a:bodyPr>
+            <a:lstStyle/>
+            <a:p>
+              <a:pPr algn="ctr"/>
+              <a:r>
+                <a:rPr lang="zh-CN" altLang="en-US" sz="1600" b="1" dirty="0">
+                  <a:solidFill>
+                    <a:schemeClr val="tx1"/>
+                  </a:solidFill>
+                  <a:latin typeface="微软雅黑" panose="020B0503020204020204" pitchFamily="34" charset="-122"/>
+                  <a:ea typeface="微软雅黑" panose="020B0503020204020204" pitchFamily="34" charset="-122"/>
+                </a:rPr>
+                <a:t>频段</a:t>
+              </a:r>
+            </a:p>
+          </p:txBody>
+        </p:sp>
+        <p:sp>
+          <p:nvSpPr>
+            <p:cNvPr id="20" name="矩形: 圆角 19">
+              <a:extLst>
+                <a:ext uri="{FF2B5EF4-FFF2-40B4-BE49-F238E27FC236}">
+                  <a16:creationId xmlns:a16="http://schemas.microsoft.com/office/drawing/2014/main" id="{6175A6F5-73C4-7CDF-6476-1AFA38999BCC}"/>
+                </a:ext>
+              </a:extLst>
+            </p:cNvPr>
+            <p:cNvSpPr/>
+            <p:nvPr/>
+          </p:nvSpPr>
+          <p:spPr>
+            <a:xfrm rot="16200000">
+              <a:off x="5264933" y="2767106"/>
+              <a:ext cx="990600" cy="1434973"/>
+            </a:xfrm>
+            <a:prstGeom prst="roundRect">
+              <a:avLst/>
+            </a:prstGeom>
+            <a:noFill/>
+            <a:ln>
+              <a:solidFill>
+                <a:schemeClr val="tx1"/>
+              </a:solidFill>
+              <a:prstDash val="dash"/>
+            </a:ln>
+          </p:spPr>
+          <p:style>
+            <a:lnRef idx="2">
+              <a:schemeClr val="accent1">
+                <a:shade val="15000"/>
+              </a:schemeClr>
+            </a:lnRef>
+            <a:fillRef idx="1">
+              <a:schemeClr val="accent1"/>
+            </a:fillRef>
+            <a:effectRef idx="0">
+              <a:schemeClr val="accent1"/>
+            </a:effectRef>
+            <a:fontRef idx="minor">
+              <a:schemeClr val="lt1"/>
+            </a:fontRef>
+          </p:style>
+          <p:txBody>
+            <a:bodyPr vert="vert" rtlCol="0" anchor="ctr"/>
+            <a:lstStyle/>
+            <a:p>
+              <a:pPr algn="ctr"/>
+              <a:endParaRPr lang="zh-CN" altLang="en-US"/>
+            </a:p>
+          </p:txBody>
+        </p:sp>
+        <p:sp>
+          <p:nvSpPr>
+            <p:cNvPr id="81" name="文本框 80">
+              <a:extLst>
+                <a:ext uri="{FF2B5EF4-FFF2-40B4-BE49-F238E27FC236}">
+                  <a16:creationId xmlns:a16="http://schemas.microsoft.com/office/drawing/2014/main" id="{1A40F82F-AC3E-859B-5DF7-A3D45163F57F}"/>
+                </a:ext>
+              </a:extLst>
+            </p:cNvPr>
+            <p:cNvSpPr txBox="1"/>
+            <p:nvPr/>
+          </p:nvSpPr>
+          <p:spPr>
+            <a:xfrm rot="16200000">
+              <a:off x="4787578" y="3333684"/>
+              <a:ext cx="1169551" cy="297517"/>
+            </a:xfrm>
+            <a:prstGeom prst="rect">
+              <a:avLst/>
+            </a:prstGeom>
+            <a:noFill/>
+          </p:spPr>
+          <p:txBody>
+            <a:bodyPr vert="vert" wrap="none" rtlCol="0">
+              <a:spAutoFit/>
+            </a:bodyPr>
+            <a:lstStyle/>
+            <a:p>
+              <a:r>
+                <a:rPr lang="zh-CN" altLang="en-US" sz="1600" b="1" dirty="0">
+                  <a:solidFill>
+                    <a:srgbClr val="C00000"/>
+                  </a:solidFill>
+                  <a:latin typeface="微软雅黑" panose="020B0503020204020204" pitchFamily="34" charset="-122"/>
+                  <a:ea typeface="微软雅黑" panose="020B0503020204020204" pitchFamily="34" charset="-122"/>
+                </a:rPr>
+                <a:t>区</a:t>
+              </a:r>
+              <a:endParaRPr lang="en-US" altLang="zh-CN" sz="1600" b="1" dirty="0">
+                <a:solidFill>
+                  <a:srgbClr val="C00000"/>
+                </a:solidFill>
+                <a:latin typeface="微软雅黑" panose="020B0503020204020204" pitchFamily="34" charset="-122"/>
+                <a:ea typeface="微软雅黑" panose="020B0503020204020204" pitchFamily="34" charset="-122"/>
+              </a:endParaRPr>
+            </a:p>
+            <a:p>
+              <a:r>
+                <a:rPr lang="zh-CN" altLang="en-US" sz="1600" b="1" dirty="0">
+                  <a:solidFill>
+                    <a:srgbClr val="C00000"/>
+                  </a:solidFill>
+                  <a:latin typeface="微软雅黑" panose="020B0503020204020204" pitchFamily="34" charset="-122"/>
+                  <a:ea typeface="微软雅黑" panose="020B0503020204020204" pitchFamily="34" charset="-122"/>
+                </a:rPr>
+                <a:t>间</a:t>
+              </a:r>
+              <a:endParaRPr lang="en-US" altLang="zh-CN" sz="1600" b="1" dirty="0">
+                <a:solidFill>
+                  <a:srgbClr val="C00000"/>
+                </a:solidFill>
+                <a:latin typeface="微软雅黑" panose="020B0503020204020204" pitchFamily="34" charset="-122"/>
+                <a:ea typeface="微软雅黑" panose="020B0503020204020204" pitchFamily="34" charset="-122"/>
+              </a:endParaRPr>
+            </a:p>
+            <a:p>
+              <a:r>
+                <a:rPr lang="zh-CN" altLang="en-US" sz="1600" b="1" dirty="0">
+                  <a:solidFill>
+                    <a:srgbClr val="C00000"/>
+                  </a:solidFill>
+                  <a:latin typeface="微软雅黑" panose="020B0503020204020204" pitchFamily="34" charset="-122"/>
+                  <a:ea typeface="微软雅黑" panose="020B0503020204020204" pitchFamily="34" charset="-122"/>
+                </a:rPr>
+                <a:t>检</a:t>
+              </a:r>
+              <a:endParaRPr lang="en-US" altLang="zh-CN" sz="1600" b="1" dirty="0">
+                <a:solidFill>
+                  <a:srgbClr val="C00000"/>
+                </a:solidFill>
+                <a:latin typeface="微软雅黑" panose="020B0503020204020204" pitchFamily="34" charset="-122"/>
+                <a:ea typeface="微软雅黑" panose="020B0503020204020204" pitchFamily="34" charset="-122"/>
+              </a:endParaRPr>
+            </a:p>
+            <a:p>
+              <a:r>
+                <a:rPr lang="zh-CN" altLang="en-US" sz="1600" b="1" dirty="0">
+                  <a:solidFill>
+                    <a:srgbClr val="C00000"/>
+                  </a:solidFill>
+                  <a:latin typeface="微软雅黑" panose="020B0503020204020204" pitchFamily="34" charset="-122"/>
+                  <a:ea typeface="微软雅黑" panose="020B0503020204020204" pitchFamily="34" charset="-122"/>
+                </a:rPr>
+                <a:t>索</a:t>
+              </a:r>
+            </a:p>
+          </p:txBody>
+        </p:sp>
         <p:grpSp>
           <p:nvGrpSpPr>
-            <p:cNvPr id="97" name="组合 96">
+            <p:cNvPr id="83" name="组合 82">
               <a:extLst>
                 <a:ext uri="{FF2B5EF4-FFF2-40B4-BE49-F238E27FC236}">
-                  <a16:creationId xmlns:a16="http://schemas.microsoft.com/office/drawing/2014/main" id="{214914F0-783C-9257-93F1-EB214EEA2BDD}"/>
+                  <a16:creationId xmlns:a16="http://schemas.microsoft.com/office/drawing/2014/main" id="{CD3C30E3-7EF8-AF49-F54C-79A7302DC369}"/>
                 </a:ext>
               </a:extLst>
             </p:cNvPr>
@@ -7862,19 +8247,19 @@
             <p:nvPr/>
           </p:nvGrpSpPr>
           <p:grpSpPr>
-            <a:xfrm>
-              <a:off x="6595976" y="2190749"/>
-              <a:ext cx="1005403" cy="1434973"/>
-              <a:chOff x="6595976" y="1530349"/>
-              <a:chExt cx="1005403" cy="1434973"/>
+            <a:xfrm rot="16200000">
+              <a:off x="7398408" y="2681833"/>
+              <a:ext cx="727201" cy="1563171"/>
+              <a:chOff x="6727527" y="3575975"/>
+              <a:chExt cx="727201" cy="1563171"/>
             </a:xfrm>
           </p:grpSpPr>
           <p:sp>
             <p:nvSpPr>
-              <p:cNvPr id="2" name="矩形: 圆角 1">
+              <p:cNvPr id="17" name="矩形: 圆角 16">
                 <a:extLst>
                   <a:ext uri="{FF2B5EF4-FFF2-40B4-BE49-F238E27FC236}">
-                    <a16:creationId xmlns:a16="http://schemas.microsoft.com/office/drawing/2014/main" id="{C7B471E0-AE9C-DDDB-0ED5-D5D889916636}"/>
+                    <a16:creationId xmlns:a16="http://schemas.microsoft.com/office/drawing/2014/main" id="{1FDA02A9-0A80-CE05-B406-BEA92A0E52B4}"/>
                   </a:ext>
                 </a:extLst>
               </p:cNvPr>
@@ -7883,7 +8268,7 @@
             </p:nvSpPr>
             <p:spPr>
               <a:xfrm>
-                <a:off x="6726714" y="2074390"/>
+                <a:off x="6727528" y="3575975"/>
                 <a:ext cx="727200" cy="303144"/>
               </a:xfrm>
               <a:prstGeom prst="roundRect">
@@ -7913,7 +8298,7 @@
               </a:fontRef>
             </p:style>
             <p:txBody>
-              <a:bodyPr rtlCol="0" anchor="ctr">
+              <a:bodyPr vert="vert" rtlCol="0" anchor="ctr">
                 <a:noAutofit/>
               </a:bodyPr>
               <a:lstStyle/>
@@ -7927,17 +8312,17 @@
                     <a:latin typeface="微软雅黑" panose="020B0503020204020204" pitchFamily="34" charset="-122"/>
                     <a:ea typeface="微软雅黑" panose="020B0503020204020204" pitchFamily="34" charset="-122"/>
                   </a:rPr>
-                  <a:t>时段</a:t>
+                  <a:t>节点</a:t>
                 </a:r>
               </a:p>
             </p:txBody>
           </p:sp>
           <p:sp>
             <p:nvSpPr>
-              <p:cNvPr id="3" name="矩形: 圆角 2">
+              <p:cNvPr id="18" name="矩形: 圆角 17">
                 <a:extLst>
                   <a:ext uri="{FF2B5EF4-FFF2-40B4-BE49-F238E27FC236}">
-                    <a16:creationId xmlns:a16="http://schemas.microsoft.com/office/drawing/2014/main" id="{22B78F44-6C82-7798-A409-82AE049C9F65}"/>
+                    <a16:creationId xmlns:a16="http://schemas.microsoft.com/office/drawing/2014/main" id="{F96BA078-7D90-8230-157C-F1916825576D}"/>
                   </a:ext>
                 </a:extLst>
               </p:cNvPr>
@@ -7946,8 +8331,8 @@
             </p:nvSpPr>
             <p:spPr>
               <a:xfrm>
-                <a:off x="6726713" y="2567449"/>
-                <a:ext cx="727200" cy="303144"/>
+                <a:off x="6727527" y="3947975"/>
+                <a:ext cx="726386" cy="558002"/>
               </a:xfrm>
               <a:prstGeom prst="roundRect">
                 <a:avLst/>
@@ -7976,7 +8361,7 @@
               </a:fontRef>
             </p:style>
             <p:txBody>
-              <a:bodyPr rtlCol="0" anchor="ctr">
+              <a:bodyPr vert="vert" rtlCol="0" anchor="ctr">
                 <a:noAutofit/>
               </a:bodyPr>
               <a:lstStyle/>
@@ -7990,17 +8375,17 @@
                     <a:latin typeface="微软雅黑" panose="020B0503020204020204" pitchFamily="34" charset="-122"/>
                     <a:ea typeface="微软雅黑" panose="020B0503020204020204" pitchFamily="34" charset="-122"/>
                   </a:rPr>
-                  <a:t>频段</a:t>
+                  <a:t>调制样式</a:t>
                 </a:r>
               </a:p>
             </p:txBody>
           </p:sp>
           <p:sp>
             <p:nvSpPr>
-              <p:cNvPr id="20" name="矩形: 圆角 19">
+              <p:cNvPr id="19" name="矩形: 圆角 18">
                 <a:extLst>
                   <a:ext uri="{FF2B5EF4-FFF2-40B4-BE49-F238E27FC236}">
-                    <a16:creationId xmlns:a16="http://schemas.microsoft.com/office/drawing/2014/main" id="{6175A6F5-73C4-7CDF-6476-1AFA38999BCC}"/>
+                    <a16:creationId xmlns:a16="http://schemas.microsoft.com/office/drawing/2014/main" id="{C08C3313-2FA4-9D0D-0C3F-DFD313FE8CA6}"/>
                   </a:ext>
                 </a:extLst>
               </p:cNvPr>
@@ -8009,8 +8394,8 @@
             </p:nvSpPr>
             <p:spPr>
               <a:xfrm>
-                <a:off x="6603377" y="1530349"/>
-                <a:ext cx="990600" cy="1434973"/>
+                <a:off x="6727528" y="4581146"/>
+                <a:ext cx="727200" cy="558000"/>
               </a:xfrm>
               <a:prstGeom prst="roundRect">
                 <a:avLst/>
@@ -8020,7 +8405,6 @@
                 <a:solidFill>
                   <a:schemeClr val="tx1"/>
                 </a:solidFill>
-                <a:prstDash val="dash"/>
               </a:ln>
             </p:spPr>
             <p:style>
@@ -8040,384 +8424,180 @@
               </a:fontRef>
             </p:style>
             <p:txBody>
-              <a:bodyPr rtlCol="0" anchor="ctr"/>
+              <a:bodyPr vert="vert" rtlCol="0" anchor="ctr">
+                <a:noAutofit/>
+              </a:bodyPr>
               <a:lstStyle/>
               <a:p>
                 <a:pPr algn="ctr"/>
-                <a:endParaRPr lang="zh-CN" altLang="en-US"/>
-              </a:p>
-            </p:txBody>
-          </p:sp>
-          <p:sp>
-            <p:nvSpPr>
-              <p:cNvPr id="81" name="文本框 80">
-                <a:extLst>
-                  <a:ext uri="{FF2B5EF4-FFF2-40B4-BE49-F238E27FC236}">
-                    <a16:creationId xmlns:a16="http://schemas.microsoft.com/office/drawing/2014/main" id="{1A40F82F-AC3E-859B-5DF7-A3D45163F57F}"/>
-                  </a:ext>
-                </a:extLst>
-              </p:cNvPr>
-              <p:cNvSpPr txBox="1"/>
-              <p:nvPr/>
-            </p:nvSpPr>
-            <p:spPr>
-              <a:xfrm>
-                <a:off x="6595976" y="1630472"/>
-                <a:ext cx="1005403" cy="338554"/>
-              </a:xfrm>
-              <a:prstGeom prst="rect">
-                <a:avLst/>
-              </a:prstGeom>
-              <a:noFill/>
-            </p:spPr>
-            <p:txBody>
-              <a:bodyPr wrap="none" rtlCol="0">
-                <a:spAutoFit/>
-              </a:bodyPr>
-              <a:lstStyle/>
-              <a:p>
                 <a:r>
                   <a:rPr lang="zh-CN" altLang="en-US" sz="1600" b="1" dirty="0">
                     <a:solidFill>
-                      <a:srgbClr val="C00000"/>
+                      <a:schemeClr val="tx1"/>
                     </a:solidFill>
                     <a:latin typeface="微软雅黑" panose="020B0503020204020204" pitchFamily="34" charset="-122"/>
                     <a:ea typeface="微软雅黑" panose="020B0503020204020204" pitchFamily="34" charset="-122"/>
                   </a:rPr>
-                  <a:t>区间检索</a:t>
+                  <a:t>事件类型</a:t>
                 </a:r>
               </a:p>
             </p:txBody>
           </p:sp>
         </p:grpSp>
-        <p:grpSp>
-          <p:nvGrpSpPr>
-            <p:cNvPr id="86" name="组合 85">
+        <p:sp>
+          <p:nvSpPr>
+            <p:cNvPr id="21" name="矩形: 圆角 20">
               <a:extLst>
                 <a:ext uri="{FF2B5EF4-FFF2-40B4-BE49-F238E27FC236}">
-                  <a16:creationId xmlns:a16="http://schemas.microsoft.com/office/drawing/2014/main" id="{EB93A210-0CB6-C4A2-21D9-6C813F3382EB}"/>
+                  <a16:creationId xmlns:a16="http://schemas.microsoft.com/office/drawing/2014/main" id="{61DD1126-93BF-F06C-630D-A72A94C491E3}"/>
                 </a:ext>
               </a:extLst>
             </p:cNvPr>
-            <p:cNvGrpSpPr/>
+            <p:cNvSpPr/>
             <p:nvPr/>
-          </p:nvGrpSpPr>
-          <p:grpSpPr>
-            <a:xfrm>
-              <a:off x="6617150" y="4024773"/>
-              <a:ext cx="1005403" cy="2172827"/>
-              <a:chOff x="6617150" y="3707273"/>
-              <a:chExt cx="1005403" cy="2172827"/>
+          </p:nvSpPr>
+          <p:spPr>
+            <a:xfrm rot="16200000">
+              <a:off x="7467884" y="2377004"/>
+              <a:ext cx="990600" cy="2172827"/>
             </a:xfrm>
-          </p:grpSpPr>
-          <p:grpSp>
-            <p:nvGrpSpPr>
-              <p:cNvPr id="83" name="组合 82">
-                <a:extLst>
-                  <a:ext uri="{FF2B5EF4-FFF2-40B4-BE49-F238E27FC236}">
-                    <a16:creationId xmlns:a16="http://schemas.microsoft.com/office/drawing/2014/main" id="{CD3C30E3-7EF8-AF49-F54C-79A7302DC369}"/>
-                  </a:ext>
-                </a:extLst>
-              </p:cNvPr>
-              <p:cNvGrpSpPr/>
-              <p:nvPr/>
-            </p:nvGrpSpPr>
-            <p:grpSpPr>
-              <a:xfrm>
-                <a:off x="6756251" y="3810925"/>
-                <a:ext cx="727200" cy="1563171"/>
-                <a:chOff x="6727528" y="3575975"/>
-                <a:chExt cx="727200" cy="1563171"/>
-              </a:xfrm>
-            </p:grpSpPr>
-            <p:sp>
-              <p:nvSpPr>
-                <p:cNvPr id="17" name="矩形: 圆角 16">
-                  <a:extLst>
-                    <a:ext uri="{FF2B5EF4-FFF2-40B4-BE49-F238E27FC236}">
-                      <a16:creationId xmlns:a16="http://schemas.microsoft.com/office/drawing/2014/main" id="{1FDA02A9-0A80-CE05-B406-BEA92A0E52B4}"/>
-                    </a:ext>
-                  </a:extLst>
-                </p:cNvPr>
-                <p:cNvSpPr/>
-                <p:nvPr/>
-              </p:nvSpPr>
-              <p:spPr>
-                <a:xfrm>
-                  <a:off x="6727528" y="3575975"/>
-                  <a:ext cx="727200" cy="303144"/>
-                </a:xfrm>
-                <a:prstGeom prst="roundRect">
-                  <a:avLst/>
-                </a:prstGeom>
-                <a:noFill/>
-                <a:ln>
+            <a:prstGeom prst="roundRect">
+              <a:avLst/>
+            </a:prstGeom>
+            <a:noFill/>
+            <a:ln>
+              <a:solidFill>
+                <a:schemeClr val="tx1"/>
+              </a:solidFill>
+              <a:prstDash val="dash"/>
+            </a:ln>
+          </p:spPr>
+          <p:style>
+            <a:lnRef idx="2">
+              <a:schemeClr val="accent1">
+                <a:shade val="15000"/>
+              </a:schemeClr>
+            </a:lnRef>
+            <a:fillRef idx="1">
+              <a:schemeClr val="accent1"/>
+            </a:fillRef>
+            <a:effectRef idx="0">
+              <a:schemeClr val="accent1"/>
+            </a:effectRef>
+            <a:fontRef idx="minor">
+              <a:schemeClr val="lt1"/>
+            </a:fontRef>
+          </p:style>
+          <p:txBody>
+            <a:bodyPr vert="vert" rtlCol="0" anchor="ctr"/>
+            <a:lstStyle/>
+            <a:p>
+              <a:pPr algn="ctr"/>
+              <a:endParaRPr lang="zh-CN" altLang="en-US"/>
+            </a:p>
+          </p:txBody>
+        </p:sp>
+        <p:sp>
+          <p:nvSpPr>
+            <p:cNvPr id="82" name="文本框 81">
+              <a:extLst>
+                <a:ext uri="{FF2B5EF4-FFF2-40B4-BE49-F238E27FC236}">
+                  <a16:creationId xmlns:a16="http://schemas.microsoft.com/office/drawing/2014/main" id="{7407A65C-3461-BC12-75B1-5F67267BADC5}"/>
+                </a:ext>
+              </a:extLst>
+            </p:cNvPr>
+            <p:cNvSpPr txBox="1"/>
+            <p:nvPr/>
+          </p:nvSpPr>
+          <p:spPr>
+            <a:xfrm rot="16200000">
+              <a:off x="8213992" y="3314658"/>
+              <a:ext cx="1169551" cy="297517"/>
+            </a:xfrm>
+            <a:prstGeom prst="rect">
+              <a:avLst/>
+            </a:prstGeom>
+            <a:noFill/>
+          </p:spPr>
+          <p:txBody>
+            <a:bodyPr vert="vert" wrap="none" rtlCol="0">
+              <a:spAutoFit/>
+            </a:bodyPr>
+            <a:lstStyle/>
+            <a:p>
+              <a:r>
+                <a:rPr lang="zh-CN" altLang="en-US" sz="1600" b="1" dirty="0">
                   <a:solidFill>
-                    <a:schemeClr val="tx1"/>
+                    <a:srgbClr val="C00000"/>
                   </a:solidFill>
-                </a:ln>
-              </p:spPr>
-              <p:style>
-                <a:lnRef idx="2">
-                  <a:schemeClr val="accent1">
-                    <a:shade val="15000"/>
-                  </a:schemeClr>
-                </a:lnRef>
-                <a:fillRef idx="1">
-                  <a:schemeClr val="accent1"/>
-                </a:fillRef>
-                <a:effectRef idx="0">
-                  <a:schemeClr val="accent1"/>
-                </a:effectRef>
-                <a:fontRef idx="minor">
-                  <a:schemeClr val="lt1"/>
-                </a:fontRef>
-              </p:style>
-              <p:txBody>
-                <a:bodyPr rtlCol="0" anchor="ctr">
-                  <a:noAutofit/>
-                </a:bodyPr>
-                <a:lstStyle/>
-                <a:p>
-                  <a:pPr algn="ctr"/>
-                  <a:r>
-                    <a:rPr lang="zh-CN" altLang="en-US" sz="1600" b="1" dirty="0">
-                      <a:solidFill>
-                        <a:schemeClr val="tx1"/>
-                      </a:solidFill>
-                      <a:latin typeface="微软雅黑" panose="020B0503020204020204" pitchFamily="34" charset="-122"/>
-                      <a:ea typeface="微软雅黑" panose="020B0503020204020204" pitchFamily="34" charset="-122"/>
-                    </a:rPr>
-                    <a:t>节点</a:t>
-                  </a:r>
-                </a:p>
-              </p:txBody>
-            </p:sp>
-            <p:sp>
-              <p:nvSpPr>
-                <p:cNvPr id="18" name="矩形: 圆角 17">
-                  <a:extLst>
-                    <a:ext uri="{FF2B5EF4-FFF2-40B4-BE49-F238E27FC236}">
-                      <a16:creationId xmlns:a16="http://schemas.microsoft.com/office/drawing/2014/main" id="{F96BA078-7D90-8230-157C-F1916825576D}"/>
-                    </a:ext>
-                  </a:extLst>
-                </p:cNvPr>
-                <p:cNvSpPr/>
-                <p:nvPr/>
-              </p:nvSpPr>
-              <p:spPr>
-                <a:xfrm>
-                  <a:off x="6727528" y="3947974"/>
-                  <a:ext cx="726386" cy="538255"/>
-                </a:xfrm>
-                <a:prstGeom prst="roundRect">
-                  <a:avLst/>
-                </a:prstGeom>
-                <a:noFill/>
-                <a:ln>
+                  <a:latin typeface="微软雅黑" panose="020B0503020204020204" pitchFamily="34" charset="-122"/>
+                  <a:ea typeface="微软雅黑" panose="020B0503020204020204" pitchFamily="34" charset="-122"/>
+                </a:rPr>
+                <a:t>等</a:t>
+              </a:r>
+              <a:endParaRPr lang="en-US" altLang="zh-CN" sz="1600" b="1" dirty="0">
+                <a:solidFill>
+                  <a:srgbClr val="C00000"/>
+                </a:solidFill>
+                <a:latin typeface="微软雅黑" panose="020B0503020204020204" pitchFamily="34" charset="-122"/>
+                <a:ea typeface="微软雅黑" panose="020B0503020204020204" pitchFamily="34" charset="-122"/>
+              </a:endParaRPr>
+            </a:p>
+            <a:p>
+              <a:r>
+                <a:rPr lang="zh-CN" altLang="en-US" sz="1600" b="1" dirty="0">
                   <a:solidFill>
-                    <a:schemeClr val="tx1"/>
+                    <a:srgbClr val="C00000"/>
                   </a:solidFill>
-                </a:ln>
-              </p:spPr>
-              <p:style>
-                <a:lnRef idx="2">
-                  <a:schemeClr val="accent1">
-                    <a:shade val="15000"/>
-                  </a:schemeClr>
-                </a:lnRef>
-                <a:fillRef idx="1">
-                  <a:schemeClr val="accent1"/>
-                </a:fillRef>
-                <a:effectRef idx="0">
-                  <a:schemeClr val="accent1"/>
-                </a:effectRef>
-                <a:fontRef idx="minor">
-                  <a:schemeClr val="lt1"/>
-                </a:fontRef>
-              </p:style>
-              <p:txBody>
-                <a:bodyPr vert="horz" rtlCol="0" anchor="ctr">
-                  <a:noAutofit/>
-                </a:bodyPr>
-                <a:lstStyle/>
-                <a:p>
-                  <a:pPr algn="ctr"/>
-                  <a:r>
-                    <a:rPr lang="zh-CN" altLang="en-US" sz="1600" b="1" dirty="0">
-                      <a:solidFill>
-                        <a:schemeClr val="tx1"/>
-                      </a:solidFill>
-                      <a:latin typeface="微软雅黑" panose="020B0503020204020204" pitchFamily="34" charset="-122"/>
-                      <a:ea typeface="微软雅黑" panose="020B0503020204020204" pitchFamily="34" charset="-122"/>
-                    </a:rPr>
-                    <a:t>调制样式</a:t>
-                  </a:r>
-                </a:p>
-              </p:txBody>
-            </p:sp>
-            <p:sp>
-              <p:nvSpPr>
-                <p:cNvPr id="19" name="矩形: 圆角 18">
-                  <a:extLst>
-                    <a:ext uri="{FF2B5EF4-FFF2-40B4-BE49-F238E27FC236}">
-                      <a16:creationId xmlns:a16="http://schemas.microsoft.com/office/drawing/2014/main" id="{C08C3313-2FA4-9D0D-0C3F-DFD313FE8CA6}"/>
-                    </a:ext>
-                  </a:extLst>
-                </p:cNvPr>
-                <p:cNvSpPr/>
-                <p:nvPr/>
-              </p:nvSpPr>
-              <p:spPr>
-                <a:xfrm>
-                  <a:off x="6727528" y="4581146"/>
-                  <a:ext cx="727200" cy="558000"/>
-                </a:xfrm>
-                <a:prstGeom prst="roundRect">
-                  <a:avLst/>
-                </a:prstGeom>
-                <a:noFill/>
-                <a:ln>
+                  <a:latin typeface="微软雅黑" panose="020B0503020204020204" pitchFamily="34" charset="-122"/>
+                  <a:ea typeface="微软雅黑" panose="020B0503020204020204" pitchFamily="34" charset="-122"/>
+                </a:rPr>
+                <a:t>值</a:t>
+              </a:r>
+              <a:endParaRPr lang="en-US" altLang="zh-CN" sz="1600" b="1" dirty="0">
+                <a:solidFill>
+                  <a:srgbClr val="C00000"/>
+                </a:solidFill>
+                <a:latin typeface="微软雅黑" panose="020B0503020204020204" pitchFamily="34" charset="-122"/>
+                <a:ea typeface="微软雅黑" panose="020B0503020204020204" pitchFamily="34" charset="-122"/>
+              </a:endParaRPr>
+            </a:p>
+            <a:p>
+              <a:r>
+                <a:rPr lang="zh-CN" altLang="en-US" sz="1600" b="1" dirty="0">
                   <a:solidFill>
-                    <a:schemeClr val="tx1"/>
+                    <a:srgbClr val="C00000"/>
                   </a:solidFill>
-                </a:ln>
-              </p:spPr>
-              <p:style>
-                <a:lnRef idx="2">
-                  <a:schemeClr val="accent1">
-                    <a:shade val="15000"/>
-                  </a:schemeClr>
-                </a:lnRef>
-                <a:fillRef idx="1">
-                  <a:schemeClr val="accent1"/>
-                </a:fillRef>
-                <a:effectRef idx="0">
-                  <a:schemeClr val="accent1"/>
-                </a:effectRef>
-                <a:fontRef idx="minor">
-                  <a:schemeClr val="lt1"/>
-                </a:fontRef>
-              </p:style>
-              <p:txBody>
-                <a:bodyPr rtlCol="0" anchor="ctr">
-                  <a:noAutofit/>
-                </a:bodyPr>
-                <a:lstStyle/>
-                <a:p>
-                  <a:pPr algn="ctr"/>
-                  <a:r>
-                    <a:rPr lang="zh-CN" altLang="en-US" sz="1600" b="1" dirty="0">
-                      <a:solidFill>
-                        <a:schemeClr val="tx1"/>
-                      </a:solidFill>
-                      <a:latin typeface="微软雅黑" panose="020B0503020204020204" pitchFamily="34" charset="-122"/>
-                      <a:ea typeface="微软雅黑" panose="020B0503020204020204" pitchFamily="34" charset="-122"/>
-                    </a:rPr>
-                    <a:t>事件类型</a:t>
-                  </a:r>
-                </a:p>
-              </p:txBody>
-            </p:sp>
-          </p:grpSp>
-          <p:sp>
-            <p:nvSpPr>
-              <p:cNvPr id="21" name="矩形: 圆角 20">
-                <a:extLst>
-                  <a:ext uri="{FF2B5EF4-FFF2-40B4-BE49-F238E27FC236}">
-                    <a16:creationId xmlns:a16="http://schemas.microsoft.com/office/drawing/2014/main" id="{61DD1126-93BF-F06C-630D-A72A94C491E3}"/>
-                  </a:ext>
-                </a:extLst>
-              </p:cNvPr>
-              <p:cNvSpPr/>
-              <p:nvPr/>
-            </p:nvSpPr>
-            <p:spPr>
-              <a:xfrm>
-                <a:off x="6624551" y="3707273"/>
-                <a:ext cx="990600" cy="2172827"/>
-              </a:xfrm>
-              <a:prstGeom prst="roundRect">
-                <a:avLst/>
-              </a:prstGeom>
-              <a:noFill/>
-              <a:ln>
+                  <a:latin typeface="微软雅黑" panose="020B0503020204020204" pitchFamily="34" charset="-122"/>
+                  <a:ea typeface="微软雅黑" panose="020B0503020204020204" pitchFamily="34" charset="-122"/>
+                </a:rPr>
+                <a:t>匹</a:t>
+              </a:r>
+              <a:endParaRPr lang="en-US" altLang="zh-CN" sz="1600" b="1" dirty="0">
                 <a:solidFill>
-                  <a:schemeClr val="tx1"/>
+                  <a:srgbClr val="C00000"/>
                 </a:solidFill>
-                <a:prstDash val="dash"/>
-              </a:ln>
-            </p:spPr>
-            <p:style>
-              <a:lnRef idx="2">
-                <a:schemeClr val="accent1">
-                  <a:shade val="15000"/>
-                </a:schemeClr>
-              </a:lnRef>
-              <a:fillRef idx="1">
-                <a:schemeClr val="accent1"/>
-              </a:fillRef>
-              <a:effectRef idx="0">
-                <a:schemeClr val="accent1"/>
-              </a:effectRef>
-              <a:fontRef idx="minor">
-                <a:schemeClr val="lt1"/>
-              </a:fontRef>
-            </p:style>
-            <p:txBody>
-              <a:bodyPr rtlCol="0" anchor="ctr"/>
-              <a:lstStyle/>
-              <a:p>
-                <a:pPr algn="ctr"/>
-                <a:endParaRPr lang="zh-CN" altLang="en-US"/>
-              </a:p>
-            </p:txBody>
-          </p:sp>
-          <p:sp>
-            <p:nvSpPr>
-              <p:cNvPr id="82" name="文本框 81">
-                <a:extLst>
-                  <a:ext uri="{FF2B5EF4-FFF2-40B4-BE49-F238E27FC236}">
-                    <a16:creationId xmlns:a16="http://schemas.microsoft.com/office/drawing/2014/main" id="{7407A65C-3461-BC12-75B1-5F67267BADC5}"/>
-                  </a:ext>
-                </a:extLst>
-              </p:cNvPr>
-              <p:cNvSpPr txBox="1"/>
-              <p:nvPr/>
-            </p:nvSpPr>
-            <p:spPr>
-              <a:xfrm>
-                <a:off x="6617150" y="5459992"/>
-                <a:ext cx="1005403" cy="338554"/>
-              </a:xfrm>
-              <a:prstGeom prst="rect">
-                <a:avLst/>
-              </a:prstGeom>
-              <a:noFill/>
-            </p:spPr>
-            <p:txBody>
-              <a:bodyPr wrap="none" rtlCol="0">
-                <a:spAutoFit/>
-              </a:bodyPr>
-              <a:lstStyle/>
-              <a:p>
-                <a:r>
-                  <a:rPr lang="zh-CN" altLang="en-US" sz="1600" b="1" dirty="0">
-                    <a:solidFill>
-                      <a:srgbClr val="C00000"/>
-                    </a:solidFill>
-                    <a:latin typeface="微软雅黑" panose="020B0503020204020204" pitchFamily="34" charset="-122"/>
-                    <a:ea typeface="微软雅黑" panose="020B0503020204020204" pitchFamily="34" charset="-122"/>
-                  </a:rPr>
-                  <a:t>等值匹配</a:t>
-                </a:r>
-              </a:p>
-            </p:txBody>
-          </p:sp>
-        </p:grpSp>
+                <a:latin typeface="微软雅黑" panose="020B0503020204020204" pitchFamily="34" charset="-122"/>
+                <a:ea typeface="微软雅黑" panose="020B0503020204020204" pitchFamily="34" charset="-122"/>
+              </a:endParaRPr>
+            </a:p>
+            <a:p>
+              <a:r>
+                <a:rPr lang="zh-CN" altLang="en-US" sz="1600" b="1" dirty="0">
+                  <a:solidFill>
+                    <a:srgbClr val="C00000"/>
+                  </a:solidFill>
+                  <a:latin typeface="微软雅黑" panose="020B0503020204020204" pitchFamily="34" charset="-122"/>
+                  <a:ea typeface="微软雅黑" panose="020B0503020204020204" pitchFamily="34" charset="-122"/>
+                </a:rPr>
+                <a:t>配</a:t>
+              </a:r>
+            </a:p>
+          </p:txBody>
+        </p:sp>
         <p:pic>
           <p:nvPicPr>
-            <p:cNvPr id="85" name="图片 84" descr="日历&#10;&#10;描述已自动生成">
+            <p:cNvPr id="85" name="图片 84">
               <a:extLst>
                 <a:ext uri="{FF2B5EF4-FFF2-40B4-BE49-F238E27FC236}">
                   <a16:creationId xmlns:a16="http://schemas.microsoft.com/office/drawing/2014/main" id="{7F6D6E06-018A-398D-3AAA-EF91CA68F27D}"/>
@@ -8437,14 +8617,13 @@
                 </a:ext>
               </a:extLst>
             </a:blip>
-            <a:stretch>
-              <a:fillRect/>
-            </a:stretch>
+            <a:srcRect/>
+            <a:stretch/>
           </p:blipFill>
           <p:spPr>
-            <a:xfrm>
-              <a:off x="4653040" y="3575974"/>
-              <a:ext cx="964286" cy="2802857"/>
+            <a:xfrm rot="16200000">
+              <a:off x="7397260" y="4046658"/>
+              <a:ext cx="864277" cy="2802857"/>
             </a:xfrm>
             <a:prstGeom prst="rect">
               <a:avLst/>
@@ -8464,8 +8643,8 @@
             <p:nvPr/>
           </p:nvSpPr>
           <p:spPr>
-            <a:xfrm>
-              <a:off x="5745285" y="4731471"/>
+            <a:xfrm rot="16200000">
+              <a:off x="7745050" y="4214737"/>
               <a:ext cx="461665" cy="784830"/>
             </a:xfrm>
             <a:prstGeom prst="rect">
@@ -8506,8 +8685,8 @@
             <p:nvPr/>
           </p:nvCxnSpPr>
           <p:spPr>
-            <a:xfrm flipV="1">
-              <a:off x="6206950" y="5111187"/>
+            <a:xfrm rot="16200000" flipV="1">
+              <a:off x="7760733" y="4161169"/>
               <a:ext cx="417601" cy="12699"/>
             </a:xfrm>
             <a:prstGeom prst="line">
@@ -8549,8 +8728,8 @@
             <p:nvPr/>
           </p:nvSpPr>
           <p:spPr>
-            <a:xfrm>
-              <a:off x="6726713" y="357134"/>
+            <a:xfrm rot="16200000">
+              <a:off x="3427848" y="2910640"/>
               <a:ext cx="727200" cy="1164634"/>
             </a:xfrm>
             <a:prstGeom prst="roundRect">
@@ -8580,7 +8759,7 @@
             </a:fontRef>
           </p:style>
           <p:txBody>
-            <a:bodyPr rtlCol="0" anchor="ctr">
+            <a:bodyPr vert="eaVert" rtlCol="0" anchor="ctr">
               <a:noAutofit/>
             </a:bodyPr>
             <a:lstStyle/>
@@ -8612,8 +8791,8 @@
             <p:nvPr/>
           </p:nvSpPr>
           <p:spPr>
-            <a:xfrm>
-              <a:off x="6551526" y="1974850"/>
+            <a:xfrm rot="16200000">
+              <a:off x="6264947" y="1043894"/>
               <a:ext cx="1549749" cy="4425950"/>
             </a:xfrm>
             <a:prstGeom prst="roundRect">
@@ -8662,8 +8841,8 @@
             <p:nvPr/>
           </p:nvSpPr>
           <p:spPr>
-            <a:xfrm>
-              <a:off x="7609028" y="3158237"/>
+            <a:xfrm rot="16200000">
+              <a:off x="6707860" y="1784172"/>
               <a:ext cx="492443" cy="1887696"/>
             </a:xfrm>
             <a:prstGeom prst="rect">
@@ -8703,8 +8882,8 @@
             <p:nvPr/>
           </p:nvSpPr>
           <p:spPr>
-            <a:xfrm>
-              <a:off x="6491558" y="87206"/>
+            <a:xfrm rot="16200000">
+              <a:off x="2986590" y="2434608"/>
               <a:ext cx="1609717" cy="1704491"/>
             </a:xfrm>
             <a:prstGeom prst="roundRect">
@@ -8753,8 +8932,8 @@
             <p:nvPr/>
           </p:nvSpPr>
           <p:spPr>
-            <a:xfrm>
-              <a:off x="7609028" y="123843"/>
+            <a:xfrm rot="16200000">
+              <a:off x="3545226" y="1912412"/>
               <a:ext cx="492443" cy="1631216"/>
             </a:xfrm>
             <a:prstGeom prst="rect">
@@ -8794,8 +8973,8 @@
             <p:nvPr/>
           </p:nvSpPr>
           <p:spPr>
-            <a:xfrm>
-              <a:off x="7583380" y="2147055"/>
+            <a:xfrm rot="16200000">
+              <a:off x="4988792" y="2466410"/>
               <a:ext cx="543739" cy="523220"/>
             </a:xfrm>
             <a:prstGeom prst="rect">
@@ -11993,10 +12172,10 @@
       </p:grpSpPr>
       <p:grpSp>
         <p:nvGrpSpPr>
-          <p:cNvPr id="37" name="组合 36">
+          <p:cNvPr id="2" name="组合 1">
             <a:extLst>
               <a:ext uri="{FF2B5EF4-FFF2-40B4-BE49-F238E27FC236}">
-                <a16:creationId xmlns:a16="http://schemas.microsoft.com/office/drawing/2014/main" id="{0C0F5022-8B71-833E-1D21-46751AD61244}"/>
+                <a16:creationId xmlns:a16="http://schemas.microsoft.com/office/drawing/2014/main" id="{8B9D9D9C-4F2F-893E-27BC-FA264B221DC7}"/>
               </a:ext>
             </a:extLst>
           </p:cNvPr>
@@ -12005,10 +12184,10 @@
         </p:nvGrpSpPr>
         <p:grpSpPr>
           <a:xfrm>
-            <a:off x="6623050" y="1284208"/>
-            <a:ext cx="1604199" cy="4796552"/>
-            <a:chOff x="6623050" y="1284208"/>
-            <a:chExt cx="1604199" cy="4796552"/>
+            <a:off x="6661150" y="1045656"/>
+            <a:ext cx="1566099" cy="5035104"/>
+            <a:chOff x="6661150" y="1045656"/>
+            <a:chExt cx="1566099" cy="5035104"/>
           </a:xfrm>
         </p:grpSpPr>
         <p:sp>
@@ -12055,7 +12234,7 @@
             </a:fontRef>
           </p:style>
           <p:txBody>
-            <a:bodyPr wrap="square" rtlCol="0" anchor="ctr"/>
+            <a:bodyPr vert="vert" wrap="square" rtlCol="0" anchor="ctr"/>
             <a:lstStyle/>
             <a:p>
               <a:pPr algn="ctr"/>
@@ -12116,7 +12295,7 @@
             </a:fontRef>
           </p:style>
           <p:txBody>
-            <a:bodyPr wrap="square" rtlCol="0" anchor="ctr"/>
+            <a:bodyPr vert="vert" wrap="square" rtlCol="0" anchor="ctr"/>
             <a:lstStyle/>
             <a:p>
               <a:pPr algn="ctr"/>
@@ -12177,7 +12356,7 @@
             </a:fontRef>
           </p:style>
           <p:txBody>
-            <a:bodyPr wrap="square" rtlCol="0" anchor="ctr"/>
+            <a:bodyPr vert="vert" wrap="square" rtlCol="0" anchor="ctr"/>
             <a:lstStyle/>
             <a:p>
               <a:pPr algn="ctr"/>
@@ -12238,7 +12417,7 @@
             </a:fontRef>
           </p:style>
           <p:txBody>
-            <a:bodyPr wrap="square" rtlCol="0" anchor="ctr"/>
+            <a:bodyPr vert="vert" wrap="square" rtlCol="0" anchor="ctr"/>
             <a:lstStyle/>
             <a:p>
               <a:pPr algn="ctr"/>
@@ -12299,7 +12478,7 @@
             </a:fontRef>
           </p:style>
           <p:txBody>
-            <a:bodyPr wrap="square" rtlCol="0" anchor="ctr"/>
+            <a:bodyPr vert="vert" wrap="square" rtlCol="0" anchor="ctr"/>
             <a:lstStyle/>
             <a:p>
               <a:pPr algn="ctr"/>
@@ -12360,7 +12539,7 @@
             </a:fontRef>
           </p:style>
           <p:txBody>
-            <a:bodyPr wrap="square" rtlCol="0" anchor="ctr"/>
+            <a:bodyPr vert="vert" wrap="square" rtlCol="0" anchor="ctr"/>
             <a:lstStyle/>
             <a:p>
               <a:pPr algn="ctr"/>
@@ -12421,7 +12600,7 @@
             </a:fontRef>
           </p:style>
           <p:txBody>
-            <a:bodyPr wrap="square" rtlCol="0" anchor="ctr"/>
+            <a:bodyPr vert="vert" wrap="square" rtlCol="0" anchor="ctr"/>
             <a:lstStyle/>
             <a:p>
               <a:pPr algn="ctr"/>
@@ -12482,7 +12661,7 @@
             </a:fontRef>
           </p:style>
           <p:txBody>
-            <a:bodyPr wrap="square" rtlCol="0" anchor="ctr"/>
+            <a:bodyPr vert="vert" wrap="square" rtlCol="0" anchor="ctr"/>
             <a:lstStyle/>
             <a:p>
               <a:pPr algn="ctr"/>
@@ -12543,7 +12722,7 @@
             </a:fontRef>
           </p:style>
           <p:txBody>
-            <a:bodyPr wrap="square" rtlCol="0" anchor="ctr"/>
+            <a:bodyPr vert="vert" wrap="square" rtlCol="0" anchor="ctr"/>
             <a:lstStyle/>
             <a:p>
               <a:pPr algn="ctr"/>
@@ -12604,7 +12783,7 @@
             </a:fontRef>
           </p:style>
           <p:txBody>
-            <a:bodyPr wrap="square" rtlCol="0" anchor="ctr"/>
+            <a:bodyPr vert="vert" wrap="square" rtlCol="0" anchor="ctr"/>
             <a:lstStyle/>
             <a:p>
               <a:pPr algn="ctr"/>
@@ -12665,7 +12844,7 @@
             </a:fontRef>
           </p:style>
           <p:txBody>
-            <a:bodyPr wrap="square" rtlCol="0" anchor="ctr"/>
+            <a:bodyPr vert="vert" wrap="square" rtlCol="0" anchor="ctr"/>
             <a:lstStyle/>
             <a:p>
               <a:pPr algn="ctr"/>
@@ -12726,7 +12905,7 @@
             </a:fontRef>
           </p:style>
           <p:txBody>
-            <a:bodyPr wrap="square" rtlCol="0" anchor="ctr"/>
+            <a:bodyPr vert="vert" wrap="square" rtlCol="0" anchor="ctr"/>
             <a:lstStyle/>
             <a:p>
               <a:pPr algn="ctr"/>
@@ -12787,7 +12966,7 @@
             </a:fontRef>
           </p:style>
           <p:txBody>
-            <a:bodyPr wrap="square" rtlCol="0" anchor="ctr"/>
+            <a:bodyPr vert="vert" wrap="square" rtlCol="0" anchor="ctr"/>
             <a:lstStyle/>
             <a:p>
               <a:pPr algn="ctr"/>
@@ -12848,7 +13027,7 @@
             </a:fontRef>
           </p:style>
           <p:txBody>
-            <a:bodyPr wrap="square" rtlCol="0" anchor="ctr"/>
+            <a:bodyPr vert="vert" wrap="square" rtlCol="0" anchor="ctr"/>
             <a:lstStyle/>
             <a:p>
               <a:pPr algn="ctr"/>
@@ -12909,7 +13088,7 @@
             </a:fontRef>
           </p:style>
           <p:txBody>
-            <a:bodyPr wrap="square" rtlCol="0" anchor="ctr"/>
+            <a:bodyPr vert="vert" wrap="square" rtlCol="0" anchor="ctr"/>
             <a:lstStyle/>
             <a:p>
               <a:pPr algn="ctr"/>
@@ -12970,7 +13149,7 @@
             </a:fontRef>
           </p:style>
           <p:txBody>
-            <a:bodyPr wrap="square" rtlCol="0" anchor="ctr"/>
+            <a:bodyPr vert="vert" wrap="square" rtlCol="0" anchor="ctr"/>
             <a:lstStyle/>
             <a:p>
               <a:pPr algn="ctr"/>
@@ -13031,7 +13210,7 @@
             </a:fontRef>
           </p:style>
           <p:txBody>
-            <a:bodyPr wrap="square" rtlCol="0" anchor="ctr"/>
+            <a:bodyPr vert="vert" wrap="square" rtlCol="0" anchor="ctr"/>
             <a:lstStyle/>
             <a:p>
               <a:pPr algn="ctr"/>
@@ -13092,7 +13271,7 @@
             </a:fontRef>
           </p:style>
           <p:txBody>
-            <a:bodyPr wrap="square" rtlCol="0" anchor="ctr"/>
+            <a:bodyPr vert="vert" wrap="square" rtlCol="0" anchor="ctr"/>
             <a:lstStyle/>
             <a:p>
               <a:pPr algn="ctr"/>
@@ -13153,7 +13332,7 @@
             </a:fontRef>
           </p:style>
           <p:txBody>
-            <a:bodyPr wrap="square" rtlCol="0" anchor="ctr"/>
+            <a:bodyPr vert="vert" wrap="square" rtlCol="0" anchor="ctr"/>
             <a:lstStyle/>
             <a:p>
               <a:pPr algn="ctr"/>
@@ -13214,7 +13393,7 @@
             </a:fontRef>
           </p:style>
           <p:txBody>
-            <a:bodyPr wrap="square" rtlCol="0" anchor="ctr"/>
+            <a:bodyPr vert="vert" wrap="square" rtlCol="0" anchor="ctr"/>
             <a:lstStyle/>
             <a:p>
               <a:pPr algn="ctr"/>
@@ -13275,7 +13454,7 @@
             </a:fontRef>
           </p:style>
           <p:txBody>
-            <a:bodyPr wrap="square" rtlCol="0" anchor="ctr"/>
+            <a:bodyPr vert="vert" wrap="square" rtlCol="0" anchor="ctr"/>
             <a:lstStyle/>
             <a:p>
               <a:pPr algn="ctr"/>
@@ -13336,7 +13515,7 @@
             </a:fontRef>
           </p:style>
           <p:txBody>
-            <a:bodyPr wrap="square" rtlCol="0" anchor="ctr"/>
+            <a:bodyPr vert="vert" wrap="square" rtlCol="0" anchor="ctr"/>
             <a:lstStyle/>
             <a:p>
               <a:pPr algn="ctr"/>
@@ -13397,7 +13576,7 @@
             </a:fontRef>
           </p:style>
           <p:txBody>
-            <a:bodyPr wrap="square" rtlCol="0" anchor="ctr"/>
+            <a:bodyPr vert="vert" wrap="square" rtlCol="0" anchor="ctr"/>
             <a:lstStyle/>
             <a:p>
               <a:pPr algn="ctr"/>
@@ -13458,7 +13637,7 @@
             </a:fontRef>
           </p:style>
           <p:txBody>
-            <a:bodyPr wrap="square" rtlCol="0" anchor="ctr"/>
+            <a:bodyPr vert="vert" wrap="square" rtlCol="0" anchor="ctr"/>
             <a:lstStyle/>
             <a:p>
               <a:pPr algn="ctr"/>
@@ -13489,8 +13668,8 @@
           </p:nvSpPr>
           <p:spPr>
             <a:xfrm>
-              <a:off x="6623050" y="1284208"/>
-              <a:ext cx="646331" cy="369332"/>
+              <a:off x="6807716" y="1045656"/>
+              <a:ext cx="461665" cy="553998"/>
             </a:xfrm>
             <a:prstGeom prst="rect">
               <a:avLst/>
@@ -13498,7 +13677,7 @@
             <a:noFill/>
           </p:spPr>
           <p:txBody>
-            <a:bodyPr wrap="none" rtlCol="0">
+            <a:bodyPr vert="vert" wrap="none" rtlCol="0">
               <a:spAutoFit/>
             </a:bodyPr>
             <a:lstStyle/>
@@ -13527,8 +13706,8 @@
           </p:nvSpPr>
           <p:spPr>
             <a:xfrm>
-              <a:off x="7627033" y="1284208"/>
-              <a:ext cx="407484" cy="369332"/>
+              <a:off x="7572852" y="1284208"/>
+              <a:ext cx="461665" cy="315151"/>
             </a:xfrm>
             <a:prstGeom prst="rect">
               <a:avLst/>
@@ -13536,7 +13715,7 @@
             <a:noFill/>
           </p:spPr>
           <p:txBody>
-            <a:bodyPr wrap="none" rtlCol="0">
+            <a:bodyPr vert="vert" wrap="none" rtlCol="0">
               <a:spAutoFit/>
             </a:bodyPr>
             <a:lstStyle/>
@@ -14595,7 +14774,7 @@
           <p:nvPr/>
         </p:nvGrpSpPr>
         <p:grpSpPr>
-          <a:xfrm>
+          <a:xfrm rot="16200000">
             <a:off x="4396859" y="422791"/>
             <a:ext cx="2816929" cy="5943600"/>
             <a:chOff x="4396859" y="422791"/>

--- a/军民融合/ppt/研究方案二C.pptx
+++ b/军民融合/ppt/研究方案二C.pptx
@@ -203,7 +203,7 @@
           <a:p>
             <a:fld id="{8C4DB9AA-118E-4B72-A2FA-789A5CD0C03A}" type="datetimeFigureOut">
               <a:rPr lang="zh-CN" altLang="en-US" smtClean="0"/>
-              <a:t>2026/6/18</a:t>
+              <a:t>2026/6/17</a:t>
             </a:fld>
             <a:endParaRPr lang="zh-CN" altLang="en-US"/>
           </a:p>
@@ -678,7 +678,7 @@
           <a:p>
             <a:fld id="{6740FC04-A88A-4BD5-84A0-C23ADC67066C}" type="datetimeFigureOut">
               <a:rPr lang="zh-CN" altLang="en-US" smtClean="0"/>
-              <a:t>2026/6/18</a:t>
+              <a:t>2026/6/17</a:t>
             </a:fld>
             <a:endParaRPr lang="zh-CN" altLang="en-US"/>
           </a:p>
@@ -876,7 +876,7 @@
           <a:p>
             <a:fld id="{6740FC04-A88A-4BD5-84A0-C23ADC67066C}" type="datetimeFigureOut">
               <a:rPr lang="zh-CN" altLang="en-US" smtClean="0"/>
-              <a:t>2026/6/18</a:t>
+              <a:t>2026/6/17</a:t>
             </a:fld>
             <a:endParaRPr lang="zh-CN" altLang="en-US"/>
           </a:p>
@@ -1084,7 +1084,7 @@
           <a:p>
             <a:fld id="{6740FC04-A88A-4BD5-84A0-C23ADC67066C}" type="datetimeFigureOut">
               <a:rPr lang="zh-CN" altLang="en-US" smtClean="0"/>
-              <a:t>2026/6/18</a:t>
+              <a:t>2026/6/17</a:t>
             </a:fld>
             <a:endParaRPr lang="zh-CN" altLang="en-US"/>
           </a:p>
@@ -1282,7 +1282,7 @@
           <a:p>
             <a:fld id="{6740FC04-A88A-4BD5-84A0-C23ADC67066C}" type="datetimeFigureOut">
               <a:rPr lang="zh-CN" altLang="en-US" smtClean="0"/>
-              <a:t>2026/6/18</a:t>
+              <a:t>2026/6/17</a:t>
             </a:fld>
             <a:endParaRPr lang="zh-CN" altLang="en-US"/>
           </a:p>
@@ -1557,7 +1557,7 @@
           <a:p>
             <a:fld id="{6740FC04-A88A-4BD5-84A0-C23ADC67066C}" type="datetimeFigureOut">
               <a:rPr lang="zh-CN" altLang="en-US" smtClean="0"/>
-              <a:t>2026/6/18</a:t>
+              <a:t>2026/6/17</a:t>
             </a:fld>
             <a:endParaRPr lang="zh-CN" altLang="en-US"/>
           </a:p>
@@ -1822,7 +1822,7 @@
           <a:p>
             <a:fld id="{6740FC04-A88A-4BD5-84A0-C23ADC67066C}" type="datetimeFigureOut">
               <a:rPr lang="zh-CN" altLang="en-US" smtClean="0"/>
-              <a:t>2026/6/18</a:t>
+              <a:t>2026/6/17</a:t>
             </a:fld>
             <a:endParaRPr lang="zh-CN" altLang="en-US"/>
           </a:p>
@@ -2234,7 +2234,7 @@
           <a:p>
             <a:fld id="{6740FC04-A88A-4BD5-84A0-C23ADC67066C}" type="datetimeFigureOut">
               <a:rPr lang="zh-CN" altLang="en-US" smtClean="0"/>
-              <a:t>2026/6/18</a:t>
+              <a:t>2026/6/17</a:t>
             </a:fld>
             <a:endParaRPr lang="zh-CN" altLang="en-US"/>
           </a:p>
@@ -2375,7 +2375,7 @@
           <a:p>
             <a:fld id="{6740FC04-A88A-4BD5-84A0-C23ADC67066C}" type="datetimeFigureOut">
               <a:rPr lang="zh-CN" altLang="en-US" smtClean="0"/>
-              <a:t>2026/6/18</a:t>
+              <a:t>2026/6/17</a:t>
             </a:fld>
             <a:endParaRPr lang="zh-CN" altLang="en-US"/>
           </a:p>
@@ -2488,7 +2488,7 @@
           <a:p>
             <a:fld id="{6740FC04-A88A-4BD5-84A0-C23ADC67066C}" type="datetimeFigureOut">
               <a:rPr lang="zh-CN" altLang="en-US" smtClean="0"/>
-              <a:t>2026/6/18</a:t>
+              <a:t>2026/6/17</a:t>
             </a:fld>
             <a:endParaRPr lang="zh-CN" altLang="en-US"/>
           </a:p>
@@ -2799,7 +2799,7 @@
           <a:p>
             <a:fld id="{6740FC04-A88A-4BD5-84A0-C23ADC67066C}" type="datetimeFigureOut">
               <a:rPr lang="zh-CN" altLang="en-US" smtClean="0"/>
-              <a:t>2026/6/18</a:t>
+              <a:t>2026/6/17</a:t>
             </a:fld>
             <a:endParaRPr lang="zh-CN" altLang="en-US"/>
           </a:p>
@@ -3087,7 +3087,7 @@
           <a:p>
             <a:fld id="{6740FC04-A88A-4BD5-84A0-C23ADC67066C}" type="datetimeFigureOut">
               <a:rPr lang="zh-CN" altLang="en-US" smtClean="0"/>
-              <a:t>2026/6/18</a:t>
+              <a:t>2026/6/17</a:t>
             </a:fld>
             <a:endParaRPr lang="zh-CN" altLang="en-US"/>
           </a:p>
@@ -3328,7 +3328,7 @@
           <a:p>
             <a:fld id="{6740FC04-A88A-4BD5-84A0-C23ADC67066C}" type="datetimeFigureOut">
               <a:rPr lang="zh-CN" altLang="en-US" smtClean="0"/>
-              <a:t>2026/6/18</a:t>
+              <a:t>2026/6/17</a:t>
             </a:fld>
             <a:endParaRPr lang="zh-CN" altLang="en-US"/>
           </a:p>
@@ -3745,697 +3745,12 @@
           <a:chExt cx="0" cy="0"/>
         </a:xfrm>
       </p:grpSpPr>
-      <p:sp>
-        <p:nvSpPr>
-          <p:cNvPr id="8" name="圆角矩形 17">
+      <p:grpSp>
+        <p:nvGrpSpPr>
+          <p:cNvPr id="28" name="组合 27">
             <a:extLst>
               <a:ext uri="{FF2B5EF4-FFF2-40B4-BE49-F238E27FC236}">
-                <a16:creationId xmlns:a16="http://schemas.microsoft.com/office/drawing/2014/main" id="{D0828F5F-2BEB-6C0F-ADA1-EBCE3BC9282C}"/>
-              </a:ext>
-            </a:extLst>
-          </p:cNvPr>
-          <p:cNvSpPr>
-            <a:spLocks noGrp="1"/>
-          </p:cNvSpPr>
-          <p:nvPr/>
-        </p:nvSpPr>
-        <p:spPr>
-          <a:xfrm>
-            <a:off x="5585828" y="1180166"/>
-            <a:ext cx="4729560" cy="2650537"/>
-          </a:xfrm>
-          <a:prstGeom prst="roundRect">
-            <a:avLst>
-              <a:gd name="adj" fmla="val 0"/>
-            </a:avLst>
-          </a:prstGeom>
-          <a:solidFill>
-            <a:srgbClr val="DAE3F3"/>
-          </a:solidFill>
-          <a:ln w="19050">
-            <a:solidFill>
-              <a:srgbClr val="2E54A1"/>
-            </a:solidFill>
-          </a:ln>
-        </p:spPr>
-        <p:style>
-          <a:lnRef idx="2">
-            <a:schemeClr val="accent1">
-              <a:lumMod val="75000"/>
-            </a:schemeClr>
-          </a:lnRef>
-          <a:fillRef idx="1">
-            <a:schemeClr val="accent1"/>
-          </a:fillRef>
-          <a:effectRef idx="0">
-            <a:srgbClr val="FFFFFF"/>
-          </a:effectRef>
-          <a:fontRef idx="minor">
-            <a:schemeClr val="lt1"/>
-          </a:fontRef>
-        </p:style>
-        <p:txBody>
-          <a:bodyPr anchor="ctr"/>
-          <a:lstStyle/>
-          <a:p>
-            <a:pPr algn="ctr">
-              <a:buNone/>
-            </a:pPr>
-            <a:endParaRPr/>
-          </a:p>
-        </p:txBody>
-      </p:sp>
-      <p:sp>
-        <p:nvSpPr>
-          <p:cNvPr id="7" name="圆角矩形 16">
-            <a:extLst>
-              <a:ext uri="{FF2B5EF4-FFF2-40B4-BE49-F238E27FC236}">
-                <a16:creationId xmlns:a16="http://schemas.microsoft.com/office/drawing/2014/main" id="{65676D9B-09DB-6DF9-1AD6-B6F3E25873FF}"/>
-              </a:ext>
-            </a:extLst>
-          </p:cNvPr>
-          <p:cNvSpPr>
-            <a:spLocks noGrp="1"/>
-          </p:cNvSpPr>
-          <p:nvPr/>
-        </p:nvSpPr>
-        <p:spPr>
-          <a:xfrm>
-            <a:off x="5585828" y="4126957"/>
-            <a:ext cx="4729560" cy="2190173"/>
-          </a:xfrm>
-          <a:prstGeom prst="roundRect">
-            <a:avLst>
-              <a:gd name="adj" fmla="val 0"/>
-            </a:avLst>
-          </a:prstGeom>
-          <a:solidFill>
-            <a:schemeClr val="accent2">
-              <a:lumMod val="20000"/>
-              <a:lumOff val="80000"/>
-            </a:schemeClr>
-          </a:solidFill>
-          <a:ln w="19050">
-            <a:solidFill>
-              <a:schemeClr val="accent2">
-                <a:lumMod val="75000"/>
-              </a:schemeClr>
-            </a:solidFill>
-          </a:ln>
-        </p:spPr>
-        <p:style>
-          <a:lnRef idx="2">
-            <a:schemeClr val="accent1">
-              <a:lumMod val="75000"/>
-            </a:schemeClr>
-          </a:lnRef>
-          <a:fillRef idx="1">
-            <a:schemeClr val="accent1"/>
-          </a:fillRef>
-          <a:effectRef idx="0">
-            <a:srgbClr val="FFFFFF"/>
-          </a:effectRef>
-          <a:fontRef idx="minor">
-            <a:schemeClr val="lt1"/>
-          </a:fontRef>
-        </p:style>
-        <p:txBody>
-          <a:bodyPr anchor="ctr"/>
-          <a:lstStyle/>
-          <a:p>
-            <a:pPr algn="ctr">
-              <a:buNone/>
-            </a:pPr>
-            <a:endParaRPr/>
-          </a:p>
-        </p:txBody>
-      </p:sp>
-      <p:sp>
-        <p:nvSpPr>
-          <p:cNvPr id="5" name="圆角矩形 17">
-            <a:extLst>
-              <a:ext uri="{FF2B5EF4-FFF2-40B4-BE49-F238E27FC236}">
-                <a16:creationId xmlns:a16="http://schemas.microsoft.com/office/drawing/2014/main" id="{08E9D8CC-2B26-0FE4-9934-D9535CBAD288}"/>
-              </a:ext>
-            </a:extLst>
-          </p:cNvPr>
-          <p:cNvSpPr>
-            <a:spLocks noGrp="1"/>
-          </p:cNvSpPr>
-          <p:nvPr/>
-        </p:nvSpPr>
-        <p:spPr>
-          <a:xfrm>
-            <a:off x="2935730" y="2539822"/>
-            <a:ext cx="2212072" cy="3777308"/>
-          </a:xfrm>
-          <a:prstGeom prst="roundRect">
-            <a:avLst>
-              <a:gd name="adj" fmla="val 0"/>
-            </a:avLst>
-          </a:prstGeom>
-          <a:solidFill>
-            <a:srgbClr val="DAE3F3"/>
-          </a:solidFill>
-          <a:ln w="19050">
-            <a:solidFill>
-              <a:srgbClr val="2E54A1"/>
-            </a:solidFill>
-          </a:ln>
-        </p:spPr>
-        <p:style>
-          <a:lnRef idx="2">
-            <a:schemeClr val="accent1">
-              <a:lumMod val="75000"/>
-            </a:schemeClr>
-          </a:lnRef>
-          <a:fillRef idx="1">
-            <a:schemeClr val="accent1"/>
-          </a:fillRef>
-          <a:effectRef idx="0">
-            <a:srgbClr val="FFFFFF"/>
-          </a:effectRef>
-          <a:fontRef idx="minor">
-            <a:schemeClr val="lt1"/>
-          </a:fontRef>
-        </p:style>
-        <p:txBody>
-          <a:bodyPr anchor="ctr"/>
-          <a:lstStyle/>
-          <a:p>
-            <a:pPr algn="ctr">
-              <a:buNone/>
-            </a:pPr>
-            <a:endParaRPr/>
-          </a:p>
-        </p:txBody>
-      </p:sp>
-      <p:sp>
-        <p:nvSpPr>
-          <p:cNvPr id="81" name="圆角矩形 80"/>
-          <p:cNvSpPr/>
-          <p:nvPr/>
-        </p:nvSpPr>
-        <p:spPr>
-          <a:xfrm>
-            <a:off x="1556788" y="398634"/>
-            <a:ext cx="9068344" cy="6232974"/>
-          </a:xfrm>
-          <a:prstGeom prst="roundRect">
-            <a:avLst>
-              <a:gd name="adj" fmla="val 3556"/>
-            </a:avLst>
-          </a:prstGeom>
-          <a:noFill/>
-          <a:ln w="25400" cmpd="sng">
-            <a:solidFill>
-              <a:schemeClr val="accent1">
-                <a:shade val="50000"/>
-              </a:schemeClr>
-            </a:solidFill>
-            <a:prstDash val="dash"/>
-          </a:ln>
-        </p:spPr>
-        <p:style>
-          <a:lnRef idx="2">
-            <a:schemeClr val="accent1">
-              <a:lumMod val="75000"/>
-            </a:schemeClr>
-          </a:lnRef>
-          <a:fillRef idx="1">
-            <a:schemeClr val="accent1"/>
-          </a:fillRef>
-          <a:effectRef idx="0">
-            <a:srgbClr val="FFFFFF"/>
-          </a:effectRef>
-          <a:fontRef idx="minor">
-            <a:schemeClr val="lt1"/>
-          </a:fontRef>
-        </p:style>
-        <p:txBody>
-          <a:bodyPr rtlCol="0" anchor="ctr"/>
-          <a:lstStyle/>
-          <a:p>
-            <a:pPr algn="ctr"/>
-            <a:endParaRPr lang="zh-CN" altLang="en-US" sz="1633" dirty="0"/>
-          </a:p>
-        </p:txBody>
-      </p:sp>
-      <p:sp>
-        <p:nvSpPr>
-          <p:cNvPr id="94" name="矩形: 圆角 1"/>
-          <p:cNvSpPr/>
-          <p:nvPr/>
-        </p:nvSpPr>
-        <p:spPr>
-          <a:xfrm>
-            <a:off x="1721830" y="817431"/>
-            <a:ext cx="871003" cy="5654034"/>
-          </a:xfrm>
-          <a:prstGeom prst="roundRect">
-            <a:avLst>
-              <a:gd name="adj" fmla="val 0"/>
-            </a:avLst>
-          </a:prstGeom>
-          <a:solidFill>
-            <a:srgbClr val="DAE3F5"/>
-          </a:solidFill>
-          <a:ln>
-            <a:noFill/>
-          </a:ln>
-        </p:spPr>
-        <p:style>
-          <a:lnRef idx="2">
-            <a:schemeClr val="accent1">
-              <a:shade val="15000"/>
-            </a:schemeClr>
-          </a:lnRef>
-          <a:fillRef idx="1">
-            <a:schemeClr val="accent1"/>
-          </a:fillRef>
-          <a:effectRef idx="0">
-            <a:schemeClr val="accent1"/>
-          </a:effectRef>
-          <a:fontRef idx="minor">
-            <a:schemeClr val="lt1"/>
-          </a:fontRef>
-        </p:style>
-        <p:txBody>
-          <a:bodyPr rtlCol="0" anchor="ctr"/>
-          <a:lstStyle/>
-          <a:p>
-            <a:pPr algn="ctr"/>
-            <a:endParaRPr lang="zh-CN" altLang="en-US" sz="1633" dirty="0">
-              <a:latin typeface="微软雅黑" panose="020B0503020204020204" charset="-122"/>
-              <a:ea typeface="微软雅黑" panose="020B0503020204020204" charset="-122"/>
-            </a:endParaRPr>
-          </a:p>
-        </p:txBody>
-      </p:sp>
-      <p:sp>
-        <p:nvSpPr>
-          <p:cNvPr id="4" name="矩形: 圆角 3"/>
-          <p:cNvSpPr/>
-          <p:nvPr/>
-        </p:nvSpPr>
-        <p:spPr>
-          <a:xfrm>
-            <a:off x="3038704" y="204502"/>
-            <a:ext cx="6104513" cy="433197"/>
-          </a:xfrm>
-          <a:prstGeom prst="roundRect">
-            <a:avLst>
-              <a:gd name="adj" fmla="val 50000"/>
-            </a:avLst>
-          </a:prstGeom>
-          <a:solidFill>
-            <a:srgbClr val="2E54A1"/>
-          </a:solidFill>
-          <a:ln>
-            <a:noFill/>
-          </a:ln>
-        </p:spPr>
-        <p:style>
-          <a:lnRef idx="2">
-            <a:schemeClr val="accent1">
-              <a:shade val="15000"/>
-            </a:schemeClr>
-          </a:lnRef>
-          <a:fillRef idx="1">
-            <a:schemeClr val="accent1"/>
-          </a:fillRef>
-          <a:effectRef idx="0">
-            <a:schemeClr val="accent1"/>
-          </a:effectRef>
-          <a:fontRef idx="minor">
-            <a:schemeClr val="lt1"/>
-          </a:fontRef>
-        </p:style>
-        <p:txBody>
-          <a:bodyPr rtlCol="0" anchor="ctr"/>
-          <a:lstStyle/>
-          <a:p>
-            <a:pPr algn="ctr" defTabSz="829544">
-              <a:defRPr/>
-            </a:pPr>
-            <a:r>
-              <a:rPr lang="zh-CN" altLang="en-US" sz="1633" b="1" dirty="0">
-                <a:solidFill>
-                  <a:prstClr val="white"/>
-                </a:solidFill>
-                <a:latin typeface="微软雅黑" panose="020B0503020204020204" charset="-122"/>
-                <a:ea typeface="微软雅黑" panose="020B0503020204020204" charset="-122"/>
-                <a:cs typeface="Times New Roman" panose="02020603050405020304" pitchFamily="18" charset="0"/>
-                <a:sym typeface="+mn-ea"/>
-              </a:rPr>
-              <a:t>链上链下协同的可追溯频谱数据可信管理办法</a:t>
-            </a:r>
-            <a:endParaRPr lang="zh-CN" altLang="en-US" sz="1633" b="1" dirty="0">
-              <a:latin typeface="微软雅黑" panose="020B0503020204020204" charset="-122"/>
-              <a:ea typeface="微软雅黑" panose="020B0503020204020204" charset="-122"/>
-              <a:cs typeface="微软雅黑" panose="020B0503020204020204" charset="-122"/>
-            </a:endParaRPr>
-          </a:p>
-        </p:txBody>
-      </p:sp>
-      <p:sp>
-        <p:nvSpPr>
-          <p:cNvPr id="99" name="箭头: 燕尾形 1071"/>
-          <p:cNvSpPr/>
-          <p:nvPr/>
-        </p:nvSpPr>
-        <p:spPr>
-          <a:xfrm>
-            <a:off x="5248759" y="3466445"/>
-            <a:ext cx="251162" cy="356005"/>
-          </a:xfrm>
-          <a:prstGeom prst="notchedRightArrow">
-            <a:avLst>
-              <a:gd name="adj1" fmla="val 33809"/>
-              <a:gd name="adj2" fmla="val 52390"/>
-            </a:avLst>
-          </a:prstGeom>
-          <a:gradFill>
-            <a:gsLst>
-              <a:gs pos="0">
-                <a:schemeClr val="accent1">
-                  <a:lumMod val="5000"/>
-                  <a:lumOff val="95000"/>
-                  <a:alpha val="0"/>
-                </a:schemeClr>
-              </a:gs>
-              <a:gs pos="74000">
-                <a:srgbClr val="2E54A1"/>
-              </a:gs>
-              <a:gs pos="100000">
-                <a:srgbClr val="2E54A1"/>
-              </a:gs>
-            </a:gsLst>
-            <a:lin ang="0" scaled="0"/>
-          </a:gradFill>
-          <a:ln>
-            <a:noFill/>
-          </a:ln>
-        </p:spPr>
-        <p:style>
-          <a:lnRef idx="2">
-            <a:schemeClr val="accent1">
-              <a:lumMod val="75000"/>
-            </a:schemeClr>
-          </a:lnRef>
-          <a:fillRef idx="1">
-            <a:schemeClr val="accent1"/>
-          </a:fillRef>
-          <a:effectRef idx="0">
-            <a:srgbClr val="FFFFFF"/>
-          </a:effectRef>
-          <a:fontRef idx="minor">
-            <a:schemeClr val="lt1"/>
-          </a:fontRef>
-        </p:style>
-        <p:txBody>
-          <a:bodyPr rtlCol="0" anchor="ctr"/>
-          <a:lstStyle/>
-          <a:p>
-            <a:pPr algn="ctr"/>
-            <a:endParaRPr lang="zh-CN" altLang="en-US" sz="1633"/>
-          </a:p>
-        </p:txBody>
-      </p:sp>
-      <p:sp>
-        <p:nvSpPr>
-          <p:cNvPr id="13" name="文本框 12"/>
-          <p:cNvSpPr txBox="1"/>
-          <p:nvPr/>
-        </p:nvSpPr>
-        <p:spPr>
-          <a:xfrm>
-            <a:off x="2935729" y="980308"/>
-            <a:ext cx="2310579" cy="338554"/>
-          </a:xfrm>
-          <a:prstGeom prst="rect">
-            <a:avLst/>
-          </a:prstGeom>
-          <a:noFill/>
-        </p:spPr>
-        <p:txBody>
-          <a:bodyPr wrap="square" rtlCol="0">
-            <a:spAutoFit/>
-          </a:bodyPr>
-          <a:lstStyle/>
-          <a:p>
-            <a:pPr algn="ctr" defTabSz="829544">
-              <a:defRPr/>
-            </a:pPr>
-            <a:r>
-              <a:rPr lang="zh-CN" altLang="en-US" sz="1600" b="1" dirty="0">
-                <a:solidFill>
-                  <a:srgbClr val="C00000"/>
-                </a:solidFill>
-                <a:latin typeface="微软雅黑" panose="020B0503020204020204" charset="-122"/>
-                <a:ea typeface="微软雅黑" panose="020B0503020204020204" charset="-122"/>
-              </a:rPr>
-              <a:t>链上链下分层存证</a:t>
-            </a:r>
-          </a:p>
-        </p:txBody>
-      </p:sp>
-      <p:sp>
-        <p:nvSpPr>
-          <p:cNvPr id="145" name="箭头: 下 1067"/>
-          <p:cNvSpPr/>
-          <p:nvPr/>
-        </p:nvSpPr>
-        <p:spPr>
-          <a:xfrm>
-            <a:off x="3973877" y="2255753"/>
-            <a:ext cx="170637" cy="254199"/>
-          </a:xfrm>
-          <a:prstGeom prst="downArrow">
-            <a:avLst>
-              <a:gd name="adj1" fmla="val 34037"/>
-              <a:gd name="adj2" fmla="val 52816"/>
-            </a:avLst>
-          </a:prstGeom>
-          <a:gradFill>
-            <a:gsLst>
-              <a:gs pos="0">
-                <a:schemeClr val="accent1">
-                  <a:lumMod val="5000"/>
-                  <a:lumOff val="95000"/>
-                  <a:alpha val="0"/>
-                </a:schemeClr>
-              </a:gs>
-              <a:gs pos="74000">
-                <a:srgbClr val="C00000"/>
-              </a:gs>
-              <a:gs pos="100000">
-                <a:srgbClr val="C00000"/>
-              </a:gs>
-            </a:gsLst>
-            <a:lin ang="5400000" scaled="0"/>
-          </a:gradFill>
-          <a:ln>
-            <a:noFill/>
-          </a:ln>
-        </p:spPr>
-        <p:style>
-          <a:lnRef idx="2">
-            <a:schemeClr val="accent1">
-              <a:lumMod val="75000"/>
-            </a:schemeClr>
-          </a:lnRef>
-          <a:fillRef idx="1">
-            <a:schemeClr val="accent1"/>
-          </a:fillRef>
-          <a:effectRef idx="0">
-            <a:srgbClr val="FFFFFF"/>
-          </a:effectRef>
-          <a:fontRef idx="minor">
-            <a:schemeClr val="lt1"/>
-          </a:fontRef>
-        </p:style>
-        <p:txBody>
-          <a:bodyPr rtlCol="0" anchor="ctr"/>
-          <a:lstStyle/>
-          <a:p>
-            <a:pPr algn="ctr"/>
-            <a:endParaRPr lang="zh-CN" altLang="en-US" sz="1633"/>
-          </a:p>
-        </p:txBody>
-      </p:sp>
-      <p:sp>
-        <p:nvSpPr>
-          <p:cNvPr id="60" name="矩形: 圆角 43"/>
-          <p:cNvSpPr/>
-          <p:nvPr/>
-        </p:nvSpPr>
-        <p:spPr>
-          <a:xfrm>
-            <a:off x="2976629" y="1504438"/>
-            <a:ext cx="2171172" cy="672263"/>
-          </a:xfrm>
-          <a:prstGeom prst="roundRect">
-            <a:avLst>
-              <a:gd name="adj" fmla="val 0"/>
-            </a:avLst>
-          </a:prstGeom>
-          <a:solidFill>
-            <a:schemeClr val="bg1"/>
-          </a:solidFill>
-          <a:ln w="12700" cmpd="sng">
-            <a:solidFill>
-              <a:srgbClr val="C00000"/>
-            </a:solidFill>
-            <a:prstDash val="solid"/>
-          </a:ln>
-        </p:spPr>
-        <p:style>
-          <a:lnRef idx="2">
-            <a:schemeClr val="dk1"/>
-          </a:lnRef>
-          <a:fillRef idx="1">
-            <a:schemeClr val="lt1"/>
-          </a:fillRef>
-          <a:effectRef idx="0">
-            <a:schemeClr val="dk1"/>
-          </a:effectRef>
-          <a:fontRef idx="minor">
-            <a:schemeClr val="dk1"/>
-          </a:fontRef>
-        </p:style>
-        <p:txBody>
-          <a:bodyPr rtlCol="0" anchor="ctr"/>
-          <a:lstStyle/>
-          <a:p>
-            <a:pPr algn="ctr" defTabSz="829544">
-              <a:defRPr/>
-            </a:pPr>
-            <a:endParaRPr lang="zh-CN" altLang="en-US" sz="1633" dirty="0">
-              <a:solidFill>
-                <a:prstClr val="black"/>
-              </a:solidFill>
-              <a:latin typeface="等线" panose="02010600030101010101" charset="-122"/>
-              <a:ea typeface="等线" panose="02010600030101010101" charset="-122"/>
-            </a:endParaRPr>
-          </a:p>
-        </p:txBody>
-      </p:sp>
-      <p:sp>
-        <p:nvSpPr>
-          <p:cNvPr id="24" name="文本框 23"/>
-          <p:cNvSpPr txBox="1"/>
-          <p:nvPr/>
-        </p:nvSpPr>
-        <p:spPr>
-          <a:xfrm>
-            <a:off x="3571124" y="1715565"/>
-            <a:ext cx="1634284" cy="427553"/>
-          </a:xfrm>
-          <a:prstGeom prst="rect">
-            <a:avLst/>
-          </a:prstGeom>
-          <a:noFill/>
-        </p:spPr>
-        <p:txBody>
-          <a:bodyPr wrap="square" rtlCol="0">
-            <a:spAutoFit/>
-          </a:bodyPr>
-          <a:lstStyle/>
-          <a:p>
-            <a:pPr algn="ctr">
-              <a:buClrTx/>
-              <a:buSzTx/>
-              <a:buFontTx/>
-              <a:defRPr/>
-            </a:pPr>
-            <a:r>
-              <a:rPr lang="zh-CN" altLang="en-US" sz="1089" b="1" dirty="0">
-                <a:solidFill>
-                  <a:prstClr val="black"/>
-                </a:solidFill>
-                <a:latin typeface="微软雅黑" panose="020B0503020204020204" charset="-122"/>
-                <a:ea typeface="微软雅黑" panose="020B0503020204020204" charset="-122"/>
-              </a:rPr>
-              <a:t>频谱数据体量庞大</a:t>
-            </a:r>
-            <a:endParaRPr lang="en-US" altLang="zh-CN" sz="1089" b="1" dirty="0">
-              <a:solidFill>
-                <a:prstClr val="black"/>
-              </a:solidFill>
-              <a:latin typeface="微软雅黑" panose="020B0503020204020204" charset="-122"/>
-              <a:ea typeface="微软雅黑" panose="020B0503020204020204" charset="-122"/>
-            </a:endParaRPr>
-          </a:p>
-          <a:p>
-            <a:pPr algn="ctr">
-              <a:buClrTx/>
-              <a:buSzTx/>
-              <a:buFontTx/>
-              <a:defRPr/>
-            </a:pPr>
-            <a:r>
-              <a:rPr lang="zh-CN" altLang="en-US" sz="1089" b="1" dirty="0">
-                <a:solidFill>
-                  <a:srgbClr val="C00000"/>
-                </a:solidFill>
-                <a:latin typeface="微软雅黑" panose="020B0503020204020204" charset="-122"/>
-                <a:ea typeface="微软雅黑" panose="020B0503020204020204" charset="-122"/>
-              </a:rPr>
-              <a:t>全量上链开销大</a:t>
-            </a:r>
-            <a:endParaRPr lang="en-US" altLang="zh-CN" sz="1089" b="1" dirty="0">
-              <a:solidFill>
-                <a:srgbClr val="C00000"/>
-              </a:solidFill>
-              <a:latin typeface="微软雅黑" panose="020B0503020204020204" charset="-122"/>
-              <a:ea typeface="微软雅黑" panose="020B0503020204020204" charset="-122"/>
-            </a:endParaRPr>
-          </a:p>
-        </p:txBody>
-      </p:sp>
-      <p:pic>
-        <p:nvPicPr>
-          <p:cNvPr id="3" name="图形 2" descr="数据库 纯色填充">
-            <a:extLst>
-              <a:ext uri="{FF2B5EF4-FFF2-40B4-BE49-F238E27FC236}">
-                <a16:creationId xmlns:a16="http://schemas.microsoft.com/office/drawing/2014/main" id="{7C7F3871-282D-223B-EDC8-1A90B78B19C4}"/>
-              </a:ext>
-            </a:extLst>
-          </p:cNvPr>
-          <p:cNvPicPr>
-            <a:picLocks noChangeAspect="1"/>
-          </p:cNvPicPr>
-          <p:nvPr/>
-        </p:nvPicPr>
-        <p:blipFill>
-          <a:blip r:embed="rId4">
-            <a:extLst>
-              <a:ext uri="{96DAC541-7B7A-43D3-8B79-37D633B846F1}">
-                <asvg:svgBlip xmlns:asvg="http://schemas.microsoft.com/office/drawing/2016/SVG/main" r:embed="rId5"/>
-              </a:ext>
-            </a:extLst>
-          </a:blip>
-          <a:stretch>
-            <a:fillRect/>
-          </a:stretch>
-        </p:blipFill>
-        <p:spPr>
-          <a:xfrm>
-            <a:off x="3088924" y="1493349"/>
-            <a:ext cx="640080" cy="640080"/>
-          </a:xfrm>
-          <a:prstGeom prst="rect">
-            <a:avLst/>
-          </a:prstGeom>
-        </p:spPr>
-      </p:pic>
-      <p:grpSp>
-        <p:nvGrpSpPr>
-          <p:cNvPr id="20" name="组合 19">
-            <a:extLst>
-              <a:ext uri="{FF2B5EF4-FFF2-40B4-BE49-F238E27FC236}">
-                <a16:creationId xmlns:a16="http://schemas.microsoft.com/office/drawing/2014/main" id="{72E5C1C8-DA60-8B8F-7508-DA0FFF738C25}"/>
+                <a16:creationId xmlns:a16="http://schemas.microsoft.com/office/drawing/2014/main" id="{00A28FA2-FDB8-65FB-698B-262994F1F8A2}"/>
               </a:ext>
             </a:extLst>
           </p:cNvPr>
@@ -4444,18 +3759,482 @@
         </p:nvGrpSpPr>
         <p:grpSpPr>
           <a:xfrm>
-            <a:off x="257555" y="2439700"/>
-            <a:ext cx="3808676" cy="2405837"/>
-            <a:chOff x="269667" y="2403364"/>
-            <a:chExt cx="3808676" cy="2405837"/>
+            <a:off x="257555" y="204502"/>
+            <a:ext cx="10367577" cy="6427106"/>
+            <a:chOff x="257555" y="204502"/>
+            <a:chExt cx="10367577" cy="6427106"/>
           </a:xfrm>
         </p:grpSpPr>
+        <p:sp>
+          <p:nvSpPr>
+            <p:cNvPr id="81" name="圆角矩形 80"/>
+            <p:cNvSpPr/>
+            <p:nvPr/>
+          </p:nvSpPr>
+          <p:spPr>
+            <a:xfrm>
+              <a:off x="1556788" y="398634"/>
+              <a:ext cx="9068344" cy="6232974"/>
+            </a:xfrm>
+            <a:prstGeom prst="roundRect">
+              <a:avLst>
+                <a:gd name="adj" fmla="val 3556"/>
+              </a:avLst>
+            </a:prstGeom>
+            <a:noFill/>
+            <a:ln w="25400" cmpd="sng">
+              <a:solidFill>
+                <a:schemeClr val="accent1">
+                  <a:shade val="50000"/>
+                </a:schemeClr>
+              </a:solidFill>
+              <a:prstDash val="dash"/>
+            </a:ln>
+          </p:spPr>
+          <p:style>
+            <a:lnRef idx="2">
+              <a:schemeClr val="accent1">
+                <a:lumMod val="75000"/>
+              </a:schemeClr>
+            </a:lnRef>
+            <a:fillRef idx="1">
+              <a:schemeClr val="accent1"/>
+            </a:fillRef>
+            <a:effectRef idx="0">
+              <a:srgbClr val="FFFFFF"/>
+            </a:effectRef>
+            <a:fontRef idx="minor">
+              <a:schemeClr val="lt1"/>
+            </a:fontRef>
+          </p:style>
+          <p:txBody>
+            <a:bodyPr rtlCol="0" anchor="ctr"/>
+            <a:lstStyle/>
+            <a:p>
+              <a:pPr algn="ctr"/>
+              <a:endParaRPr lang="zh-CN" altLang="en-US" sz="1633"/>
+            </a:p>
+          </p:txBody>
+        </p:sp>
+        <p:sp>
+          <p:nvSpPr>
+            <p:cNvPr id="94" name="矩形: 圆角 1"/>
+            <p:cNvSpPr/>
+            <p:nvPr/>
+          </p:nvSpPr>
+          <p:spPr>
+            <a:xfrm>
+              <a:off x="1721830" y="817431"/>
+              <a:ext cx="871003" cy="5654034"/>
+            </a:xfrm>
+            <a:prstGeom prst="roundRect">
+              <a:avLst>
+                <a:gd name="adj" fmla="val 0"/>
+              </a:avLst>
+            </a:prstGeom>
+            <a:solidFill>
+              <a:srgbClr val="DAE3F5"/>
+            </a:solidFill>
+            <a:ln>
+              <a:noFill/>
+            </a:ln>
+          </p:spPr>
+          <p:style>
+            <a:lnRef idx="2">
+              <a:schemeClr val="accent1">
+                <a:shade val="15000"/>
+              </a:schemeClr>
+            </a:lnRef>
+            <a:fillRef idx="1">
+              <a:schemeClr val="accent1"/>
+            </a:fillRef>
+            <a:effectRef idx="0">
+              <a:schemeClr val="accent1"/>
+            </a:effectRef>
+            <a:fontRef idx="minor">
+              <a:schemeClr val="lt1"/>
+            </a:fontRef>
+          </p:style>
+          <p:txBody>
+            <a:bodyPr rtlCol="0" anchor="ctr"/>
+            <a:lstStyle/>
+            <a:p>
+              <a:pPr algn="ctr"/>
+              <a:endParaRPr lang="zh-CN" altLang="en-US" sz="1633" dirty="0">
+                <a:latin typeface="微软雅黑" panose="020B0503020204020204" charset="-122"/>
+                <a:ea typeface="微软雅黑" panose="020B0503020204020204" charset="-122"/>
+              </a:endParaRPr>
+            </a:p>
+          </p:txBody>
+        </p:sp>
+        <p:sp>
+          <p:nvSpPr>
+            <p:cNvPr id="4" name="矩形: 圆角 3"/>
+            <p:cNvSpPr/>
+            <p:nvPr/>
+          </p:nvSpPr>
+          <p:spPr>
+            <a:xfrm>
+              <a:off x="3038704" y="204502"/>
+              <a:ext cx="6104513" cy="433197"/>
+            </a:xfrm>
+            <a:prstGeom prst="roundRect">
+              <a:avLst>
+                <a:gd name="adj" fmla="val 50000"/>
+              </a:avLst>
+            </a:prstGeom>
+            <a:solidFill>
+              <a:srgbClr val="2E54A1"/>
+            </a:solidFill>
+            <a:ln>
+              <a:noFill/>
+            </a:ln>
+          </p:spPr>
+          <p:style>
+            <a:lnRef idx="2">
+              <a:schemeClr val="accent1">
+                <a:shade val="15000"/>
+              </a:schemeClr>
+            </a:lnRef>
+            <a:fillRef idx="1">
+              <a:schemeClr val="accent1"/>
+            </a:fillRef>
+            <a:effectRef idx="0">
+              <a:schemeClr val="accent1"/>
+            </a:effectRef>
+            <a:fontRef idx="minor">
+              <a:schemeClr val="lt1"/>
+            </a:fontRef>
+          </p:style>
+          <p:txBody>
+            <a:bodyPr rtlCol="0" anchor="ctr"/>
+            <a:lstStyle/>
+            <a:p>
+              <a:pPr algn="ctr" defTabSz="829544">
+                <a:defRPr/>
+              </a:pPr>
+              <a:r>
+                <a:rPr lang="zh-CN" altLang="en-US" sz="1633" b="1" dirty="0">
+                  <a:solidFill>
+                    <a:prstClr val="white"/>
+                  </a:solidFill>
+                  <a:latin typeface="微软雅黑" panose="020B0503020204020204" charset="-122"/>
+                  <a:ea typeface="微软雅黑" panose="020B0503020204020204" charset="-122"/>
+                  <a:cs typeface="Times New Roman" panose="02020603050405020304" pitchFamily="18" charset="0"/>
+                  <a:sym typeface="+mn-ea"/>
+                </a:rPr>
+                <a:t>链上链下协同的可追溯频谱数据可信管理办法</a:t>
+              </a:r>
+              <a:endParaRPr lang="zh-CN" altLang="en-US" sz="1633" b="1" dirty="0">
+                <a:latin typeface="微软雅黑" panose="020B0503020204020204" charset="-122"/>
+                <a:ea typeface="微软雅黑" panose="020B0503020204020204" charset="-122"/>
+                <a:cs typeface="微软雅黑" panose="020B0503020204020204" charset="-122"/>
+              </a:endParaRPr>
+            </a:p>
+          </p:txBody>
+        </p:sp>
+        <p:sp>
+          <p:nvSpPr>
+            <p:cNvPr id="99" name="箭头: 燕尾形 1071"/>
+            <p:cNvSpPr/>
+            <p:nvPr/>
+          </p:nvSpPr>
+          <p:spPr>
+            <a:xfrm>
+              <a:off x="5248759" y="3466445"/>
+              <a:ext cx="251162" cy="356005"/>
+            </a:xfrm>
+            <a:prstGeom prst="notchedRightArrow">
+              <a:avLst>
+                <a:gd name="adj1" fmla="val 33809"/>
+                <a:gd name="adj2" fmla="val 52390"/>
+              </a:avLst>
+            </a:prstGeom>
+            <a:gradFill>
+              <a:gsLst>
+                <a:gs pos="0">
+                  <a:schemeClr val="accent1">
+                    <a:lumMod val="5000"/>
+                    <a:lumOff val="95000"/>
+                    <a:alpha val="0"/>
+                  </a:schemeClr>
+                </a:gs>
+                <a:gs pos="74000">
+                  <a:srgbClr val="2E54A1"/>
+                </a:gs>
+                <a:gs pos="100000">
+                  <a:srgbClr val="2E54A1"/>
+                </a:gs>
+              </a:gsLst>
+              <a:lin ang="0" scaled="0"/>
+            </a:gradFill>
+            <a:ln>
+              <a:noFill/>
+            </a:ln>
+          </p:spPr>
+          <p:style>
+            <a:lnRef idx="2">
+              <a:schemeClr val="accent1">
+                <a:lumMod val="75000"/>
+              </a:schemeClr>
+            </a:lnRef>
+            <a:fillRef idx="1">
+              <a:schemeClr val="accent1"/>
+            </a:fillRef>
+            <a:effectRef idx="0">
+              <a:srgbClr val="FFFFFF"/>
+            </a:effectRef>
+            <a:fontRef idx="minor">
+              <a:schemeClr val="lt1"/>
+            </a:fontRef>
+          </p:style>
+          <p:txBody>
+            <a:bodyPr rtlCol="0" anchor="ctr"/>
+            <a:lstStyle/>
+            <a:p>
+              <a:pPr algn="ctr"/>
+              <a:endParaRPr lang="zh-CN" altLang="en-US" sz="1633"/>
+            </a:p>
+          </p:txBody>
+        </p:sp>
+        <p:sp>
+          <p:nvSpPr>
+            <p:cNvPr id="13" name="文本框 12"/>
+            <p:cNvSpPr txBox="1"/>
+            <p:nvPr/>
+          </p:nvSpPr>
+          <p:spPr>
+            <a:xfrm>
+              <a:off x="2935729" y="980308"/>
+              <a:ext cx="2310579" cy="338554"/>
+            </a:xfrm>
+            <a:prstGeom prst="rect">
+              <a:avLst/>
+            </a:prstGeom>
+            <a:noFill/>
+          </p:spPr>
+          <p:txBody>
+            <a:bodyPr wrap="square" rtlCol="0">
+              <a:spAutoFit/>
+            </a:bodyPr>
+            <a:lstStyle/>
+            <a:p>
+              <a:pPr algn="ctr" defTabSz="829544">
+                <a:defRPr/>
+              </a:pPr>
+              <a:r>
+                <a:rPr lang="zh-CN" altLang="en-US" sz="1600" b="1" dirty="0">
+                  <a:solidFill>
+                    <a:srgbClr val="C00000"/>
+                  </a:solidFill>
+                  <a:latin typeface="微软雅黑" panose="020B0503020204020204" charset="-122"/>
+                  <a:ea typeface="微软雅黑" panose="020B0503020204020204" charset="-122"/>
+                </a:rPr>
+                <a:t>链上链下分层存证</a:t>
+              </a:r>
+            </a:p>
+          </p:txBody>
+        </p:sp>
+        <p:sp>
+          <p:nvSpPr>
+            <p:cNvPr id="145" name="箭头: 下 1067"/>
+            <p:cNvSpPr/>
+            <p:nvPr/>
+          </p:nvSpPr>
+          <p:spPr>
+            <a:xfrm>
+              <a:off x="3973877" y="2255753"/>
+              <a:ext cx="170637" cy="254199"/>
+            </a:xfrm>
+            <a:prstGeom prst="downArrow">
+              <a:avLst>
+                <a:gd name="adj1" fmla="val 34037"/>
+                <a:gd name="adj2" fmla="val 52816"/>
+              </a:avLst>
+            </a:prstGeom>
+            <a:gradFill>
+              <a:gsLst>
+                <a:gs pos="0">
+                  <a:schemeClr val="accent1">
+                    <a:lumMod val="5000"/>
+                    <a:lumOff val="95000"/>
+                    <a:alpha val="0"/>
+                  </a:schemeClr>
+                </a:gs>
+                <a:gs pos="74000">
+                  <a:srgbClr val="C00000"/>
+                </a:gs>
+                <a:gs pos="100000">
+                  <a:srgbClr val="C00000"/>
+                </a:gs>
+              </a:gsLst>
+              <a:lin ang="5400000" scaled="0"/>
+            </a:gradFill>
+            <a:ln>
+              <a:noFill/>
+            </a:ln>
+          </p:spPr>
+          <p:style>
+            <a:lnRef idx="2">
+              <a:schemeClr val="accent1">
+                <a:lumMod val="75000"/>
+              </a:schemeClr>
+            </a:lnRef>
+            <a:fillRef idx="1">
+              <a:schemeClr val="accent1"/>
+            </a:fillRef>
+            <a:effectRef idx="0">
+              <a:srgbClr val="FFFFFF"/>
+            </a:effectRef>
+            <a:fontRef idx="minor">
+              <a:schemeClr val="lt1"/>
+            </a:fontRef>
+          </p:style>
+          <p:txBody>
+            <a:bodyPr rtlCol="0" anchor="ctr"/>
+            <a:lstStyle/>
+            <a:p>
+              <a:pPr algn="ctr"/>
+              <a:endParaRPr lang="zh-CN" altLang="en-US" sz="1633"/>
+            </a:p>
+          </p:txBody>
+        </p:sp>
+        <p:sp>
+          <p:nvSpPr>
+            <p:cNvPr id="60" name="矩形: 圆角 43"/>
+            <p:cNvSpPr/>
+            <p:nvPr/>
+          </p:nvSpPr>
+          <p:spPr>
+            <a:xfrm>
+              <a:off x="2976629" y="1504438"/>
+              <a:ext cx="2171172" cy="672263"/>
+            </a:xfrm>
+            <a:prstGeom prst="roundRect">
+              <a:avLst>
+                <a:gd name="adj" fmla="val 0"/>
+              </a:avLst>
+            </a:prstGeom>
+            <a:solidFill>
+              <a:schemeClr val="bg1"/>
+            </a:solidFill>
+            <a:ln w="12700" cmpd="sng">
+              <a:solidFill>
+                <a:srgbClr val="C00000"/>
+              </a:solidFill>
+              <a:prstDash val="solid"/>
+            </a:ln>
+          </p:spPr>
+          <p:style>
+            <a:lnRef idx="2">
+              <a:schemeClr val="dk1"/>
+            </a:lnRef>
+            <a:fillRef idx="1">
+              <a:schemeClr val="lt1"/>
+            </a:fillRef>
+            <a:effectRef idx="0">
+              <a:schemeClr val="dk1"/>
+            </a:effectRef>
+            <a:fontRef idx="minor">
+              <a:schemeClr val="dk1"/>
+            </a:fontRef>
+          </p:style>
+          <p:txBody>
+            <a:bodyPr rtlCol="0" anchor="ctr"/>
+            <a:lstStyle/>
+            <a:p>
+              <a:pPr algn="ctr" defTabSz="829544">
+                <a:defRPr/>
+              </a:pPr>
+              <a:endParaRPr lang="zh-CN" altLang="en-US" sz="1633" dirty="0">
+                <a:solidFill>
+                  <a:prstClr val="black"/>
+                </a:solidFill>
+                <a:latin typeface="等线" panose="02010600030101010101" charset="-122"/>
+                <a:ea typeface="等线" panose="02010600030101010101" charset="-122"/>
+              </a:endParaRPr>
+            </a:p>
+          </p:txBody>
+        </p:sp>
+        <p:sp>
+          <p:nvSpPr>
+            <p:cNvPr id="24" name="文本框 23"/>
+            <p:cNvSpPr txBox="1"/>
+            <p:nvPr/>
+          </p:nvSpPr>
+          <p:spPr>
+            <a:xfrm>
+              <a:off x="3571124" y="1715565"/>
+              <a:ext cx="1634284" cy="427553"/>
+            </a:xfrm>
+            <a:prstGeom prst="rect">
+              <a:avLst/>
+            </a:prstGeom>
+            <a:noFill/>
+          </p:spPr>
+          <p:txBody>
+            <a:bodyPr wrap="square" rtlCol="0">
+              <a:spAutoFit/>
+            </a:bodyPr>
+            <a:lstStyle/>
+            <a:p>
+              <a:pPr algn="ctr">
+                <a:buClrTx/>
+                <a:buSzTx/>
+                <a:buFontTx/>
+                <a:defRPr/>
+              </a:pPr>
+              <a:r>
+                <a:rPr lang="zh-CN" altLang="en-US" sz="1089" b="1" dirty="0">
+                  <a:solidFill>
+                    <a:prstClr val="black"/>
+                  </a:solidFill>
+                  <a:latin typeface="微软雅黑" panose="020B0503020204020204" charset="-122"/>
+                  <a:ea typeface="微软雅黑" panose="020B0503020204020204" charset="-122"/>
+                </a:rPr>
+                <a:t>频谱数据体量庞大</a:t>
+              </a:r>
+              <a:endParaRPr lang="en-US" altLang="zh-CN" sz="1089" b="1" dirty="0">
+                <a:solidFill>
+                  <a:prstClr val="black"/>
+                </a:solidFill>
+                <a:latin typeface="微软雅黑" panose="020B0503020204020204" charset="-122"/>
+                <a:ea typeface="微软雅黑" panose="020B0503020204020204" charset="-122"/>
+              </a:endParaRPr>
+            </a:p>
+            <a:p>
+              <a:pPr algn="ctr">
+                <a:buClrTx/>
+                <a:buSzTx/>
+                <a:buFontTx/>
+                <a:defRPr/>
+              </a:pPr>
+              <a:r>
+                <a:rPr lang="zh-CN" altLang="en-US" sz="1089" b="1" dirty="0">
+                  <a:solidFill>
+                    <a:srgbClr val="C00000"/>
+                  </a:solidFill>
+                  <a:latin typeface="微软雅黑" panose="020B0503020204020204" charset="-122"/>
+                  <a:ea typeface="微软雅黑" panose="020B0503020204020204" charset="-122"/>
+                </a:rPr>
+                <a:t>全量上链开销大</a:t>
+              </a:r>
+              <a:endParaRPr lang="en-US" altLang="zh-CN" sz="1089" b="1" dirty="0">
+                <a:solidFill>
+                  <a:srgbClr val="C00000"/>
+                </a:solidFill>
+                <a:latin typeface="微软雅黑" panose="020B0503020204020204" charset="-122"/>
+                <a:ea typeface="微软雅黑" panose="020B0503020204020204" charset="-122"/>
+              </a:endParaRPr>
+            </a:p>
+          </p:txBody>
+        </p:sp>
         <p:pic>
           <p:nvPicPr>
-            <p:cNvPr id="16" name="图片 15" descr="游戏机里面的人物&#10;&#10;中度可信度描述已自动生成">
+            <p:cNvPr id="3" name="图形 2" descr="数据库 纯色填充">
               <a:extLst>
                 <a:ext uri="{FF2B5EF4-FFF2-40B4-BE49-F238E27FC236}">
-                  <a16:creationId xmlns:a16="http://schemas.microsoft.com/office/drawing/2014/main" id="{BD342551-752E-F0CF-0C32-F89168C77877}"/>
+                  <a16:creationId xmlns:a16="http://schemas.microsoft.com/office/drawing/2014/main" id="{7C7F3871-282D-223B-EDC8-1A90B78B19C4}"/>
                 </a:ext>
               </a:extLst>
             </p:cNvPr>
@@ -4465,38 +4244,250 @@
             <p:nvPr/>
           </p:nvPicPr>
           <p:blipFill>
-            <a:blip r:embed="rId6">
+            <a:blip r:embed="rId4">
               <a:extLst>
-                <a:ext uri="{28A0092B-C50C-407E-A947-70E740481C1C}">
-                  <a14:useLocalDpi xmlns:a14="http://schemas.microsoft.com/office/drawing/2010/main" val="0"/>
+                <a:ext uri="{96DAC541-7B7A-43D3-8B79-37D633B846F1}">
+                  <asvg:svgBlip xmlns:asvg="http://schemas.microsoft.com/office/drawing/2016/SVG/main" r:embed="rId5"/>
                 </a:ext>
               </a:extLst>
             </a:blip>
-            <a:srcRect t="1722" b="4845"/>
-            <a:stretch/>
+            <a:stretch>
+              <a:fillRect/>
+            </a:stretch>
           </p:blipFill>
           <p:spPr>
             <a:xfrm>
-              <a:off x="269667" y="2403364"/>
-              <a:ext cx="3808676" cy="720000"/>
+              <a:off x="3088924" y="1493349"/>
+              <a:ext cx="640080" cy="640080"/>
             </a:xfrm>
             <a:prstGeom prst="rect">
               <a:avLst/>
             </a:prstGeom>
-            <a:scene3d>
-              <a:camera prst="orthographicFront">
-                <a:rot lat="0" lon="0" rev="16200000"/>
-              </a:camera>
-              <a:lightRig rig="threePt" dir="t"/>
-            </a:scene3d>
           </p:spPr>
         </p:pic>
+        <p:grpSp>
+          <p:nvGrpSpPr>
+            <p:cNvPr id="20" name="组合 19">
+              <a:extLst>
+                <a:ext uri="{FF2B5EF4-FFF2-40B4-BE49-F238E27FC236}">
+                  <a16:creationId xmlns:a16="http://schemas.microsoft.com/office/drawing/2014/main" id="{72E5C1C8-DA60-8B8F-7508-DA0FFF738C25}"/>
+                </a:ext>
+              </a:extLst>
+            </p:cNvPr>
+            <p:cNvGrpSpPr/>
+            <p:nvPr/>
+          </p:nvGrpSpPr>
+          <p:grpSpPr>
+            <a:xfrm>
+              <a:off x="257555" y="2439700"/>
+              <a:ext cx="3808676" cy="2405837"/>
+              <a:chOff x="269667" y="2403364"/>
+              <a:chExt cx="3808676" cy="2405837"/>
+            </a:xfrm>
+          </p:grpSpPr>
+          <p:pic>
+            <p:nvPicPr>
+              <p:cNvPr id="16" name="图片 15" descr="游戏机里面的人物&#10;&#10;中度可信度描述已自动生成">
+                <a:extLst>
+                  <a:ext uri="{FF2B5EF4-FFF2-40B4-BE49-F238E27FC236}">
+                    <a16:creationId xmlns:a16="http://schemas.microsoft.com/office/drawing/2014/main" id="{BD342551-752E-F0CF-0C32-F89168C77877}"/>
+                  </a:ext>
+                </a:extLst>
+              </p:cNvPr>
+              <p:cNvPicPr>
+                <a:picLocks noChangeAspect="1"/>
+              </p:cNvPicPr>
+              <p:nvPr/>
+            </p:nvPicPr>
+            <p:blipFill>
+              <a:blip r:embed="rId6">
+                <a:extLst>
+                  <a:ext uri="{28A0092B-C50C-407E-A947-70E740481C1C}">
+                    <a14:useLocalDpi xmlns:a14="http://schemas.microsoft.com/office/drawing/2010/main" val="0"/>
+                  </a:ext>
+                </a:extLst>
+              </a:blip>
+              <a:srcRect t="1722" b="4845"/>
+              <a:stretch/>
+            </p:blipFill>
+            <p:spPr>
+              <a:xfrm>
+                <a:off x="269667" y="2403364"/>
+                <a:ext cx="3808676" cy="720000"/>
+              </a:xfrm>
+              <a:prstGeom prst="rect">
+                <a:avLst/>
+              </a:prstGeom>
+              <a:scene3d>
+                <a:camera prst="orthographicFront">
+                  <a:rot lat="0" lon="0" rev="16200000"/>
+                </a:camera>
+                <a:lightRig rig="threePt" dir="t"/>
+              </a:scene3d>
+            </p:spPr>
+          </p:pic>
+          <p:pic>
+            <p:nvPicPr>
+              <p:cNvPr id="17" name="图片 16" descr="游戏机里面的人物&#10;&#10;中度可信度描述已自动生成">
+                <a:extLst>
+                  <a:ext uri="{FF2B5EF4-FFF2-40B4-BE49-F238E27FC236}">
+                    <a16:creationId xmlns:a16="http://schemas.microsoft.com/office/drawing/2014/main" id="{BE5D9F77-96F2-E6A0-A3E1-F29FCC7C1219}"/>
+                  </a:ext>
+                </a:extLst>
+              </p:cNvPr>
+              <p:cNvPicPr>
+                <a:picLocks noChangeAspect="1"/>
+              </p:cNvPicPr>
+              <p:nvPr/>
+            </p:nvPicPr>
+            <p:blipFill>
+              <a:blip r:embed="rId6">
+                <a:extLst>
+                  <a:ext uri="{28A0092B-C50C-407E-A947-70E740481C1C}">
+                    <a14:useLocalDpi xmlns:a14="http://schemas.microsoft.com/office/drawing/2010/main" val="0"/>
+                  </a:ext>
+                </a:extLst>
+              </a:blip>
+              <a:srcRect l="4271" t="1722" b="4845"/>
+              <a:stretch/>
+            </p:blipFill>
+            <p:spPr>
+              <a:xfrm>
+                <a:off x="348166" y="4089201"/>
+                <a:ext cx="3646026" cy="720000"/>
+              </a:xfrm>
+              <a:prstGeom prst="rect">
+                <a:avLst/>
+              </a:prstGeom>
+              <a:scene3d>
+                <a:camera prst="orthographicFront">
+                  <a:rot lat="0" lon="0" rev="16200000"/>
+                </a:camera>
+                <a:lightRig rig="threePt" dir="t"/>
+              </a:scene3d>
+            </p:spPr>
+          </p:pic>
+        </p:grpSp>
+        <p:sp>
+          <p:nvSpPr>
+            <p:cNvPr id="23" name="箭头: 燕尾形 1071">
+              <a:extLst>
+                <a:ext uri="{FF2B5EF4-FFF2-40B4-BE49-F238E27FC236}">
+                  <a16:creationId xmlns:a16="http://schemas.microsoft.com/office/drawing/2014/main" id="{08E57F9C-821D-A677-5EFE-1EBD088E746F}"/>
+                </a:ext>
+              </a:extLst>
+            </p:cNvPr>
+            <p:cNvSpPr/>
+            <p:nvPr/>
+          </p:nvSpPr>
+          <p:spPr>
+            <a:xfrm>
+              <a:off x="2634310" y="3474699"/>
+              <a:ext cx="251162" cy="356005"/>
+            </a:xfrm>
+            <a:prstGeom prst="notchedRightArrow">
+              <a:avLst>
+                <a:gd name="adj1" fmla="val 33809"/>
+                <a:gd name="adj2" fmla="val 52390"/>
+              </a:avLst>
+            </a:prstGeom>
+            <a:gradFill>
+              <a:gsLst>
+                <a:gs pos="0">
+                  <a:schemeClr val="accent1">
+                    <a:lumMod val="5000"/>
+                    <a:lumOff val="95000"/>
+                    <a:alpha val="0"/>
+                  </a:schemeClr>
+                </a:gs>
+                <a:gs pos="74000">
+                  <a:srgbClr val="2E54A1"/>
+                </a:gs>
+                <a:gs pos="100000">
+                  <a:srgbClr val="2E54A1"/>
+                </a:gs>
+              </a:gsLst>
+              <a:lin ang="0" scaled="0"/>
+            </a:gradFill>
+            <a:ln>
+              <a:noFill/>
+            </a:ln>
+          </p:spPr>
+          <p:style>
+            <a:lnRef idx="2">
+              <a:schemeClr val="accent1">
+                <a:lumMod val="75000"/>
+              </a:schemeClr>
+            </a:lnRef>
+            <a:fillRef idx="1">
+              <a:schemeClr val="accent1"/>
+            </a:fillRef>
+            <a:effectRef idx="0">
+              <a:srgbClr val="FFFFFF"/>
+            </a:effectRef>
+            <a:fontRef idx="minor">
+              <a:schemeClr val="lt1"/>
+            </a:fontRef>
+          </p:style>
+          <p:txBody>
+            <a:bodyPr rtlCol="0" anchor="ctr"/>
+            <a:lstStyle/>
+            <a:p>
+              <a:pPr algn="ctr"/>
+              <a:endParaRPr lang="zh-CN" altLang="en-US" sz="1633"/>
+            </a:p>
+          </p:txBody>
+        </p:sp>
+        <p:sp>
+          <p:nvSpPr>
+            <p:cNvPr id="2" name="文本框 1">
+              <a:extLst>
+                <a:ext uri="{FF2B5EF4-FFF2-40B4-BE49-F238E27FC236}">
+                  <a16:creationId xmlns:a16="http://schemas.microsoft.com/office/drawing/2014/main" id="{1DE680EE-B73D-BC43-664E-CE7EE3826258}"/>
+                </a:ext>
+              </a:extLst>
+            </p:cNvPr>
+            <p:cNvSpPr txBox="1"/>
+            <p:nvPr/>
+          </p:nvSpPr>
+          <p:spPr>
+            <a:xfrm>
+              <a:off x="5677924" y="980308"/>
+              <a:ext cx="2310579" cy="338554"/>
+            </a:xfrm>
+            <a:prstGeom prst="rect">
+              <a:avLst/>
+            </a:prstGeom>
+            <a:noFill/>
+          </p:spPr>
+          <p:txBody>
+            <a:bodyPr wrap="square" rtlCol="0">
+              <a:spAutoFit/>
+            </a:bodyPr>
+            <a:lstStyle/>
+            <a:p>
+              <a:pPr algn="ctr" defTabSz="829544">
+                <a:defRPr/>
+              </a:pPr>
+              <a:r>
+                <a:rPr lang="zh-CN" altLang="en-US" sz="1600" b="1" dirty="0">
+                  <a:solidFill>
+                    <a:srgbClr val="C00000"/>
+                  </a:solidFill>
+                  <a:latin typeface="微软雅黑" panose="020B0503020204020204" charset="-122"/>
+                  <a:ea typeface="微软雅黑" panose="020B0503020204020204" charset="-122"/>
+                </a:rPr>
+                <a:t>可验证分级协同索引</a:t>
+              </a:r>
+            </a:p>
+          </p:txBody>
+        </p:sp>
         <p:pic>
           <p:nvPicPr>
-            <p:cNvPr id="17" name="图片 16" descr="游戏机里面的人物&#10;&#10;中度可信度描述已自动生成">
+            <p:cNvPr id="6" name="图片 5" descr="游戏界面的截图图&#10;&#10;描述已自动生成">
               <a:extLst>
                 <a:ext uri="{FF2B5EF4-FFF2-40B4-BE49-F238E27FC236}">
-                  <a16:creationId xmlns:a16="http://schemas.microsoft.com/office/drawing/2014/main" id="{BE5D9F77-96F2-E6A0-A3E1-F29FCC7C1219}"/>
+                  <a16:creationId xmlns:a16="http://schemas.microsoft.com/office/drawing/2014/main" id="{E524B7CC-1586-F386-326C-B45A7F054CB1}"/>
                 </a:ext>
               </a:extLst>
             </p:cNvPr>
@@ -4506,446 +4497,347 @@
             <p:nvPr/>
           </p:nvPicPr>
           <p:blipFill>
-            <a:blip r:embed="rId6">
+            <a:blip r:embed="rId7">
               <a:extLst>
                 <a:ext uri="{28A0092B-C50C-407E-A947-70E740481C1C}">
                   <a14:useLocalDpi xmlns:a14="http://schemas.microsoft.com/office/drawing/2010/main" val="0"/>
                 </a:ext>
               </a:extLst>
             </a:blip>
-            <a:srcRect l="4271" t="1722" b="4845"/>
+            <a:stretch>
+              <a:fillRect/>
+            </a:stretch>
+          </p:blipFill>
+          <p:spPr>
+            <a:xfrm>
+              <a:off x="5633029" y="1515383"/>
+              <a:ext cx="2551672" cy="4542645"/>
+            </a:xfrm>
+            <a:prstGeom prst="rect">
+              <a:avLst/>
+            </a:prstGeom>
+          </p:spPr>
+        </p:pic>
+        <p:sp>
+          <p:nvSpPr>
+            <p:cNvPr id="26" name="矩形: 圆角 107"/>
+            <p:cNvSpPr/>
+            <p:nvPr/>
+          </p:nvSpPr>
+          <p:spPr>
+            <a:xfrm>
+              <a:off x="3126080" y="2659813"/>
+              <a:ext cx="1892359" cy="233304"/>
+            </a:xfrm>
+            <a:prstGeom prst="roundRect">
+              <a:avLst/>
+            </a:prstGeom>
+            <a:noFill/>
+            <a:ln w="15875" cap="flat" cmpd="sng" algn="ctr">
+              <a:noFill/>
+              <a:prstDash val="solid"/>
+              <a:miter lim="800000"/>
+            </a:ln>
+            <a:effectLst/>
+          </p:spPr>
+          <p:txBody>
+            <a:bodyPr rtlCol="0" anchor="ctr"/>
+            <a:lstStyle/>
+            <a:p>
+              <a:pPr algn="ctr" defTabSz="829544">
+                <a:defRPr/>
+              </a:pPr>
+              <a:r>
+                <a:rPr lang="zh-CN" altLang="en-US" sz="1270" b="1" dirty="0">
+                  <a:solidFill>
+                    <a:srgbClr val="C00000"/>
+                  </a:solidFill>
+                  <a:latin typeface="微软雅黑" panose="020B0503020204020204" charset="-122"/>
+                  <a:ea typeface="微软雅黑" panose="020B0503020204020204" charset="-122"/>
+                </a:rPr>
+                <a:t>数据分层差异化存储</a:t>
+              </a:r>
+            </a:p>
+          </p:txBody>
+        </p:sp>
+        <p:pic>
+          <p:nvPicPr>
+            <p:cNvPr id="55" name="图形 54">
+              <a:extLst>
+                <a:ext uri="{FF2B5EF4-FFF2-40B4-BE49-F238E27FC236}">
+                  <a16:creationId xmlns:a16="http://schemas.microsoft.com/office/drawing/2014/main" id="{4554D2FD-C9E4-624F-B264-1B95F1946E2D}"/>
+                </a:ext>
+              </a:extLst>
+            </p:cNvPr>
+            <p:cNvPicPr>
+              <a:picLocks noChangeAspect="1"/>
+            </p:cNvPicPr>
+            <p:nvPr/>
+          </p:nvPicPr>
+          <p:blipFill>
+            <a:blip r:embed="rId8">
+              <a:extLst>
+                <a:ext uri="{96DAC541-7B7A-43D3-8B79-37D633B846F1}">
+                  <asvg:svgBlip xmlns:asvg="http://schemas.microsoft.com/office/drawing/2016/SVG/main" r:embed="rId9"/>
+                </a:ext>
+              </a:extLst>
+            </a:blip>
+            <a:srcRect/>
             <a:stretch/>
           </p:blipFill>
           <p:spPr>
             <a:xfrm>
-              <a:off x="348166" y="4089201"/>
-              <a:ext cx="3646026" cy="720000"/>
+              <a:off x="3061847" y="2931155"/>
+              <a:ext cx="2020824" cy="3266027"/>
             </a:xfrm>
             <a:prstGeom prst="rect">
               <a:avLst/>
             </a:prstGeom>
-            <a:scene3d>
-              <a:camera prst="orthographicFront">
-                <a:rot lat="0" lon="0" rev="16200000"/>
-              </a:camera>
-              <a:lightRig rig="threePt" dir="t"/>
-            </a:scene3d>
           </p:spPr>
         </p:pic>
+        <p:sp>
+          <p:nvSpPr>
+            <p:cNvPr id="11" name="矩形 10">
+              <a:extLst>
+                <a:ext uri="{FF2B5EF4-FFF2-40B4-BE49-F238E27FC236}">
+                  <a16:creationId xmlns:a16="http://schemas.microsoft.com/office/drawing/2014/main" id="{3731614A-4902-1151-6F76-AC107CC80A0B}"/>
+                </a:ext>
+              </a:extLst>
+            </p:cNvPr>
+            <p:cNvSpPr/>
+            <p:nvPr/>
+          </p:nvSpPr>
+          <p:spPr>
+            <a:xfrm>
+              <a:off x="2979658" y="2571750"/>
+              <a:ext cx="2171172" cy="3625432"/>
+            </a:xfrm>
+            <a:prstGeom prst="rect">
+              <a:avLst/>
+            </a:prstGeom>
+            <a:noFill/>
+            <a:ln>
+              <a:solidFill>
+                <a:schemeClr val="accent5">
+                  <a:lumMod val="75000"/>
+                </a:schemeClr>
+              </a:solidFill>
+            </a:ln>
+          </p:spPr>
+          <p:style>
+            <a:lnRef idx="2">
+              <a:schemeClr val="accent1">
+                <a:shade val="15000"/>
+              </a:schemeClr>
+            </a:lnRef>
+            <a:fillRef idx="1">
+              <a:schemeClr val="accent1"/>
+            </a:fillRef>
+            <a:effectRef idx="0">
+              <a:schemeClr val="accent1"/>
+            </a:effectRef>
+            <a:fontRef idx="minor">
+              <a:schemeClr val="lt1"/>
+            </a:fontRef>
+          </p:style>
+          <p:txBody>
+            <a:bodyPr rtlCol="0" anchor="ctr"/>
+            <a:lstStyle/>
+            <a:p>
+              <a:pPr algn="ctr"/>
+              <a:endParaRPr lang="zh-CN" altLang="en-US"/>
+            </a:p>
+          </p:txBody>
+        </p:sp>
+        <p:sp>
+          <p:nvSpPr>
+            <p:cNvPr id="12" name="矩形 11">
+              <a:extLst>
+                <a:ext uri="{FF2B5EF4-FFF2-40B4-BE49-F238E27FC236}">
+                  <a16:creationId xmlns:a16="http://schemas.microsoft.com/office/drawing/2014/main" id="{E1092223-7520-FA49-7A97-1C9A9202D1C6}"/>
+                </a:ext>
+              </a:extLst>
+            </p:cNvPr>
+            <p:cNvSpPr/>
+            <p:nvPr/>
+          </p:nvSpPr>
+          <p:spPr>
+            <a:xfrm>
+              <a:off x="5581789" y="1512994"/>
+              <a:ext cx="2602911" cy="4684188"/>
+            </a:xfrm>
+            <a:prstGeom prst="rect">
+              <a:avLst/>
+            </a:prstGeom>
+            <a:noFill/>
+            <a:ln>
+              <a:solidFill>
+                <a:schemeClr val="accent4">
+                  <a:lumMod val="75000"/>
+                </a:schemeClr>
+              </a:solidFill>
+            </a:ln>
+          </p:spPr>
+          <p:style>
+            <a:lnRef idx="2">
+              <a:schemeClr val="accent1">
+                <a:shade val="15000"/>
+              </a:schemeClr>
+            </a:lnRef>
+            <a:fillRef idx="1">
+              <a:schemeClr val="accent1"/>
+            </a:fillRef>
+            <a:effectRef idx="0">
+              <a:schemeClr val="accent1"/>
+            </a:effectRef>
+            <a:fontRef idx="minor">
+              <a:schemeClr val="lt1"/>
+            </a:fontRef>
+          </p:style>
+          <p:txBody>
+            <a:bodyPr rtlCol="0" anchor="ctr"/>
+            <a:lstStyle/>
+            <a:p>
+              <a:pPr algn="ctr"/>
+              <a:endParaRPr lang="zh-CN" altLang="en-US"/>
+            </a:p>
+          </p:txBody>
+        </p:sp>
+        <p:pic>
+          <p:nvPicPr>
+            <p:cNvPr id="18" name="图片 17" descr="图片包含 图示&#10;&#10;描述已自动生成">
+              <a:extLst>
+                <a:ext uri="{FF2B5EF4-FFF2-40B4-BE49-F238E27FC236}">
+                  <a16:creationId xmlns:a16="http://schemas.microsoft.com/office/drawing/2014/main" id="{457744B7-045A-7A61-1B7C-A45FE2CB82BA}"/>
+                </a:ext>
+              </a:extLst>
+            </p:cNvPr>
+            <p:cNvPicPr>
+              <a:picLocks noChangeAspect="1"/>
+            </p:cNvPicPr>
+            <p:nvPr/>
+          </p:nvPicPr>
+          <p:blipFill>
+            <a:blip r:embed="rId10">
+              <a:extLst>
+                <a:ext uri="{28A0092B-C50C-407E-A947-70E740481C1C}">
+                  <a14:useLocalDpi xmlns:a14="http://schemas.microsoft.com/office/drawing/2010/main" val="0"/>
+                </a:ext>
+              </a:extLst>
+            </a:blip>
+            <a:stretch>
+              <a:fillRect/>
+            </a:stretch>
+          </p:blipFill>
+          <p:spPr>
+            <a:xfrm>
+              <a:off x="8242702" y="1768989"/>
+              <a:ext cx="2038578" cy="4172198"/>
+            </a:xfrm>
+            <a:prstGeom prst="rect">
+              <a:avLst/>
+            </a:prstGeom>
+          </p:spPr>
+        </p:pic>
+        <p:sp>
+          <p:nvSpPr>
+            <p:cNvPr id="19" name="矩形 18">
+              <a:extLst>
+                <a:ext uri="{FF2B5EF4-FFF2-40B4-BE49-F238E27FC236}">
+                  <a16:creationId xmlns:a16="http://schemas.microsoft.com/office/drawing/2014/main" id="{5847E35A-4D5F-3D2E-8BF7-C148FAD92A61}"/>
+                </a:ext>
+              </a:extLst>
+            </p:cNvPr>
+            <p:cNvSpPr/>
+            <p:nvPr/>
+          </p:nvSpPr>
+          <p:spPr>
+            <a:xfrm>
+              <a:off x="8266568" y="1512994"/>
+              <a:ext cx="2072713" cy="4684188"/>
+            </a:xfrm>
+            <a:prstGeom prst="rect">
+              <a:avLst/>
+            </a:prstGeom>
+            <a:noFill/>
+            <a:ln>
+              <a:solidFill>
+                <a:schemeClr val="accent4">
+                  <a:lumMod val="75000"/>
+                </a:schemeClr>
+              </a:solidFill>
+            </a:ln>
+          </p:spPr>
+          <p:style>
+            <a:lnRef idx="2">
+              <a:schemeClr val="accent1">
+                <a:shade val="15000"/>
+              </a:schemeClr>
+            </a:lnRef>
+            <a:fillRef idx="1">
+              <a:schemeClr val="accent1"/>
+            </a:fillRef>
+            <a:effectRef idx="0">
+              <a:schemeClr val="accent1"/>
+            </a:effectRef>
+            <a:fontRef idx="minor">
+              <a:schemeClr val="lt1"/>
+            </a:fontRef>
+          </p:style>
+          <p:txBody>
+            <a:bodyPr rtlCol="0" anchor="ctr"/>
+            <a:lstStyle/>
+            <a:p>
+              <a:pPr algn="ctr"/>
+              <a:endParaRPr lang="zh-CN" altLang="en-US"/>
+            </a:p>
+          </p:txBody>
+        </p:sp>
+        <p:sp>
+          <p:nvSpPr>
+            <p:cNvPr id="25" name="文本框 24">
+              <a:extLst>
+                <a:ext uri="{FF2B5EF4-FFF2-40B4-BE49-F238E27FC236}">
+                  <a16:creationId xmlns:a16="http://schemas.microsoft.com/office/drawing/2014/main" id="{C1C2A791-776E-2D00-6AC5-7705C42E939B}"/>
+                </a:ext>
+              </a:extLst>
+            </p:cNvPr>
+            <p:cNvSpPr txBox="1"/>
+            <p:nvPr/>
+          </p:nvSpPr>
+          <p:spPr>
+            <a:xfrm>
+              <a:off x="8100981" y="980308"/>
+              <a:ext cx="2310579" cy="338554"/>
+            </a:xfrm>
+            <a:prstGeom prst="rect">
+              <a:avLst/>
+            </a:prstGeom>
+            <a:noFill/>
+          </p:spPr>
+          <p:txBody>
+            <a:bodyPr wrap="square" rtlCol="0">
+              <a:spAutoFit/>
+            </a:bodyPr>
+            <a:lstStyle/>
+            <a:p>
+              <a:pPr algn="ctr" defTabSz="829544">
+                <a:defRPr/>
+              </a:pPr>
+              <a:r>
+                <a:rPr lang="zh-CN" altLang="en-US" sz="1600" b="1" dirty="0">
+                  <a:solidFill>
+                    <a:srgbClr val="C00000"/>
+                  </a:solidFill>
+                  <a:latin typeface="微软雅黑" panose="020B0503020204020204" charset="-122"/>
+                  <a:ea typeface="微软雅黑" panose="020B0503020204020204" charset="-122"/>
+                </a:rPr>
+                <a:t>高效可学习索引</a:t>
+              </a:r>
+            </a:p>
+          </p:txBody>
+        </p:sp>
       </p:grpSp>
-      <p:sp>
-        <p:nvSpPr>
-          <p:cNvPr id="23" name="箭头: 燕尾形 1071">
-            <a:extLst>
-              <a:ext uri="{FF2B5EF4-FFF2-40B4-BE49-F238E27FC236}">
-                <a16:creationId xmlns:a16="http://schemas.microsoft.com/office/drawing/2014/main" id="{08E57F9C-821D-A677-5EFE-1EBD088E746F}"/>
-              </a:ext>
-            </a:extLst>
-          </p:cNvPr>
-          <p:cNvSpPr/>
-          <p:nvPr/>
-        </p:nvSpPr>
-        <p:spPr>
-          <a:xfrm>
-            <a:off x="2634310" y="3474699"/>
-            <a:ext cx="251162" cy="356005"/>
-          </a:xfrm>
-          <a:prstGeom prst="notchedRightArrow">
-            <a:avLst>
-              <a:gd name="adj1" fmla="val 33809"/>
-              <a:gd name="adj2" fmla="val 52390"/>
-            </a:avLst>
-          </a:prstGeom>
-          <a:gradFill>
-            <a:gsLst>
-              <a:gs pos="0">
-                <a:schemeClr val="accent1">
-                  <a:lumMod val="5000"/>
-                  <a:lumOff val="95000"/>
-                  <a:alpha val="0"/>
-                </a:schemeClr>
-              </a:gs>
-              <a:gs pos="74000">
-                <a:srgbClr val="2E54A1"/>
-              </a:gs>
-              <a:gs pos="100000">
-                <a:srgbClr val="2E54A1"/>
-              </a:gs>
-            </a:gsLst>
-            <a:lin ang="0" scaled="0"/>
-          </a:gradFill>
-          <a:ln>
-            <a:noFill/>
-          </a:ln>
-        </p:spPr>
-        <p:style>
-          <a:lnRef idx="2">
-            <a:schemeClr val="accent1">
-              <a:lumMod val="75000"/>
-            </a:schemeClr>
-          </a:lnRef>
-          <a:fillRef idx="1">
-            <a:schemeClr val="accent1"/>
-          </a:fillRef>
-          <a:effectRef idx="0">
-            <a:srgbClr val="FFFFFF"/>
-          </a:effectRef>
-          <a:fontRef idx="minor">
-            <a:schemeClr val="lt1"/>
-          </a:fontRef>
-        </p:style>
-        <p:txBody>
-          <a:bodyPr rtlCol="0" anchor="ctr"/>
-          <a:lstStyle/>
-          <a:p>
-            <a:pPr algn="ctr"/>
-            <a:endParaRPr lang="zh-CN" altLang="en-US" sz="1633"/>
-          </a:p>
-        </p:txBody>
-      </p:sp>
-      <p:sp>
-        <p:nvSpPr>
-          <p:cNvPr id="2" name="文本框 1">
-            <a:extLst>
-              <a:ext uri="{FF2B5EF4-FFF2-40B4-BE49-F238E27FC236}">
-                <a16:creationId xmlns:a16="http://schemas.microsoft.com/office/drawing/2014/main" id="{1DE680EE-B73D-BC43-664E-CE7EE3826258}"/>
-              </a:ext>
-            </a:extLst>
-          </p:cNvPr>
-          <p:cNvSpPr txBox="1"/>
-          <p:nvPr/>
-        </p:nvSpPr>
-        <p:spPr>
-          <a:xfrm>
-            <a:off x="6780430" y="831831"/>
-            <a:ext cx="2310579" cy="338554"/>
-          </a:xfrm>
-          <a:prstGeom prst="rect">
-            <a:avLst/>
-          </a:prstGeom>
-          <a:noFill/>
-        </p:spPr>
-        <p:txBody>
-          <a:bodyPr wrap="square" rtlCol="0">
-            <a:spAutoFit/>
-          </a:bodyPr>
-          <a:lstStyle/>
-          <a:p>
-            <a:pPr algn="ctr" defTabSz="829544">
-              <a:defRPr/>
-            </a:pPr>
-            <a:r>
-              <a:rPr lang="zh-CN" altLang="en-US" sz="1600" b="1" dirty="0">
-                <a:solidFill>
-                  <a:srgbClr val="C00000"/>
-                </a:solidFill>
-                <a:latin typeface="微软雅黑" panose="020B0503020204020204" charset="-122"/>
-                <a:ea typeface="微软雅黑" panose="020B0503020204020204" charset="-122"/>
-              </a:rPr>
-              <a:t>可验证分级协同索引</a:t>
-            </a:r>
-          </a:p>
-        </p:txBody>
-      </p:sp>
-      <p:pic>
-        <p:nvPicPr>
-          <p:cNvPr id="6" name="图片 5">
-            <a:extLst>
-              <a:ext uri="{FF2B5EF4-FFF2-40B4-BE49-F238E27FC236}">
-                <a16:creationId xmlns:a16="http://schemas.microsoft.com/office/drawing/2014/main" id="{E524B7CC-1586-F386-326C-B45A7F054CB1}"/>
-              </a:ext>
-            </a:extLst>
-          </p:cNvPr>
-          <p:cNvPicPr>
-            <a:picLocks noChangeAspect="1"/>
-          </p:cNvPicPr>
-          <p:nvPr/>
-        </p:nvPicPr>
-        <p:blipFill>
-          <a:blip r:embed="rId7">
-            <a:extLst>
-              <a:ext uri="{28A0092B-C50C-407E-A947-70E740481C1C}">
-                <a14:useLocalDpi xmlns:a14="http://schemas.microsoft.com/office/drawing/2010/main" val="0"/>
-              </a:ext>
-            </a:extLst>
-          </a:blip>
-          <a:srcRect/>
-          <a:stretch/>
-        </p:blipFill>
-        <p:spPr>
-          <a:xfrm>
-            <a:off x="5630000" y="1200979"/>
-            <a:ext cx="4542645" cy="2514292"/>
-          </a:xfrm>
-          <a:prstGeom prst="rect">
-            <a:avLst/>
-          </a:prstGeom>
-        </p:spPr>
-      </p:pic>
-      <p:sp>
-        <p:nvSpPr>
-          <p:cNvPr id="26" name="矩形: 圆角 107"/>
-          <p:cNvSpPr/>
-          <p:nvPr/>
-        </p:nvSpPr>
-        <p:spPr>
-          <a:xfrm>
-            <a:off x="3126080" y="2659813"/>
-            <a:ext cx="1892359" cy="233304"/>
-          </a:xfrm>
-          <a:prstGeom prst="roundRect">
-            <a:avLst/>
-          </a:prstGeom>
-          <a:noFill/>
-          <a:ln w="15875" cap="flat" cmpd="sng" algn="ctr">
-            <a:noFill/>
-            <a:prstDash val="solid"/>
-            <a:miter lim="800000"/>
-          </a:ln>
-          <a:effectLst/>
-        </p:spPr>
-        <p:txBody>
-          <a:bodyPr rtlCol="0" anchor="ctr"/>
-          <a:lstStyle/>
-          <a:p>
-            <a:pPr algn="ctr" defTabSz="829544">
-              <a:defRPr/>
-            </a:pPr>
-            <a:r>
-              <a:rPr lang="zh-CN" altLang="en-US" sz="1270" b="1" dirty="0">
-                <a:solidFill>
-                  <a:srgbClr val="C00000"/>
-                </a:solidFill>
-                <a:latin typeface="微软雅黑" panose="020B0503020204020204" charset="-122"/>
-                <a:ea typeface="微软雅黑" panose="020B0503020204020204" charset="-122"/>
-              </a:rPr>
-              <a:t>数据分层差异化存储</a:t>
-            </a:r>
-          </a:p>
-        </p:txBody>
-      </p:sp>
-      <p:pic>
-        <p:nvPicPr>
-          <p:cNvPr id="55" name="图形 54">
-            <a:extLst>
-              <a:ext uri="{FF2B5EF4-FFF2-40B4-BE49-F238E27FC236}">
-                <a16:creationId xmlns:a16="http://schemas.microsoft.com/office/drawing/2014/main" id="{4554D2FD-C9E4-624F-B264-1B95F1946E2D}"/>
-              </a:ext>
-            </a:extLst>
-          </p:cNvPr>
-          <p:cNvPicPr>
-            <a:picLocks noChangeAspect="1"/>
-          </p:cNvPicPr>
-          <p:nvPr/>
-        </p:nvPicPr>
-        <p:blipFill>
-          <a:blip r:embed="rId8">
-            <a:extLst>
-              <a:ext uri="{96DAC541-7B7A-43D3-8B79-37D633B846F1}">
-                <asvg:svgBlip xmlns:asvg="http://schemas.microsoft.com/office/drawing/2016/SVG/main" r:embed="rId9"/>
-              </a:ext>
-            </a:extLst>
-          </a:blip>
-          <a:srcRect/>
-          <a:stretch/>
-        </p:blipFill>
-        <p:spPr>
-          <a:xfrm>
-            <a:off x="3061847" y="2931155"/>
-            <a:ext cx="2020824" cy="3266027"/>
-          </a:xfrm>
-          <a:prstGeom prst="rect">
-            <a:avLst/>
-          </a:prstGeom>
-        </p:spPr>
-      </p:pic>
-      <p:pic>
-        <p:nvPicPr>
-          <p:cNvPr id="18" name="图片 17">
-            <a:extLst>
-              <a:ext uri="{FF2B5EF4-FFF2-40B4-BE49-F238E27FC236}">
-                <a16:creationId xmlns:a16="http://schemas.microsoft.com/office/drawing/2014/main" id="{457744B7-045A-7A61-1B7C-A45FE2CB82BA}"/>
-              </a:ext>
-            </a:extLst>
-          </p:cNvPr>
-          <p:cNvPicPr>
-            <a:picLocks noChangeAspect="1"/>
-          </p:cNvPicPr>
-          <p:nvPr/>
-        </p:nvPicPr>
-        <p:blipFill>
-          <a:blip r:embed="rId10">
-            <a:extLst>
-              <a:ext uri="{28A0092B-C50C-407E-A947-70E740481C1C}">
-                <a14:useLocalDpi xmlns:a14="http://schemas.microsoft.com/office/drawing/2010/main" val="0"/>
-              </a:ext>
-            </a:extLst>
-          </a:blip>
-          <a:srcRect/>
-          <a:stretch/>
-        </p:blipFill>
-        <p:spPr>
-          <a:xfrm>
-            <a:off x="5810845" y="4187209"/>
-            <a:ext cx="4231801" cy="2069668"/>
-          </a:xfrm>
-          <a:prstGeom prst="rect">
-            <a:avLst/>
-          </a:prstGeom>
-        </p:spPr>
-      </p:pic>
-      <p:sp>
-        <p:nvSpPr>
-          <p:cNvPr id="25" name="文本框 24">
-            <a:extLst>
-              <a:ext uri="{FF2B5EF4-FFF2-40B4-BE49-F238E27FC236}">
-                <a16:creationId xmlns:a16="http://schemas.microsoft.com/office/drawing/2014/main" id="{C1C2A791-776E-2D00-6AC5-7705C42E939B}"/>
-              </a:ext>
-            </a:extLst>
-          </p:cNvPr>
-          <p:cNvSpPr txBox="1"/>
-          <p:nvPr/>
-        </p:nvSpPr>
-        <p:spPr>
-          <a:xfrm>
-            <a:off x="6799154" y="3790809"/>
-            <a:ext cx="2310579" cy="338554"/>
-          </a:xfrm>
-          <a:prstGeom prst="rect">
-            <a:avLst/>
-          </a:prstGeom>
-          <a:noFill/>
-        </p:spPr>
-        <p:txBody>
-          <a:bodyPr wrap="square" rtlCol="0">
-            <a:spAutoFit/>
-          </a:bodyPr>
-          <a:lstStyle/>
-          <a:p>
-            <a:pPr algn="ctr" defTabSz="829544">
-              <a:defRPr/>
-            </a:pPr>
-            <a:r>
-              <a:rPr lang="zh-CN" altLang="en-US" sz="1600" b="1" dirty="0">
-                <a:solidFill>
-                  <a:srgbClr val="C00000"/>
-                </a:solidFill>
-                <a:latin typeface="微软雅黑" panose="020B0503020204020204" charset="-122"/>
-                <a:ea typeface="微软雅黑" panose="020B0503020204020204" charset="-122"/>
-              </a:rPr>
-              <a:t>高效可学习索引</a:t>
-            </a:r>
-          </a:p>
-        </p:txBody>
-      </p:sp>
-      <p:sp>
-        <p:nvSpPr>
-          <p:cNvPr id="9" name="箭头: 燕尾形 1071">
-            <a:extLst>
-              <a:ext uri="{FF2B5EF4-FFF2-40B4-BE49-F238E27FC236}">
-                <a16:creationId xmlns:a16="http://schemas.microsoft.com/office/drawing/2014/main" id="{47BF9601-4B32-637A-2968-47B3F736314C}"/>
-              </a:ext>
-            </a:extLst>
-          </p:cNvPr>
-          <p:cNvSpPr/>
-          <p:nvPr/>
-        </p:nvSpPr>
-        <p:spPr>
-          <a:xfrm rot="3611159">
-            <a:off x="6648587" y="3798066"/>
-            <a:ext cx="251162" cy="356005"/>
-          </a:xfrm>
-          <a:prstGeom prst="notchedRightArrow">
-            <a:avLst>
-              <a:gd name="adj1" fmla="val 33809"/>
-              <a:gd name="adj2" fmla="val 52390"/>
-            </a:avLst>
-          </a:prstGeom>
-          <a:gradFill>
-            <a:gsLst>
-              <a:gs pos="0">
-                <a:schemeClr val="accent1">
-                  <a:lumMod val="5000"/>
-                  <a:lumOff val="95000"/>
-                  <a:alpha val="0"/>
-                </a:schemeClr>
-              </a:gs>
-              <a:gs pos="74000">
-                <a:srgbClr val="2E54A1"/>
-              </a:gs>
-              <a:gs pos="100000">
-                <a:srgbClr val="2E54A1"/>
-              </a:gs>
-            </a:gsLst>
-            <a:lin ang="0" scaled="0"/>
-          </a:gradFill>
-          <a:ln>
-            <a:noFill/>
-          </a:ln>
-        </p:spPr>
-        <p:style>
-          <a:lnRef idx="2">
-            <a:schemeClr val="accent1">
-              <a:lumMod val="75000"/>
-            </a:schemeClr>
-          </a:lnRef>
-          <a:fillRef idx="1">
-            <a:schemeClr val="accent1"/>
-          </a:fillRef>
-          <a:effectRef idx="0">
-            <a:srgbClr val="FFFFFF"/>
-          </a:effectRef>
-          <a:fontRef idx="minor">
-            <a:schemeClr val="lt1"/>
-          </a:fontRef>
-        </p:style>
-        <p:txBody>
-          <a:bodyPr rtlCol="0" anchor="ctr"/>
-          <a:lstStyle/>
-          <a:p>
-            <a:pPr algn="ctr"/>
-            <a:endParaRPr lang="zh-CN" altLang="en-US" sz="1633"/>
-          </a:p>
-        </p:txBody>
-      </p:sp>
-      <p:sp>
-        <p:nvSpPr>
-          <p:cNvPr id="10" name="文本框 9">
-            <a:extLst>
-              <a:ext uri="{FF2B5EF4-FFF2-40B4-BE49-F238E27FC236}">
-                <a16:creationId xmlns:a16="http://schemas.microsoft.com/office/drawing/2014/main" id="{653BDE7C-2C4B-616A-574C-31FFCA5B9434}"/>
-              </a:ext>
-            </a:extLst>
-          </p:cNvPr>
-          <p:cNvSpPr txBox="1"/>
-          <p:nvPr/>
-        </p:nvSpPr>
-        <p:spPr>
-          <a:xfrm>
-            <a:off x="6096666" y="3822450"/>
-            <a:ext cx="543739" cy="307777"/>
-          </a:xfrm>
-          <a:prstGeom prst="rect">
-            <a:avLst/>
-          </a:prstGeom>
-          <a:noFill/>
-        </p:spPr>
-        <p:txBody>
-          <a:bodyPr wrap="none" rtlCol="0">
-            <a:spAutoFit/>
-          </a:bodyPr>
-          <a:lstStyle/>
-          <a:p>
-            <a:r>
-              <a:rPr lang="zh-CN" altLang="en-US" sz="1400" b="1" dirty="0">
-                <a:latin typeface="微软雅黑" panose="020B0503020204020204" pitchFamily="34" charset="-122"/>
-                <a:ea typeface="微软雅黑" panose="020B0503020204020204" pitchFamily="34" charset="-122"/>
-              </a:rPr>
-              <a:t>优化</a:t>
-            </a:r>
-          </a:p>
-        </p:txBody>
-      </p:sp>
     </p:spTree>
     <p:custDataLst>
       <p:tags r:id="rId1"/>
@@ -7812,10 +7704,10 @@
       </p:grpSpPr>
       <p:grpSp>
         <p:nvGrpSpPr>
-          <p:cNvPr id="7" name="组合 6">
+          <p:cNvPr id="104" name="组合 103">
             <a:extLst>
               <a:ext uri="{FF2B5EF4-FFF2-40B4-BE49-F238E27FC236}">
-                <a16:creationId xmlns:a16="http://schemas.microsoft.com/office/drawing/2014/main" id="{A280D10E-728E-1AB9-F375-9FB31597EDFC}"/>
+                <a16:creationId xmlns:a16="http://schemas.microsoft.com/office/drawing/2014/main" id="{048EC704-5F0D-682D-1583-C0272E6849F6}"/>
               </a:ext>
             </a:extLst>
           </p:cNvPr>
@@ -7824,10 +7716,10 @@
         </p:nvGrpSpPr>
         <p:grpSpPr>
           <a:xfrm>
-            <a:off x="2939203" y="2456150"/>
-            <a:ext cx="6313594" cy="3424075"/>
-            <a:chOff x="2939203" y="2456150"/>
-            <a:chExt cx="6313594" cy="3424075"/>
+            <a:off x="4653040" y="87206"/>
+            <a:ext cx="3474079" cy="6313594"/>
+            <a:chOff x="4653040" y="87206"/>
+            <a:chExt cx="3474079" cy="6313594"/>
           </a:xfrm>
         </p:grpSpPr>
         <p:pic>
@@ -7857,8 +7749,8 @@
             </a:stretch>
           </p:blipFill>
           <p:spPr>
-            <a:xfrm>
-              <a:off x="3343338" y="4882826"/>
+            <a:xfrm rot="5400000">
+              <a:off x="3666923" y="1542454"/>
               <a:ext cx="3084634" cy="982408"/>
             </a:xfrm>
             <a:prstGeom prst="rect">
@@ -7879,8 +7771,8 @@
             <p:nvPr/>
           </p:nvSpPr>
           <p:spPr>
-            <a:xfrm rot="16200000">
-              <a:off x="4834012" y="4323698"/>
+            <a:xfrm>
+              <a:off x="5700444" y="1884553"/>
               <a:ext cx="461665" cy="656590"/>
             </a:xfrm>
             <a:prstGeom prst="rect">
@@ -7927,8 +7819,8 @@
             <p:nvPr/>
           </p:nvCxnSpPr>
           <p:spPr>
-            <a:xfrm rot="16200000">
-              <a:off x="5249055" y="3954432"/>
+            <a:xfrm>
+              <a:off x="6117659" y="2371598"/>
               <a:ext cx="485718" cy="536638"/>
             </a:xfrm>
             <a:prstGeom prst="line">
@@ -7957,289 +7849,12 @@
             </a:fontRef>
           </p:style>
         </p:cxnSp>
-        <p:sp>
-          <p:nvSpPr>
-            <p:cNvPr id="2" name="矩形: 圆角 1">
+        <p:grpSp>
+          <p:nvGrpSpPr>
+            <p:cNvPr id="97" name="组合 96">
               <a:extLst>
                 <a:ext uri="{FF2B5EF4-FFF2-40B4-BE49-F238E27FC236}">
-                  <a16:creationId xmlns:a16="http://schemas.microsoft.com/office/drawing/2014/main" id="{C7B471E0-AE9C-DDDB-0ED5-D5D889916636}"/>
-                </a:ext>
-              </a:extLst>
-            </p:cNvPr>
-            <p:cNvSpPr/>
-            <p:nvPr/>
-          </p:nvSpPr>
-          <p:spPr>
-            <a:xfrm rot="16200000">
-              <a:off x="5396633" y="3349061"/>
-              <a:ext cx="727200" cy="303144"/>
-            </a:xfrm>
-            <a:prstGeom prst="roundRect">
-              <a:avLst/>
-            </a:prstGeom>
-            <a:noFill/>
-            <a:ln>
-              <a:solidFill>
-                <a:schemeClr val="tx1"/>
-              </a:solidFill>
-            </a:ln>
-          </p:spPr>
-          <p:style>
-            <a:lnRef idx="2">
-              <a:schemeClr val="accent1">
-                <a:shade val="15000"/>
-              </a:schemeClr>
-            </a:lnRef>
-            <a:fillRef idx="1">
-              <a:schemeClr val="accent1"/>
-            </a:fillRef>
-            <a:effectRef idx="0">
-              <a:schemeClr val="accent1"/>
-            </a:effectRef>
-            <a:fontRef idx="minor">
-              <a:schemeClr val="lt1"/>
-            </a:fontRef>
-          </p:style>
-          <p:txBody>
-            <a:bodyPr vert="vert" rtlCol="0" anchor="ctr">
-              <a:noAutofit/>
-            </a:bodyPr>
-            <a:lstStyle/>
-            <a:p>
-              <a:pPr algn="ctr"/>
-              <a:r>
-                <a:rPr lang="zh-CN" altLang="en-US" sz="1600" b="1" dirty="0">
-                  <a:solidFill>
-                    <a:schemeClr val="tx1"/>
-                  </a:solidFill>
-                  <a:latin typeface="微软雅黑" panose="020B0503020204020204" pitchFamily="34" charset="-122"/>
-                  <a:ea typeface="微软雅黑" panose="020B0503020204020204" pitchFamily="34" charset="-122"/>
-                </a:rPr>
-                <a:t>时段</a:t>
-              </a:r>
-            </a:p>
-          </p:txBody>
-        </p:sp>
-        <p:sp>
-          <p:nvSpPr>
-            <p:cNvPr id="3" name="矩形: 圆角 2">
-              <a:extLst>
-                <a:ext uri="{FF2B5EF4-FFF2-40B4-BE49-F238E27FC236}">
-                  <a16:creationId xmlns:a16="http://schemas.microsoft.com/office/drawing/2014/main" id="{22B78F44-6C82-7798-A409-82AE049C9F65}"/>
-                </a:ext>
-              </a:extLst>
-            </p:cNvPr>
-            <p:cNvSpPr/>
-            <p:nvPr/>
-          </p:nvSpPr>
-          <p:spPr>
-            <a:xfrm rot="16200000">
-              <a:off x="5867818" y="3341384"/>
-              <a:ext cx="727200" cy="303144"/>
-            </a:xfrm>
-            <a:prstGeom prst="roundRect">
-              <a:avLst/>
-            </a:prstGeom>
-            <a:noFill/>
-            <a:ln>
-              <a:solidFill>
-                <a:schemeClr val="tx1"/>
-              </a:solidFill>
-            </a:ln>
-          </p:spPr>
-          <p:style>
-            <a:lnRef idx="2">
-              <a:schemeClr val="accent1">
-                <a:shade val="15000"/>
-              </a:schemeClr>
-            </a:lnRef>
-            <a:fillRef idx="1">
-              <a:schemeClr val="accent1"/>
-            </a:fillRef>
-            <a:effectRef idx="0">
-              <a:schemeClr val="accent1"/>
-            </a:effectRef>
-            <a:fontRef idx="minor">
-              <a:schemeClr val="lt1"/>
-            </a:fontRef>
-          </p:style>
-          <p:txBody>
-            <a:bodyPr vert="vert" rtlCol="0" anchor="ctr">
-              <a:noAutofit/>
-            </a:bodyPr>
-            <a:lstStyle/>
-            <a:p>
-              <a:pPr algn="ctr"/>
-              <a:r>
-                <a:rPr lang="zh-CN" altLang="en-US" sz="1600" b="1" dirty="0">
-                  <a:solidFill>
-                    <a:schemeClr val="tx1"/>
-                  </a:solidFill>
-                  <a:latin typeface="微软雅黑" panose="020B0503020204020204" pitchFamily="34" charset="-122"/>
-                  <a:ea typeface="微软雅黑" panose="020B0503020204020204" pitchFamily="34" charset="-122"/>
-                </a:rPr>
-                <a:t>频段</a:t>
-              </a:r>
-            </a:p>
-          </p:txBody>
-        </p:sp>
-        <p:sp>
-          <p:nvSpPr>
-            <p:cNvPr id="20" name="矩形: 圆角 19">
-              <a:extLst>
-                <a:ext uri="{FF2B5EF4-FFF2-40B4-BE49-F238E27FC236}">
-                  <a16:creationId xmlns:a16="http://schemas.microsoft.com/office/drawing/2014/main" id="{6175A6F5-73C4-7CDF-6476-1AFA38999BCC}"/>
-                </a:ext>
-              </a:extLst>
-            </p:cNvPr>
-            <p:cNvSpPr/>
-            <p:nvPr/>
-          </p:nvSpPr>
-          <p:spPr>
-            <a:xfrm rot="16200000">
-              <a:off x="5264933" y="2767106"/>
-              <a:ext cx="990600" cy="1434973"/>
-            </a:xfrm>
-            <a:prstGeom prst="roundRect">
-              <a:avLst/>
-            </a:prstGeom>
-            <a:noFill/>
-            <a:ln>
-              <a:solidFill>
-                <a:schemeClr val="tx1"/>
-              </a:solidFill>
-              <a:prstDash val="dash"/>
-            </a:ln>
-          </p:spPr>
-          <p:style>
-            <a:lnRef idx="2">
-              <a:schemeClr val="accent1">
-                <a:shade val="15000"/>
-              </a:schemeClr>
-            </a:lnRef>
-            <a:fillRef idx="1">
-              <a:schemeClr val="accent1"/>
-            </a:fillRef>
-            <a:effectRef idx="0">
-              <a:schemeClr val="accent1"/>
-            </a:effectRef>
-            <a:fontRef idx="minor">
-              <a:schemeClr val="lt1"/>
-            </a:fontRef>
-          </p:style>
-          <p:txBody>
-            <a:bodyPr vert="vert" rtlCol="0" anchor="ctr"/>
-            <a:lstStyle/>
-            <a:p>
-              <a:pPr algn="ctr"/>
-              <a:endParaRPr lang="zh-CN" altLang="en-US"/>
-            </a:p>
-          </p:txBody>
-        </p:sp>
-        <p:sp>
-          <p:nvSpPr>
-            <p:cNvPr id="81" name="文本框 80">
-              <a:extLst>
-                <a:ext uri="{FF2B5EF4-FFF2-40B4-BE49-F238E27FC236}">
-                  <a16:creationId xmlns:a16="http://schemas.microsoft.com/office/drawing/2014/main" id="{1A40F82F-AC3E-859B-5DF7-A3D45163F57F}"/>
-                </a:ext>
-              </a:extLst>
-            </p:cNvPr>
-            <p:cNvSpPr txBox="1"/>
-            <p:nvPr/>
-          </p:nvSpPr>
-          <p:spPr>
-            <a:xfrm rot="16200000">
-              <a:off x="4787578" y="3333684"/>
-              <a:ext cx="1169551" cy="297517"/>
-            </a:xfrm>
-            <a:prstGeom prst="rect">
-              <a:avLst/>
-            </a:prstGeom>
-            <a:noFill/>
-          </p:spPr>
-          <p:txBody>
-            <a:bodyPr vert="vert" wrap="none" rtlCol="0">
-              <a:spAutoFit/>
-            </a:bodyPr>
-            <a:lstStyle/>
-            <a:p>
-              <a:r>
-                <a:rPr lang="zh-CN" altLang="en-US" sz="1600" b="1" dirty="0">
-                  <a:solidFill>
-                    <a:srgbClr val="C00000"/>
-                  </a:solidFill>
-                  <a:latin typeface="微软雅黑" panose="020B0503020204020204" pitchFamily="34" charset="-122"/>
-                  <a:ea typeface="微软雅黑" panose="020B0503020204020204" pitchFamily="34" charset="-122"/>
-                </a:rPr>
-                <a:t>区</a:t>
-              </a:r>
-              <a:endParaRPr lang="en-US" altLang="zh-CN" sz="1600" b="1" dirty="0">
-                <a:solidFill>
-                  <a:srgbClr val="C00000"/>
-                </a:solidFill>
-                <a:latin typeface="微软雅黑" panose="020B0503020204020204" pitchFamily="34" charset="-122"/>
-                <a:ea typeface="微软雅黑" panose="020B0503020204020204" pitchFamily="34" charset="-122"/>
-              </a:endParaRPr>
-            </a:p>
-            <a:p>
-              <a:r>
-                <a:rPr lang="zh-CN" altLang="en-US" sz="1600" b="1" dirty="0">
-                  <a:solidFill>
-                    <a:srgbClr val="C00000"/>
-                  </a:solidFill>
-                  <a:latin typeface="微软雅黑" panose="020B0503020204020204" pitchFamily="34" charset="-122"/>
-                  <a:ea typeface="微软雅黑" panose="020B0503020204020204" pitchFamily="34" charset="-122"/>
-                </a:rPr>
-                <a:t>间</a:t>
-              </a:r>
-              <a:endParaRPr lang="en-US" altLang="zh-CN" sz="1600" b="1" dirty="0">
-                <a:solidFill>
-                  <a:srgbClr val="C00000"/>
-                </a:solidFill>
-                <a:latin typeface="微软雅黑" panose="020B0503020204020204" pitchFamily="34" charset="-122"/>
-                <a:ea typeface="微软雅黑" panose="020B0503020204020204" pitchFamily="34" charset="-122"/>
-              </a:endParaRPr>
-            </a:p>
-            <a:p>
-              <a:r>
-                <a:rPr lang="zh-CN" altLang="en-US" sz="1600" b="1" dirty="0">
-                  <a:solidFill>
-                    <a:srgbClr val="C00000"/>
-                  </a:solidFill>
-                  <a:latin typeface="微软雅黑" panose="020B0503020204020204" pitchFamily="34" charset="-122"/>
-                  <a:ea typeface="微软雅黑" panose="020B0503020204020204" pitchFamily="34" charset="-122"/>
-                </a:rPr>
-                <a:t>检</a:t>
-              </a:r>
-              <a:endParaRPr lang="en-US" altLang="zh-CN" sz="1600" b="1" dirty="0">
-                <a:solidFill>
-                  <a:srgbClr val="C00000"/>
-                </a:solidFill>
-                <a:latin typeface="微软雅黑" panose="020B0503020204020204" pitchFamily="34" charset="-122"/>
-                <a:ea typeface="微软雅黑" panose="020B0503020204020204" pitchFamily="34" charset="-122"/>
-              </a:endParaRPr>
-            </a:p>
-            <a:p>
-              <a:r>
-                <a:rPr lang="zh-CN" altLang="en-US" sz="1600" b="1" dirty="0">
-                  <a:solidFill>
-                    <a:srgbClr val="C00000"/>
-                  </a:solidFill>
-                  <a:latin typeface="微软雅黑" panose="020B0503020204020204" pitchFamily="34" charset="-122"/>
-                  <a:ea typeface="微软雅黑" panose="020B0503020204020204" pitchFamily="34" charset="-122"/>
-                </a:rPr>
-                <a:t>索</a:t>
-              </a:r>
-            </a:p>
-          </p:txBody>
-        </p:sp>
-        <p:grpSp>
-          <p:nvGrpSpPr>
-            <p:cNvPr id="83" name="组合 82">
-              <a:extLst>
-                <a:ext uri="{FF2B5EF4-FFF2-40B4-BE49-F238E27FC236}">
-                  <a16:creationId xmlns:a16="http://schemas.microsoft.com/office/drawing/2014/main" id="{CD3C30E3-7EF8-AF49-F54C-79A7302DC369}"/>
+                  <a16:creationId xmlns:a16="http://schemas.microsoft.com/office/drawing/2014/main" id="{214914F0-783C-9257-93F1-EB214EEA2BDD}"/>
                 </a:ext>
               </a:extLst>
             </p:cNvPr>
@@ -8247,19 +7862,19 @@
             <p:nvPr/>
           </p:nvGrpSpPr>
           <p:grpSpPr>
-            <a:xfrm rot="16200000">
-              <a:off x="7398408" y="2681833"/>
-              <a:ext cx="727201" cy="1563171"/>
-              <a:chOff x="6727527" y="3575975"/>
-              <a:chExt cx="727201" cy="1563171"/>
+            <a:xfrm>
+              <a:off x="6595976" y="2190749"/>
+              <a:ext cx="1005403" cy="1434973"/>
+              <a:chOff x="6595976" y="1530349"/>
+              <a:chExt cx="1005403" cy="1434973"/>
             </a:xfrm>
           </p:grpSpPr>
           <p:sp>
             <p:nvSpPr>
-              <p:cNvPr id="17" name="矩形: 圆角 16">
+              <p:cNvPr id="2" name="矩形: 圆角 1">
                 <a:extLst>
                   <a:ext uri="{FF2B5EF4-FFF2-40B4-BE49-F238E27FC236}">
-                    <a16:creationId xmlns:a16="http://schemas.microsoft.com/office/drawing/2014/main" id="{1FDA02A9-0A80-CE05-B406-BEA92A0E52B4}"/>
+                    <a16:creationId xmlns:a16="http://schemas.microsoft.com/office/drawing/2014/main" id="{C7B471E0-AE9C-DDDB-0ED5-D5D889916636}"/>
                   </a:ext>
                 </a:extLst>
               </p:cNvPr>
@@ -8268,7 +7883,7 @@
             </p:nvSpPr>
             <p:spPr>
               <a:xfrm>
-                <a:off x="6727528" y="3575975"/>
+                <a:off x="6726714" y="2074390"/>
                 <a:ext cx="727200" cy="303144"/>
               </a:xfrm>
               <a:prstGeom prst="roundRect">
@@ -8298,7 +7913,7 @@
               </a:fontRef>
             </p:style>
             <p:txBody>
-              <a:bodyPr vert="vert" rtlCol="0" anchor="ctr">
+              <a:bodyPr rtlCol="0" anchor="ctr">
                 <a:noAutofit/>
               </a:bodyPr>
               <a:lstStyle/>
@@ -8312,17 +7927,17 @@
                     <a:latin typeface="微软雅黑" panose="020B0503020204020204" pitchFamily="34" charset="-122"/>
                     <a:ea typeface="微软雅黑" panose="020B0503020204020204" pitchFamily="34" charset="-122"/>
                   </a:rPr>
-                  <a:t>节点</a:t>
+                  <a:t>时段</a:t>
                 </a:r>
               </a:p>
             </p:txBody>
           </p:sp>
           <p:sp>
             <p:nvSpPr>
-              <p:cNvPr id="18" name="矩形: 圆角 17">
+              <p:cNvPr id="3" name="矩形: 圆角 2">
                 <a:extLst>
                   <a:ext uri="{FF2B5EF4-FFF2-40B4-BE49-F238E27FC236}">
-                    <a16:creationId xmlns:a16="http://schemas.microsoft.com/office/drawing/2014/main" id="{F96BA078-7D90-8230-157C-F1916825576D}"/>
+                    <a16:creationId xmlns:a16="http://schemas.microsoft.com/office/drawing/2014/main" id="{22B78F44-6C82-7798-A409-82AE049C9F65}"/>
                   </a:ext>
                 </a:extLst>
               </p:cNvPr>
@@ -8331,8 +7946,8 @@
             </p:nvSpPr>
             <p:spPr>
               <a:xfrm>
-                <a:off x="6727527" y="3947975"/>
-                <a:ext cx="726386" cy="558002"/>
+                <a:off x="6726713" y="2567449"/>
+                <a:ext cx="727200" cy="303144"/>
               </a:xfrm>
               <a:prstGeom prst="roundRect">
                 <a:avLst/>
@@ -8361,7 +7976,7 @@
               </a:fontRef>
             </p:style>
             <p:txBody>
-              <a:bodyPr vert="vert" rtlCol="0" anchor="ctr">
+              <a:bodyPr rtlCol="0" anchor="ctr">
                 <a:noAutofit/>
               </a:bodyPr>
               <a:lstStyle/>
@@ -8375,17 +7990,17 @@
                     <a:latin typeface="微软雅黑" panose="020B0503020204020204" pitchFamily="34" charset="-122"/>
                     <a:ea typeface="微软雅黑" panose="020B0503020204020204" pitchFamily="34" charset="-122"/>
                   </a:rPr>
-                  <a:t>调制样式</a:t>
+                  <a:t>频段</a:t>
                 </a:r>
               </a:p>
             </p:txBody>
           </p:sp>
           <p:sp>
             <p:nvSpPr>
-              <p:cNvPr id="19" name="矩形: 圆角 18">
+              <p:cNvPr id="20" name="矩形: 圆角 19">
                 <a:extLst>
                   <a:ext uri="{FF2B5EF4-FFF2-40B4-BE49-F238E27FC236}">
-                    <a16:creationId xmlns:a16="http://schemas.microsoft.com/office/drawing/2014/main" id="{C08C3313-2FA4-9D0D-0C3F-DFD313FE8CA6}"/>
+                    <a16:creationId xmlns:a16="http://schemas.microsoft.com/office/drawing/2014/main" id="{6175A6F5-73C4-7CDF-6476-1AFA38999BCC}"/>
                   </a:ext>
                 </a:extLst>
               </p:cNvPr>
@@ -8394,8 +8009,8 @@
             </p:nvSpPr>
             <p:spPr>
               <a:xfrm>
-                <a:off x="6727528" y="4581146"/>
-                <a:ext cx="727200" cy="558000"/>
+                <a:off x="6603377" y="1530349"/>
+                <a:ext cx="990600" cy="1434973"/>
               </a:xfrm>
               <a:prstGeom prst="roundRect">
                 <a:avLst/>
@@ -8405,6 +8020,7 @@
                 <a:solidFill>
                   <a:schemeClr val="tx1"/>
                 </a:solidFill>
+                <a:prstDash val="dash"/>
               </a:ln>
             </p:spPr>
             <p:style>
@@ -8424,180 +8040,384 @@
               </a:fontRef>
             </p:style>
             <p:txBody>
-              <a:bodyPr vert="vert" rtlCol="0" anchor="ctr">
-                <a:noAutofit/>
+              <a:bodyPr rtlCol="0" anchor="ctr"/>
+              <a:lstStyle/>
+              <a:p>
+                <a:pPr algn="ctr"/>
+                <a:endParaRPr lang="zh-CN" altLang="en-US"/>
+              </a:p>
+            </p:txBody>
+          </p:sp>
+          <p:sp>
+            <p:nvSpPr>
+              <p:cNvPr id="81" name="文本框 80">
+                <a:extLst>
+                  <a:ext uri="{FF2B5EF4-FFF2-40B4-BE49-F238E27FC236}">
+                    <a16:creationId xmlns:a16="http://schemas.microsoft.com/office/drawing/2014/main" id="{1A40F82F-AC3E-859B-5DF7-A3D45163F57F}"/>
+                  </a:ext>
+                </a:extLst>
+              </p:cNvPr>
+              <p:cNvSpPr txBox="1"/>
+              <p:nvPr/>
+            </p:nvSpPr>
+            <p:spPr>
+              <a:xfrm>
+                <a:off x="6595976" y="1630472"/>
+                <a:ext cx="1005403" cy="338554"/>
+              </a:xfrm>
+              <a:prstGeom prst="rect">
+                <a:avLst/>
+              </a:prstGeom>
+              <a:noFill/>
+            </p:spPr>
+            <p:txBody>
+              <a:bodyPr wrap="none" rtlCol="0">
+                <a:spAutoFit/>
               </a:bodyPr>
               <a:lstStyle/>
               <a:p>
-                <a:pPr algn="ctr"/>
                 <a:r>
                   <a:rPr lang="zh-CN" altLang="en-US" sz="1600" b="1" dirty="0">
                     <a:solidFill>
-                      <a:schemeClr val="tx1"/>
+                      <a:srgbClr val="C00000"/>
                     </a:solidFill>
                     <a:latin typeface="微软雅黑" panose="020B0503020204020204" pitchFamily="34" charset="-122"/>
                     <a:ea typeface="微软雅黑" panose="020B0503020204020204" pitchFamily="34" charset="-122"/>
                   </a:rPr>
-                  <a:t>事件类型</a:t>
+                  <a:t>区间检索</a:t>
                 </a:r>
               </a:p>
             </p:txBody>
           </p:sp>
         </p:grpSp>
-        <p:sp>
-          <p:nvSpPr>
-            <p:cNvPr id="21" name="矩形: 圆角 20">
+        <p:grpSp>
+          <p:nvGrpSpPr>
+            <p:cNvPr id="86" name="组合 85">
               <a:extLst>
                 <a:ext uri="{FF2B5EF4-FFF2-40B4-BE49-F238E27FC236}">
-                  <a16:creationId xmlns:a16="http://schemas.microsoft.com/office/drawing/2014/main" id="{61DD1126-93BF-F06C-630D-A72A94C491E3}"/>
+                  <a16:creationId xmlns:a16="http://schemas.microsoft.com/office/drawing/2014/main" id="{EB93A210-0CB6-C4A2-21D9-6C813F3382EB}"/>
                 </a:ext>
               </a:extLst>
             </p:cNvPr>
-            <p:cNvSpPr/>
+            <p:cNvGrpSpPr/>
             <p:nvPr/>
-          </p:nvSpPr>
-          <p:spPr>
-            <a:xfrm rot="16200000">
-              <a:off x="7467884" y="2377004"/>
-              <a:ext cx="990600" cy="2172827"/>
+          </p:nvGrpSpPr>
+          <p:grpSpPr>
+            <a:xfrm>
+              <a:off x="6617150" y="4024773"/>
+              <a:ext cx="1005403" cy="2172827"/>
+              <a:chOff x="6617150" y="3707273"/>
+              <a:chExt cx="1005403" cy="2172827"/>
             </a:xfrm>
-            <a:prstGeom prst="roundRect">
-              <a:avLst/>
-            </a:prstGeom>
-            <a:noFill/>
-            <a:ln>
-              <a:solidFill>
-                <a:schemeClr val="tx1"/>
-              </a:solidFill>
-              <a:prstDash val="dash"/>
-            </a:ln>
-          </p:spPr>
-          <p:style>
-            <a:lnRef idx="2">
-              <a:schemeClr val="accent1">
-                <a:shade val="15000"/>
-              </a:schemeClr>
-            </a:lnRef>
-            <a:fillRef idx="1">
-              <a:schemeClr val="accent1"/>
-            </a:fillRef>
-            <a:effectRef idx="0">
-              <a:schemeClr val="accent1"/>
-            </a:effectRef>
-            <a:fontRef idx="minor">
-              <a:schemeClr val="lt1"/>
-            </a:fontRef>
-          </p:style>
-          <p:txBody>
-            <a:bodyPr vert="vert" rtlCol="0" anchor="ctr"/>
-            <a:lstStyle/>
-            <a:p>
-              <a:pPr algn="ctr"/>
-              <a:endParaRPr lang="zh-CN" altLang="en-US"/>
-            </a:p>
-          </p:txBody>
-        </p:sp>
-        <p:sp>
-          <p:nvSpPr>
-            <p:cNvPr id="82" name="文本框 81">
-              <a:extLst>
-                <a:ext uri="{FF2B5EF4-FFF2-40B4-BE49-F238E27FC236}">
-                  <a16:creationId xmlns:a16="http://schemas.microsoft.com/office/drawing/2014/main" id="{7407A65C-3461-BC12-75B1-5F67267BADC5}"/>
-                </a:ext>
-              </a:extLst>
-            </p:cNvPr>
-            <p:cNvSpPr txBox="1"/>
-            <p:nvPr/>
-          </p:nvSpPr>
-          <p:spPr>
-            <a:xfrm rot="16200000">
-              <a:off x="8213992" y="3314658"/>
-              <a:ext cx="1169551" cy="297517"/>
-            </a:xfrm>
-            <a:prstGeom prst="rect">
-              <a:avLst/>
-            </a:prstGeom>
-            <a:noFill/>
-          </p:spPr>
-          <p:txBody>
-            <a:bodyPr vert="vert" wrap="none" rtlCol="0">
-              <a:spAutoFit/>
-            </a:bodyPr>
-            <a:lstStyle/>
-            <a:p>
-              <a:r>
-                <a:rPr lang="zh-CN" altLang="en-US" sz="1600" b="1" dirty="0">
+          </p:grpSpPr>
+          <p:grpSp>
+            <p:nvGrpSpPr>
+              <p:cNvPr id="83" name="组合 82">
+                <a:extLst>
+                  <a:ext uri="{FF2B5EF4-FFF2-40B4-BE49-F238E27FC236}">
+                    <a16:creationId xmlns:a16="http://schemas.microsoft.com/office/drawing/2014/main" id="{CD3C30E3-7EF8-AF49-F54C-79A7302DC369}"/>
+                  </a:ext>
+                </a:extLst>
+              </p:cNvPr>
+              <p:cNvGrpSpPr/>
+              <p:nvPr/>
+            </p:nvGrpSpPr>
+            <p:grpSpPr>
+              <a:xfrm>
+                <a:off x="6756251" y="3810925"/>
+                <a:ext cx="727200" cy="1563171"/>
+                <a:chOff x="6727528" y="3575975"/>
+                <a:chExt cx="727200" cy="1563171"/>
+              </a:xfrm>
+            </p:grpSpPr>
+            <p:sp>
+              <p:nvSpPr>
+                <p:cNvPr id="17" name="矩形: 圆角 16">
+                  <a:extLst>
+                    <a:ext uri="{FF2B5EF4-FFF2-40B4-BE49-F238E27FC236}">
+                      <a16:creationId xmlns:a16="http://schemas.microsoft.com/office/drawing/2014/main" id="{1FDA02A9-0A80-CE05-B406-BEA92A0E52B4}"/>
+                    </a:ext>
+                  </a:extLst>
+                </p:cNvPr>
+                <p:cNvSpPr/>
+                <p:nvPr/>
+              </p:nvSpPr>
+              <p:spPr>
+                <a:xfrm>
+                  <a:off x="6727528" y="3575975"/>
+                  <a:ext cx="727200" cy="303144"/>
+                </a:xfrm>
+                <a:prstGeom prst="roundRect">
+                  <a:avLst/>
+                </a:prstGeom>
+                <a:noFill/>
+                <a:ln>
                   <a:solidFill>
-                    <a:srgbClr val="C00000"/>
+                    <a:schemeClr val="tx1"/>
                   </a:solidFill>
-                  <a:latin typeface="微软雅黑" panose="020B0503020204020204" pitchFamily="34" charset="-122"/>
-                  <a:ea typeface="微软雅黑" panose="020B0503020204020204" pitchFamily="34" charset="-122"/>
-                </a:rPr>
-                <a:t>等</a:t>
-              </a:r>
-              <a:endParaRPr lang="en-US" altLang="zh-CN" sz="1600" b="1" dirty="0">
+                </a:ln>
+              </p:spPr>
+              <p:style>
+                <a:lnRef idx="2">
+                  <a:schemeClr val="accent1">
+                    <a:shade val="15000"/>
+                  </a:schemeClr>
+                </a:lnRef>
+                <a:fillRef idx="1">
+                  <a:schemeClr val="accent1"/>
+                </a:fillRef>
+                <a:effectRef idx="0">
+                  <a:schemeClr val="accent1"/>
+                </a:effectRef>
+                <a:fontRef idx="minor">
+                  <a:schemeClr val="lt1"/>
+                </a:fontRef>
+              </p:style>
+              <p:txBody>
+                <a:bodyPr rtlCol="0" anchor="ctr">
+                  <a:noAutofit/>
+                </a:bodyPr>
+                <a:lstStyle/>
+                <a:p>
+                  <a:pPr algn="ctr"/>
+                  <a:r>
+                    <a:rPr lang="zh-CN" altLang="en-US" sz="1600" b="1" dirty="0">
+                      <a:solidFill>
+                        <a:schemeClr val="tx1"/>
+                      </a:solidFill>
+                      <a:latin typeface="微软雅黑" panose="020B0503020204020204" pitchFamily="34" charset="-122"/>
+                      <a:ea typeface="微软雅黑" panose="020B0503020204020204" pitchFamily="34" charset="-122"/>
+                    </a:rPr>
+                    <a:t>节点</a:t>
+                  </a:r>
+                </a:p>
+              </p:txBody>
+            </p:sp>
+            <p:sp>
+              <p:nvSpPr>
+                <p:cNvPr id="18" name="矩形: 圆角 17">
+                  <a:extLst>
+                    <a:ext uri="{FF2B5EF4-FFF2-40B4-BE49-F238E27FC236}">
+                      <a16:creationId xmlns:a16="http://schemas.microsoft.com/office/drawing/2014/main" id="{F96BA078-7D90-8230-157C-F1916825576D}"/>
+                    </a:ext>
+                  </a:extLst>
+                </p:cNvPr>
+                <p:cNvSpPr/>
+                <p:nvPr/>
+              </p:nvSpPr>
+              <p:spPr>
+                <a:xfrm>
+                  <a:off x="6727528" y="3947974"/>
+                  <a:ext cx="726386" cy="538255"/>
+                </a:xfrm>
+                <a:prstGeom prst="roundRect">
+                  <a:avLst/>
+                </a:prstGeom>
+                <a:noFill/>
+                <a:ln>
+                  <a:solidFill>
+                    <a:schemeClr val="tx1"/>
+                  </a:solidFill>
+                </a:ln>
+              </p:spPr>
+              <p:style>
+                <a:lnRef idx="2">
+                  <a:schemeClr val="accent1">
+                    <a:shade val="15000"/>
+                  </a:schemeClr>
+                </a:lnRef>
+                <a:fillRef idx="1">
+                  <a:schemeClr val="accent1"/>
+                </a:fillRef>
+                <a:effectRef idx="0">
+                  <a:schemeClr val="accent1"/>
+                </a:effectRef>
+                <a:fontRef idx="minor">
+                  <a:schemeClr val="lt1"/>
+                </a:fontRef>
+              </p:style>
+              <p:txBody>
+                <a:bodyPr vert="horz" rtlCol="0" anchor="ctr">
+                  <a:noAutofit/>
+                </a:bodyPr>
+                <a:lstStyle/>
+                <a:p>
+                  <a:pPr algn="ctr"/>
+                  <a:r>
+                    <a:rPr lang="zh-CN" altLang="en-US" sz="1600" b="1" dirty="0">
+                      <a:solidFill>
+                        <a:schemeClr val="tx1"/>
+                      </a:solidFill>
+                      <a:latin typeface="微软雅黑" panose="020B0503020204020204" pitchFamily="34" charset="-122"/>
+                      <a:ea typeface="微软雅黑" panose="020B0503020204020204" pitchFamily="34" charset="-122"/>
+                    </a:rPr>
+                    <a:t>调制样式</a:t>
+                  </a:r>
+                </a:p>
+              </p:txBody>
+            </p:sp>
+            <p:sp>
+              <p:nvSpPr>
+                <p:cNvPr id="19" name="矩形: 圆角 18">
+                  <a:extLst>
+                    <a:ext uri="{FF2B5EF4-FFF2-40B4-BE49-F238E27FC236}">
+                      <a16:creationId xmlns:a16="http://schemas.microsoft.com/office/drawing/2014/main" id="{C08C3313-2FA4-9D0D-0C3F-DFD313FE8CA6}"/>
+                    </a:ext>
+                  </a:extLst>
+                </p:cNvPr>
+                <p:cNvSpPr/>
+                <p:nvPr/>
+              </p:nvSpPr>
+              <p:spPr>
+                <a:xfrm>
+                  <a:off x="6727528" y="4581146"/>
+                  <a:ext cx="727200" cy="558000"/>
+                </a:xfrm>
+                <a:prstGeom prst="roundRect">
+                  <a:avLst/>
+                </a:prstGeom>
+                <a:noFill/>
+                <a:ln>
+                  <a:solidFill>
+                    <a:schemeClr val="tx1"/>
+                  </a:solidFill>
+                </a:ln>
+              </p:spPr>
+              <p:style>
+                <a:lnRef idx="2">
+                  <a:schemeClr val="accent1">
+                    <a:shade val="15000"/>
+                  </a:schemeClr>
+                </a:lnRef>
+                <a:fillRef idx="1">
+                  <a:schemeClr val="accent1"/>
+                </a:fillRef>
+                <a:effectRef idx="0">
+                  <a:schemeClr val="accent1"/>
+                </a:effectRef>
+                <a:fontRef idx="minor">
+                  <a:schemeClr val="lt1"/>
+                </a:fontRef>
+              </p:style>
+              <p:txBody>
+                <a:bodyPr rtlCol="0" anchor="ctr">
+                  <a:noAutofit/>
+                </a:bodyPr>
+                <a:lstStyle/>
+                <a:p>
+                  <a:pPr algn="ctr"/>
+                  <a:r>
+                    <a:rPr lang="zh-CN" altLang="en-US" sz="1600" b="1" dirty="0">
+                      <a:solidFill>
+                        <a:schemeClr val="tx1"/>
+                      </a:solidFill>
+                      <a:latin typeface="微软雅黑" panose="020B0503020204020204" pitchFamily="34" charset="-122"/>
+                      <a:ea typeface="微软雅黑" panose="020B0503020204020204" pitchFamily="34" charset="-122"/>
+                    </a:rPr>
+                    <a:t>事件类型</a:t>
+                  </a:r>
+                </a:p>
+              </p:txBody>
+            </p:sp>
+          </p:grpSp>
+          <p:sp>
+            <p:nvSpPr>
+              <p:cNvPr id="21" name="矩形: 圆角 20">
+                <a:extLst>
+                  <a:ext uri="{FF2B5EF4-FFF2-40B4-BE49-F238E27FC236}">
+                    <a16:creationId xmlns:a16="http://schemas.microsoft.com/office/drawing/2014/main" id="{61DD1126-93BF-F06C-630D-A72A94C491E3}"/>
+                  </a:ext>
+                </a:extLst>
+              </p:cNvPr>
+              <p:cNvSpPr/>
+              <p:nvPr/>
+            </p:nvSpPr>
+            <p:spPr>
+              <a:xfrm>
+                <a:off x="6624551" y="3707273"/>
+                <a:ext cx="990600" cy="2172827"/>
+              </a:xfrm>
+              <a:prstGeom prst="roundRect">
+                <a:avLst/>
+              </a:prstGeom>
+              <a:noFill/>
+              <a:ln>
                 <a:solidFill>
-                  <a:srgbClr val="C00000"/>
+                  <a:schemeClr val="tx1"/>
                 </a:solidFill>
-                <a:latin typeface="微软雅黑" panose="020B0503020204020204" pitchFamily="34" charset="-122"/>
-                <a:ea typeface="微软雅黑" panose="020B0503020204020204" pitchFamily="34" charset="-122"/>
-              </a:endParaRPr>
-            </a:p>
-            <a:p>
-              <a:r>
-                <a:rPr lang="zh-CN" altLang="en-US" sz="1600" b="1" dirty="0">
-                  <a:solidFill>
-                    <a:srgbClr val="C00000"/>
-                  </a:solidFill>
-                  <a:latin typeface="微软雅黑" panose="020B0503020204020204" pitchFamily="34" charset="-122"/>
-                  <a:ea typeface="微软雅黑" panose="020B0503020204020204" pitchFamily="34" charset="-122"/>
-                </a:rPr>
-                <a:t>值</a:t>
-              </a:r>
-              <a:endParaRPr lang="en-US" altLang="zh-CN" sz="1600" b="1" dirty="0">
-                <a:solidFill>
-                  <a:srgbClr val="C00000"/>
-                </a:solidFill>
-                <a:latin typeface="微软雅黑" panose="020B0503020204020204" pitchFamily="34" charset="-122"/>
-                <a:ea typeface="微软雅黑" panose="020B0503020204020204" pitchFamily="34" charset="-122"/>
-              </a:endParaRPr>
-            </a:p>
-            <a:p>
-              <a:r>
-                <a:rPr lang="zh-CN" altLang="en-US" sz="1600" b="1" dirty="0">
-                  <a:solidFill>
-                    <a:srgbClr val="C00000"/>
-                  </a:solidFill>
-                  <a:latin typeface="微软雅黑" panose="020B0503020204020204" pitchFamily="34" charset="-122"/>
-                  <a:ea typeface="微软雅黑" panose="020B0503020204020204" pitchFamily="34" charset="-122"/>
-                </a:rPr>
-                <a:t>匹</a:t>
-              </a:r>
-              <a:endParaRPr lang="en-US" altLang="zh-CN" sz="1600" b="1" dirty="0">
-                <a:solidFill>
-                  <a:srgbClr val="C00000"/>
-                </a:solidFill>
-                <a:latin typeface="微软雅黑" panose="020B0503020204020204" pitchFamily="34" charset="-122"/>
-                <a:ea typeface="微软雅黑" panose="020B0503020204020204" pitchFamily="34" charset="-122"/>
-              </a:endParaRPr>
-            </a:p>
-            <a:p>
-              <a:r>
-                <a:rPr lang="zh-CN" altLang="en-US" sz="1600" b="1" dirty="0">
-                  <a:solidFill>
-                    <a:srgbClr val="C00000"/>
-                  </a:solidFill>
-                  <a:latin typeface="微软雅黑" panose="020B0503020204020204" pitchFamily="34" charset="-122"/>
-                  <a:ea typeface="微软雅黑" panose="020B0503020204020204" pitchFamily="34" charset="-122"/>
-                </a:rPr>
-                <a:t>配</a:t>
-              </a:r>
-            </a:p>
-          </p:txBody>
-        </p:sp>
+                <a:prstDash val="dash"/>
+              </a:ln>
+            </p:spPr>
+            <p:style>
+              <a:lnRef idx="2">
+                <a:schemeClr val="accent1">
+                  <a:shade val="15000"/>
+                </a:schemeClr>
+              </a:lnRef>
+              <a:fillRef idx="1">
+                <a:schemeClr val="accent1"/>
+              </a:fillRef>
+              <a:effectRef idx="0">
+                <a:schemeClr val="accent1"/>
+              </a:effectRef>
+              <a:fontRef idx="minor">
+                <a:schemeClr val="lt1"/>
+              </a:fontRef>
+            </p:style>
+            <p:txBody>
+              <a:bodyPr rtlCol="0" anchor="ctr"/>
+              <a:lstStyle/>
+              <a:p>
+                <a:pPr algn="ctr"/>
+                <a:endParaRPr lang="zh-CN" altLang="en-US"/>
+              </a:p>
+            </p:txBody>
+          </p:sp>
+          <p:sp>
+            <p:nvSpPr>
+              <p:cNvPr id="82" name="文本框 81">
+                <a:extLst>
+                  <a:ext uri="{FF2B5EF4-FFF2-40B4-BE49-F238E27FC236}">
+                    <a16:creationId xmlns:a16="http://schemas.microsoft.com/office/drawing/2014/main" id="{7407A65C-3461-BC12-75B1-5F67267BADC5}"/>
+                  </a:ext>
+                </a:extLst>
+              </p:cNvPr>
+              <p:cNvSpPr txBox="1"/>
+              <p:nvPr/>
+            </p:nvSpPr>
+            <p:spPr>
+              <a:xfrm>
+                <a:off x="6617150" y="5459992"/>
+                <a:ext cx="1005403" cy="338554"/>
+              </a:xfrm>
+              <a:prstGeom prst="rect">
+                <a:avLst/>
+              </a:prstGeom>
+              <a:noFill/>
+            </p:spPr>
+            <p:txBody>
+              <a:bodyPr wrap="none" rtlCol="0">
+                <a:spAutoFit/>
+              </a:bodyPr>
+              <a:lstStyle/>
+              <a:p>
+                <a:r>
+                  <a:rPr lang="zh-CN" altLang="en-US" sz="1600" b="1" dirty="0">
+                    <a:solidFill>
+                      <a:srgbClr val="C00000"/>
+                    </a:solidFill>
+                    <a:latin typeface="微软雅黑" panose="020B0503020204020204" pitchFamily="34" charset="-122"/>
+                    <a:ea typeface="微软雅黑" panose="020B0503020204020204" pitchFamily="34" charset="-122"/>
+                  </a:rPr>
+                  <a:t>等值匹配</a:t>
+                </a:r>
+              </a:p>
+            </p:txBody>
+          </p:sp>
+        </p:grpSp>
         <p:pic>
           <p:nvPicPr>
-            <p:cNvPr id="85" name="图片 84">
+            <p:cNvPr id="85" name="图片 84" descr="日历&#10;&#10;描述已自动生成">
               <a:extLst>
                 <a:ext uri="{FF2B5EF4-FFF2-40B4-BE49-F238E27FC236}">
                   <a16:creationId xmlns:a16="http://schemas.microsoft.com/office/drawing/2014/main" id="{7F6D6E06-018A-398D-3AAA-EF91CA68F27D}"/>
@@ -8617,13 +8437,14 @@
                 </a:ext>
               </a:extLst>
             </a:blip>
-            <a:srcRect/>
-            <a:stretch/>
+            <a:stretch>
+              <a:fillRect/>
+            </a:stretch>
           </p:blipFill>
           <p:spPr>
-            <a:xfrm rot="16200000">
-              <a:off x="7397260" y="4046658"/>
-              <a:ext cx="864277" cy="2802857"/>
+            <a:xfrm>
+              <a:off x="4653040" y="3575974"/>
+              <a:ext cx="964286" cy="2802857"/>
             </a:xfrm>
             <a:prstGeom prst="rect">
               <a:avLst/>
@@ -8643,8 +8464,8 @@
             <p:nvPr/>
           </p:nvSpPr>
           <p:spPr>
-            <a:xfrm rot="16200000">
-              <a:off x="7745050" y="4214737"/>
+            <a:xfrm>
+              <a:off x="5745285" y="4731471"/>
               <a:ext cx="461665" cy="784830"/>
             </a:xfrm>
             <a:prstGeom prst="rect">
@@ -8685,8 +8506,8 @@
             <p:nvPr/>
           </p:nvCxnSpPr>
           <p:spPr>
-            <a:xfrm rot="16200000" flipV="1">
-              <a:off x="7760733" y="4161169"/>
+            <a:xfrm flipV="1">
+              <a:off x="6206950" y="5111187"/>
               <a:ext cx="417601" cy="12699"/>
             </a:xfrm>
             <a:prstGeom prst="line">
@@ -8728,8 +8549,8 @@
             <p:nvPr/>
           </p:nvSpPr>
           <p:spPr>
-            <a:xfrm rot="16200000">
-              <a:off x="3427848" y="2910640"/>
+            <a:xfrm>
+              <a:off x="6726713" y="357134"/>
               <a:ext cx="727200" cy="1164634"/>
             </a:xfrm>
             <a:prstGeom prst="roundRect">
@@ -8759,7 +8580,7 @@
             </a:fontRef>
           </p:style>
           <p:txBody>
-            <a:bodyPr vert="eaVert" rtlCol="0" anchor="ctr">
+            <a:bodyPr rtlCol="0" anchor="ctr">
               <a:noAutofit/>
             </a:bodyPr>
             <a:lstStyle/>
@@ -8791,8 +8612,8 @@
             <p:nvPr/>
           </p:nvSpPr>
           <p:spPr>
-            <a:xfrm rot="16200000">
-              <a:off x="6264947" y="1043894"/>
+            <a:xfrm>
+              <a:off x="6551526" y="1974850"/>
               <a:ext cx="1549749" cy="4425950"/>
             </a:xfrm>
             <a:prstGeom prst="roundRect">
@@ -8841,8 +8662,8 @@
             <p:nvPr/>
           </p:nvSpPr>
           <p:spPr>
-            <a:xfrm rot="16200000">
-              <a:off x="6707860" y="1784172"/>
+            <a:xfrm>
+              <a:off x="7609028" y="3158237"/>
               <a:ext cx="492443" cy="1887696"/>
             </a:xfrm>
             <a:prstGeom prst="rect">
@@ -8882,8 +8703,8 @@
             <p:nvPr/>
           </p:nvSpPr>
           <p:spPr>
-            <a:xfrm rot="16200000">
-              <a:off x="2986590" y="2434608"/>
+            <a:xfrm>
+              <a:off x="6491558" y="87206"/>
               <a:ext cx="1609717" cy="1704491"/>
             </a:xfrm>
             <a:prstGeom prst="roundRect">
@@ -8932,8 +8753,8 @@
             <p:nvPr/>
           </p:nvSpPr>
           <p:spPr>
-            <a:xfrm rot="16200000">
-              <a:off x="3545226" y="1912412"/>
+            <a:xfrm>
+              <a:off x="7609028" y="123843"/>
               <a:ext cx="492443" cy="1631216"/>
             </a:xfrm>
             <a:prstGeom prst="rect">
@@ -8973,8 +8794,8 @@
             <p:nvPr/>
           </p:nvSpPr>
           <p:spPr>
-            <a:xfrm rot="16200000">
-              <a:off x="4988792" y="2466410"/>
+            <a:xfrm>
+              <a:off x="7583380" y="2147055"/>
               <a:ext cx="543739" cy="523220"/>
             </a:xfrm>
             <a:prstGeom prst="rect">
@@ -12172,10 +11993,10 @@
       </p:grpSpPr>
       <p:grpSp>
         <p:nvGrpSpPr>
-          <p:cNvPr id="2" name="组合 1">
+          <p:cNvPr id="37" name="组合 36">
             <a:extLst>
               <a:ext uri="{FF2B5EF4-FFF2-40B4-BE49-F238E27FC236}">
-                <a16:creationId xmlns:a16="http://schemas.microsoft.com/office/drawing/2014/main" id="{8B9D9D9C-4F2F-893E-27BC-FA264B221DC7}"/>
+                <a16:creationId xmlns:a16="http://schemas.microsoft.com/office/drawing/2014/main" id="{0C0F5022-8B71-833E-1D21-46751AD61244}"/>
               </a:ext>
             </a:extLst>
           </p:cNvPr>
@@ -12184,10 +12005,10 @@
         </p:nvGrpSpPr>
         <p:grpSpPr>
           <a:xfrm>
-            <a:off x="6661150" y="1045656"/>
-            <a:ext cx="1566099" cy="5035104"/>
-            <a:chOff x="6661150" y="1045656"/>
-            <a:chExt cx="1566099" cy="5035104"/>
+            <a:off x="6623050" y="1284208"/>
+            <a:ext cx="1604199" cy="4796552"/>
+            <a:chOff x="6623050" y="1284208"/>
+            <a:chExt cx="1604199" cy="4796552"/>
           </a:xfrm>
         </p:grpSpPr>
         <p:sp>
@@ -12234,7 +12055,7 @@
             </a:fontRef>
           </p:style>
           <p:txBody>
-            <a:bodyPr vert="vert" wrap="square" rtlCol="0" anchor="ctr"/>
+            <a:bodyPr wrap="square" rtlCol="0" anchor="ctr"/>
             <a:lstStyle/>
             <a:p>
               <a:pPr algn="ctr"/>
@@ -12295,7 +12116,7 @@
             </a:fontRef>
           </p:style>
           <p:txBody>
-            <a:bodyPr vert="vert" wrap="square" rtlCol="0" anchor="ctr"/>
+            <a:bodyPr wrap="square" rtlCol="0" anchor="ctr"/>
             <a:lstStyle/>
             <a:p>
               <a:pPr algn="ctr"/>
@@ -12356,7 +12177,7 @@
             </a:fontRef>
           </p:style>
           <p:txBody>
-            <a:bodyPr vert="vert" wrap="square" rtlCol="0" anchor="ctr"/>
+            <a:bodyPr wrap="square" rtlCol="0" anchor="ctr"/>
             <a:lstStyle/>
             <a:p>
               <a:pPr algn="ctr"/>
@@ -12417,7 +12238,7 @@
             </a:fontRef>
           </p:style>
           <p:txBody>
-            <a:bodyPr vert="vert" wrap="square" rtlCol="0" anchor="ctr"/>
+            <a:bodyPr wrap="square" rtlCol="0" anchor="ctr"/>
             <a:lstStyle/>
             <a:p>
               <a:pPr algn="ctr"/>
@@ -12478,7 +12299,7 @@
             </a:fontRef>
           </p:style>
           <p:txBody>
-            <a:bodyPr vert="vert" wrap="square" rtlCol="0" anchor="ctr"/>
+            <a:bodyPr wrap="square" rtlCol="0" anchor="ctr"/>
             <a:lstStyle/>
             <a:p>
               <a:pPr algn="ctr"/>
@@ -12539,7 +12360,7 @@
             </a:fontRef>
           </p:style>
           <p:txBody>
-            <a:bodyPr vert="vert" wrap="square" rtlCol="0" anchor="ctr"/>
+            <a:bodyPr wrap="square" rtlCol="0" anchor="ctr"/>
             <a:lstStyle/>
             <a:p>
               <a:pPr algn="ctr"/>
@@ -12600,7 +12421,7 @@
             </a:fontRef>
           </p:style>
           <p:txBody>
-            <a:bodyPr vert="vert" wrap="square" rtlCol="0" anchor="ctr"/>
+            <a:bodyPr wrap="square" rtlCol="0" anchor="ctr"/>
             <a:lstStyle/>
             <a:p>
               <a:pPr algn="ctr"/>
@@ -12661,7 +12482,7 @@
             </a:fontRef>
           </p:style>
           <p:txBody>
-            <a:bodyPr vert="vert" wrap="square" rtlCol="0" anchor="ctr"/>
+            <a:bodyPr wrap="square" rtlCol="0" anchor="ctr"/>
             <a:lstStyle/>
             <a:p>
               <a:pPr algn="ctr"/>
@@ -12722,7 +12543,7 @@
             </a:fontRef>
           </p:style>
           <p:txBody>
-            <a:bodyPr vert="vert" wrap="square" rtlCol="0" anchor="ctr"/>
+            <a:bodyPr wrap="square" rtlCol="0" anchor="ctr"/>
             <a:lstStyle/>
             <a:p>
               <a:pPr algn="ctr"/>
@@ -12783,7 +12604,7 @@
             </a:fontRef>
           </p:style>
           <p:txBody>
-            <a:bodyPr vert="vert" wrap="square" rtlCol="0" anchor="ctr"/>
+            <a:bodyPr wrap="square" rtlCol="0" anchor="ctr"/>
             <a:lstStyle/>
             <a:p>
               <a:pPr algn="ctr"/>
@@ -12844,7 +12665,7 @@
             </a:fontRef>
           </p:style>
           <p:txBody>
-            <a:bodyPr vert="vert" wrap="square" rtlCol="0" anchor="ctr"/>
+            <a:bodyPr wrap="square" rtlCol="0" anchor="ctr"/>
             <a:lstStyle/>
             <a:p>
               <a:pPr algn="ctr"/>
@@ -12905,7 +12726,7 @@
             </a:fontRef>
           </p:style>
           <p:txBody>
-            <a:bodyPr vert="vert" wrap="square" rtlCol="0" anchor="ctr"/>
+            <a:bodyPr wrap="square" rtlCol="0" anchor="ctr"/>
             <a:lstStyle/>
             <a:p>
               <a:pPr algn="ctr"/>
@@ -12966,7 +12787,7 @@
             </a:fontRef>
           </p:style>
           <p:txBody>
-            <a:bodyPr vert="vert" wrap="square" rtlCol="0" anchor="ctr"/>
+            <a:bodyPr wrap="square" rtlCol="0" anchor="ctr"/>
             <a:lstStyle/>
             <a:p>
               <a:pPr algn="ctr"/>
@@ -13027,7 +12848,7 @@
             </a:fontRef>
           </p:style>
           <p:txBody>
-            <a:bodyPr vert="vert" wrap="square" rtlCol="0" anchor="ctr"/>
+            <a:bodyPr wrap="square" rtlCol="0" anchor="ctr"/>
             <a:lstStyle/>
             <a:p>
               <a:pPr algn="ctr"/>
@@ -13088,7 +12909,7 @@
             </a:fontRef>
           </p:style>
           <p:txBody>
-            <a:bodyPr vert="vert" wrap="square" rtlCol="0" anchor="ctr"/>
+            <a:bodyPr wrap="square" rtlCol="0" anchor="ctr"/>
             <a:lstStyle/>
             <a:p>
               <a:pPr algn="ctr"/>
@@ -13149,7 +12970,7 @@
             </a:fontRef>
           </p:style>
           <p:txBody>
-            <a:bodyPr vert="vert" wrap="square" rtlCol="0" anchor="ctr"/>
+            <a:bodyPr wrap="square" rtlCol="0" anchor="ctr"/>
             <a:lstStyle/>
             <a:p>
               <a:pPr algn="ctr"/>
@@ -13210,7 +13031,7 @@
             </a:fontRef>
           </p:style>
           <p:txBody>
-            <a:bodyPr vert="vert" wrap="square" rtlCol="0" anchor="ctr"/>
+            <a:bodyPr wrap="square" rtlCol="0" anchor="ctr"/>
             <a:lstStyle/>
             <a:p>
               <a:pPr algn="ctr"/>
@@ -13271,7 +13092,7 @@
             </a:fontRef>
           </p:style>
           <p:txBody>
-            <a:bodyPr vert="vert" wrap="square" rtlCol="0" anchor="ctr"/>
+            <a:bodyPr wrap="square" rtlCol="0" anchor="ctr"/>
             <a:lstStyle/>
             <a:p>
               <a:pPr algn="ctr"/>
@@ -13332,7 +13153,7 @@
             </a:fontRef>
           </p:style>
           <p:txBody>
-            <a:bodyPr vert="vert" wrap="square" rtlCol="0" anchor="ctr"/>
+            <a:bodyPr wrap="square" rtlCol="0" anchor="ctr"/>
             <a:lstStyle/>
             <a:p>
               <a:pPr algn="ctr"/>
@@ -13393,7 +13214,7 @@
             </a:fontRef>
           </p:style>
           <p:txBody>
-            <a:bodyPr vert="vert" wrap="square" rtlCol="0" anchor="ctr"/>
+            <a:bodyPr wrap="square" rtlCol="0" anchor="ctr"/>
             <a:lstStyle/>
             <a:p>
               <a:pPr algn="ctr"/>
@@ -13454,7 +13275,7 @@
             </a:fontRef>
           </p:style>
           <p:txBody>
-            <a:bodyPr vert="vert" wrap="square" rtlCol="0" anchor="ctr"/>
+            <a:bodyPr wrap="square" rtlCol="0" anchor="ctr"/>
             <a:lstStyle/>
             <a:p>
               <a:pPr algn="ctr"/>
@@ -13515,7 +13336,7 @@
             </a:fontRef>
           </p:style>
           <p:txBody>
-            <a:bodyPr vert="vert" wrap="square" rtlCol="0" anchor="ctr"/>
+            <a:bodyPr wrap="square" rtlCol="0" anchor="ctr"/>
             <a:lstStyle/>
             <a:p>
               <a:pPr algn="ctr"/>
@@ -13576,7 +13397,7 @@
             </a:fontRef>
           </p:style>
           <p:txBody>
-            <a:bodyPr vert="vert" wrap="square" rtlCol="0" anchor="ctr"/>
+            <a:bodyPr wrap="square" rtlCol="0" anchor="ctr"/>
             <a:lstStyle/>
             <a:p>
               <a:pPr algn="ctr"/>
@@ -13637,7 +13458,7 @@
             </a:fontRef>
           </p:style>
           <p:txBody>
-            <a:bodyPr vert="vert" wrap="square" rtlCol="0" anchor="ctr"/>
+            <a:bodyPr wrap="square" rtlCol="0" anchor="ctr"/>
             <a:lstStyle/>
             <a:p>
               <a:pPr algn="ctr"/>
@@ -13668,8 +13489,8 @@
           </p:nvSpPr>
           <p:spPr>
             <a:xfrm>
-              <a:off x="6807716" y="1045656"/>
-              <a:ext cx="461665" cy="553998"/>
+              <a:off x="6623050" y="1284208"/>
+              <a:ext cx="646331" cy="369332"/>
             </a:xfrm>
             <a:prstGeom prst="rect">
               <a:avLst/>
@@ -13677,7 +13498,7 @@
             <a:noFill/>
           </p:spPr>
           <p:txBody>
-            <a:bodyPr vert="vert" wrap="none" rtlCol="0">
+            <a:bodyPr wrap="none" rtlCol="0">
               <a:spAutoFit/>
             </a:bodyPr>
             <a:lstStyle/>
@@ -13706,8 +13527,8 @@
           </p:nvSpPr>
           <p:spPr>
             <a:xfrm>
-              <a:off x="7572852" y="1284208"/>
-              <a:ext cx="461665" cy="315151"/>
+              <a:off x="7627033" y="1284208"/>
+              <a:ext cx="407484" cy="369332"/>
             </a:xfrm>
             <a:prstGeom prst="rect">
               <a:avLst/>
@@ -13715,7 +13536,7 @@
             <a:noFill/>
           </p:spPr>
           <p:txBody>
-            <a:bodyPr vert="vert" wrap="none" rtlCol="0">
+            <a:bodyPr wrap="none" rtlCol="0">
               <a:spAutoFit/>
             </a:bodyPr>
             <a:lstStyle/>
@@ -14774,7 +14595,7 @@
           <p:nvPr/>
         </p:nvGrpSpPr>
         <p:grpSpPr>
-          <a:xfrm rot="16200000">
+          <a:xfrm>
             <a:off x="4396859" y="422791"/>
             <a:ext cx="2816929" cy="5943600"/>
             <a:chOff x="4396859" y="422791"/>
